--- a/2ème partie/MA-18_partie2.pptx
+++ b/2ème partie/MA-18_partie2.pptx
@@ -5,7 +5,7 @@
     <p:sldMasterId id="2147483648" r:id="rId1"/>
   </p:sldMasterIdLst>
   <p:notesMasterIdLst>
-    <p:notesMasterId r:id="rId16"/>
+    <p:notesMasterId r:id="rId20"/>
   </p:notesMasterIdLst>
   <p:sldIdLst>
     <p:sldId id="256" r:id="rId2"/>
@@ -21,7 +21,11 @@
     <p:sldId id="271" r:id="rId12"/>
     <p:sldId id="263" r:id="rId13"/>
     <p:sldId id="262" r:id="rId14"/>
-    <p:sldId id="265" r:id="rId15"/>
+    <p:sldId id="272" r:id="rId15"/>
+    <p:sldId id="258" r:id="rId16"/>
+    <p:sldId id="273" r:id="rId17"/>
+    <p:sldId id="274" r:id="rId18"/>
+    <p:sldId id="265" r:id="rId19"/>
   </p:sldIdLst>
   <p:sldSz cx="12192000" cy="6858000"/>
   <p:notesSz cx="6858000" cy="9144000"/>
@@ -126,17 +130,530 @@
 <file path=ppt/revisionInfo.xml><?xml version="1.0" encoding="utf-8"?>
 <p1510:revInfo xmlns:a="http://schemas.openxmlformats.org/drawingml/2006/main" xmlns:r="http://schemas.openxmlformats.org/officeDocument/2006/relationships" xmlns:p1510="http://schemas.microsoft.com/office/powerpoint/2015/10/main">
   <p1510:revLst>
-    <p1510:client id="{54C8FE82-A788-45DB-8921-620F23D72FFB}" v="12" dt="2026-03-16T17:40:23.548"/>
-    <p1510:client id="{743A19DA-8D9B-445A-898E-98D128FE76ED}" v="615" dt="2026-03-16T15:03:13.712"/>
-    <p1510:client id="{A48A2BAB-8EA2-4ACB-ACDD-B96D76947077}" v="156" dt="2026-03-16T15:07:08.768"/>
-    <p1510:client id="{D1E192D7-E035-457F-BC66-2229E29AD3DF}" v="613" dt="2026-03-16T15:33:35.813"/>
-    <p1510:client id="{D766E821-A40D-446E-A480-3842B2225CB4}" v="18" dt="2026-03-16T14:30:41.252"/>
+    <p1510:client id="{5766D540-4E6B-49C7-B184-AC08FD86EB07}" v="524" dt="2026-03-23T07:00:07.963"/>
+    <p1510:client id="{A48A2BAB-8EA2-4ACB-ACDD-B96D76947077}" v="16" dt="2026-03-23T07:35:35.121"/>
+    <p1510:client id="{D1E192D7-E035-457F-BC66-2229E29AD3DF}" v="2" dt="2026-03-23T07:39:04.179"/>
   </p1510:revLst>
 </p1510:revInfo>
 </file>
 
 <file path=ppt/changesInfos/changesInfo1.xml><?xml version="1.0" encoding="utf-8"?>
 <pc:chgInfo xmlns:a="http://schemas.openxmlformats.org/drawingml/2006/main" xmlns:r="http://schemas.openxmlformats.org/officeDocument/2006/relationships" xmlns:ac="http://schemas.microsoft.com/office/drawing/2013/main/command" xmlns:pc="http://schemas.microsoft.com/office/powerpoint/2013/main/command">
+  <pc:docChgLst>
+    <pc:chgData name="Jean-Christophe Serrano" userId="73106b23-ce21-4623-a757-4fcfeb57a141" providerId="ADAL" clId="{4188578B-42E3-4D2B-A026-117DFA88464C}"/>
+    <pc:docChg chg="undo custSel addSld delSld modSld sldOrd">
+      <pc:chgData name="Jean-Christophe Serrano" userId="73106b23-ce21-4623-a757-4fcfeb57a141" providerId="ADAL" clId="{4188578B-42E3-4D2B-A026-117DFA88464C}" dt="2026-03-23T07:39:04.179" v="630" actId="680"/>
+      <pc:docMkLst>
+        <pc:docMk/>
+      </pc:docMkLst>
+      <pc:sldChg chg="addSp modSp mod setBg addAnim setClrOvrMap">
+        <pc:chgData name="Jean-Christophe Serrano" userId="73106b23-ce21-4623-a757-4fcfeb57a141" providerId="ADAL" clId="{4188578B-42E3-4D2B-A026-117DFA88464C}" dt="2026-03-16T08:33:30.187" v="171" actId="1076"/>
+        <pc:sldMkLst>
+          <pc:docMk/>
+          <pc:sldMk cId="1623985094" sldId="256"/>
+        </pc:sldMkLst>
+        <pc:spChg chg="mod">
+          <ac:chgData name="Jean-Christophe Serrano" userId="73106b23-ce21-4623-a757-4fcfeb57a141" providerId="ADAL" clId="{4188578B-42E3-4D2B-A026-117DFA88464C}" dt="2026-03-16T08:33:30.187" v="171" actId="1076"/>
+          <ac:spMkLst>
+            <pc:docMk/>
+            <pc:sldMk cId="1623985094" sldId="256"/>
+            <ac:spMk id="2" creationId="{BAB67F4C-9EA4-9664-DDE9-DC766CC155D3}"/>
+          </ac:spMkLst>
+        </pc:spChg>
+        <pc:spChg chg="mod">
+          <ac:chgData name="Jean-Christophe Serrano" userId="73106b23-ce21-4623-a757-4fcfeb57a141" providerId="ADAL" clId="{4188578B-42E3-4D2B-A026-117DFA88464C}" dt="2026-03-16T08:32:51.926" v="169" actId="20577"/>
+          <ac:spMkLst>
+            <pc:docMk/>
+            <pc:sldMk cId="1623985094" sldId="256"/>
+            <ac:spMk id="3" creationId="{2EDA3886-903B-DE31-1125-593DCBF51C66}"/>
+          </ac:spMkLst>
+        </pc:spChg>
+        <pc:spChg chg="add">
+          <ac:chgData name="Jean-Christophe Serrano" userId="73106b23-ce21-4623-a757-4fcfeb57a141" providerId="ADAL" clId="{4188578B-42E3-4D2B-A026-117DFA88464C}" dt="2026-03-16T08:31:45.370" v="91" actId="26606"/>
+          <ac:spMkLst>
+            <pc:docMk/>
+            <pc:sldMk cId="1623985094" sldId="256"/>
+            <ac:spMk id="1031" creationId="{71B2258F-86CA-4D4D-8270-BC05FCDEBFB3}"/>
+          </ac:spMkLst>
+        </pc:spChg>
+        <pc:picChg chg="add mod ord">
+          <ac:chgData name="Jean-Christophe Serrano" userId="73106b23-ce21-4623-a757-4fcfeb57a141" providerId="ADAL" clId="{4188578B-42E3-4D2B-A026-117DFA88464C}" dt="2026-03-16T08:31:45.370" v="91" actId="26606"/>
+          <ac:picMkLst>
+            <pc:docMk/>
+            <pc:sldMk cId="1623985094" sldId="256"/>
+            <ac:picMk id="1026" creationId="{245325C8-7E10-30A8-0DE1-94F4EB3F81FB}"/>
+          </ac:picMkLst>
+        </pc:picChg>
+      </pc:sldChg>
+      <pc:sldChg chg="modSp new mod">
+        <pc:chgData name="Jean-Christophe Serrano" userId="73106b23-ce21-4623-a757-4fcfeb57a141" providerId="ADAL" clId="{4188578B-42E3-4D2B-A026-117DFA88464C}" dt="2026-03-16T14:11:11.658" v="267" actId="27636"/>
+        <pc:sldMkLst>
+          <pc:docMk/>
+          <pc:sldMk cId="1760741132" sldId="257"/>
+        </pc:sldMkLst>
+        <pc:spChg chg="mod">
+          <ac:chgData name="Jean-Christophe Serrano" userId="73106b23-ce21-4623-a757-4fcfeb57a141" providerId="ADAL" clId="{4188578B-42E3-4D2B-A026-117DFA88464C}" dt="2026-03-16T14:11:05.222" v="265" actId="255"/>
+          <ac:spMkLst>
+            <pc:docMk/>
+            <pc:sldMk cId="1760741132" sldId="257"/>
+            <ac:spMk id="2" creationId="{E4041585-2273-DCC1-7137-9CF9AD0F2A06}"/>
+          </ac:spMkLst>
+        </pc:spChg>
+      </pc:sldChg>
+      <pc:sldChg chg="addSp delSp modSp mod">
+        <pc:chgData name="Jean-Christophe Serrano" userId="73106b23-ce21-4623-a757-4fcfeb57a141" providerId="ADAL" clId="{4188578B-42E3-4D2B-A026-117DFA88464C}" dt="2026-03-16T14:53:30.911" v="553" actId="255"/>
+        <pc:sldMkLst>
+          <pc:docMk/>
+          <pc:sldMk cId="506015394" sldId="259"/>
+        </pc:sldMkLst>
+        <pc:spChg chg="mod">
+          <ac:chgData name="Jean-Christophe Serrano" userId="73106b23-ce21-4623-a757-4fcfeb57a141" providerId="ADAL" clId="{4188578B-42E3-4D2B-A026-117DFA88464C}" dt="2026-03-16T14:53:30.911" v="553" actId="255"/>
+          <ac:spMkLst>
+            <pc:docMk/>
+            <pc:sldMk cId="506015394" sldId="259"/>
+            <ac:spMk id="2" creationId="{4E56D5A8-E6E0-922B-2956-0F76551EF8CF}"/>
+          </ac:spMkLst>
+        </pc:spChg>
+        <pc:spChg chg="mod">
+          <ac:chgData name="Jean-Christophe Serrano" userId="73106b23-ce21-4623-a757-4fcfeb57a141" providerId="ADAL" clId="{4188578B-42E3-4D2B-A026-117DFA88464C}" dt="2026-03-16T09:21:37.843" v="262"/>
+          <ac:spMkLst>
+            <pc:docMk/>
+            <pc:sldMk cId="506015394" sldId="259"/>
+            <ac:spMk id="3" creationId="{221C2E44-5722-350A-AEDC-E0DDD904B450}"/>
+          </ac:spMkLst>
+        </pc:spChg>
+      </pc:sldChg>
+      <pc:sldChg chg="addSp delSp modSp mod setBg setClrOvrMap">
+        <pc:chgData name="Jean-Christophe Serrano" userId="73106b23-ce21-4623-a757-4fcfeb57a141" providerId="ADAL" clId="{4188578B-42E3-4D2B-A026-117DFA88464C}" dt="2026-03-16T14:53:20.287" v="552" actId="255"/>
+        <pc:sldMkLst>
+          <pc:docMk/>
+          <pc:sldMk cId="3942389268" sldId="260"/>
+        </pc:sldMkLst>
+        <pc:spChg chg="mod ord">
+          <ac:chgData name="Jean-Christophe Serrano" userId="73106b23-ce21-4623-a757-4fcfeb57a141" providerId="ADAL" clId="{4188578B-42E3-4D2B-A026-117DFA88464C}" dt="2026-03-16T14:53:20.287" v="552" actId="255"/>
+          <ac:spMkLst>
+            <pc:docMk/>
+            <pc:sldMk cId="3942389268" sldId="260"/>
+            <ac:spMk id="2" creationId="{E0EC3B95-F112-4924-81EB-C9C6D4002BB3}"/>
+          </ac:spMkLst>
+        </pc:spChg>
+        <pc:spChg chg="mod ord">
+          <ac:chgData name="Jean-Christophe Serrano" userId="73106b23-ce21-4623-a757-4fcfeb57a141" providerId="ADAL" clId="{4188578B-42E3-4D2B-A026-117DFA88464C}" dt="2026-03-16T14:53:15.072" v="551" actId="255"/>
+          <ac:spMkLst>
+            <pc:docMk/>
+            <pc:sldMk cId="3942389268" sldId="260"/>
+            <ac:spMk id="3" creationId="{1870A98D-D40D-2D82-D609-A4CA538610F5}"/>
+          </ac:spMkLst>
+        </pc:spChg>
+        <pc:spChg chg="add">
+          <ac:chgData name="Jean-Christophe Serrano" userId="73106b23-ce21-4623-a757-4fcfeb57a141" providerId="ADAL" clId="{4188578B-42E3-4D2B-A026-117DFA88464C}" dt="2026-03-16T14:52:59.984" v="548" actId="26606"/>
+          <ac:spMkLst>
+            <pc:docMk/>
+            <pc:sldMk cId="3942389268" sldId="260"/>
+            <ac:spMk id="1050" creationId="{7C432AFE-B3D2-4BFF-BF8F-96C27AFF1AC7}"/>
+          </ac:spMkLst>
+        </pc:spChg>
+        <pc:spChg chg="add">
+          <ac:chgData name="Jean-Christophe Serrano" userId="73106b23-ce21-4623-a757-4fcfeb57a141" providerId="ADAL" clId="{4188578B-42E3-4D2B-A026-117DFA88464C}" dt="2026-03-16T14:52:59.984" v="548" actId="26606"/>
+          <ac:spMkLst>
+            <pc:docMk/>
+            <pc:sldMk cId="3942389268" sldId="260"/>
+            <ac:spMk id="1055" creationId="{AF2F604E-43BE-4DC3-B983-E071523364F8}"/>
+          </ac:spMkLst>
+        </pc:spChg>
+        <pc:spChg chg="add">
+          <ac:chgData name="Jean-Christophe Serrano" userId="73106b23-ce21-4623-a757-4fcfeb57a141" providerId="ADAL" clId="{4188578B-42E3-4D2B-A026-117DFA88464C}" dt="2026-03-16T14:52:59.984" v="548" actId="26606"/>
+          <ac:spMkLst>
+            <pc:docMk/>
+            <pc:sldMk cId="3942389268" sldId="260"/>
+            <ac:spMk id="1057" creationId="{08C9B587-E65E-4B52-B37C-ABEBB6E87928}"/>
+          </ac:spMkLst>
+        </pc:spChg>
+        <pc:picChg chg="add mod ord">
+          <ac:chgData name="Jean-Christophe Serrano" userId="73106b23-ce21-4623-a757-4fcfeb57a141" providerId="ADAL" clId="{4188578B-42E3-4D2B-A026-117DFA88464C}" dt="2026-03-16T14:52:59.984" v="548" actId="26606"/>
+          <ac:picMkLst>
+            <pc:docMk/>
+            <pc:sldMk cId="3942389268" sldId="260"/>
+            <ac:picMk id="1026" creationId="{C2F28E48-DAB2-2512-BFBA-9D69C5633AFE}"/>
+          </ac:picMkLst>
+        </pc:picChg>
+      </pc:sldChg>
+      <pc:sldChg chg="addSp delSp modSp new mod setBg">
+        <pc:chgData name="Jean-Christophe Serrano" userId="73106b23-ce21-4623-a757-4fcfeb57a141" providerId="ADAL" clId="{4188578B-42E3-4D2B-A026-117DFA88464C}" dt="2026-03-16T14:53:52.203" v="557" actId="1076"/>
+        <pc:sldMkLst>
+          <pc:docMk/>
+          <pc:sldMk cId="2333712965" sldId="261"/>
+        </pc:sldMkLst>
+        <pc:spChg chg="mod">
+          <ac:chgData name="Jean-Christophe Serrano" userId="73106b23-ce21-4623-a757-4fcfeb57a141" providerId="ADAL" clId="{4188578B-42E3-4D2B-A026-117DFA88464C}" dt="2026-03-16T14:53:38.385" v="554" actId="26606"/>
+          <ac:spMkLst>
+            <pc:docMk/>
+            <pc:sldMk cId="2333712965" sldId="261"/>
+            <ac:spMk id="2" creationId="{27530EA9-6749-52D1-CC8D-68EDC9690969}"/>
+          </ac:spMkLst>
+        </pc:spChg>
+        <pc:picChg chg="add mod ord">
+          <ac:chgData name="Jean-Christophe Serrano" userId="73106b23-ce21-4623-a757-4fcfeb57a141" providerId="ADAL" clId="{4188578B-42E3-4D2B-A026-117DFA88464C}" dt="2026-03-16T14:53:52.203" v="557" actId="1076"/>
+          <ac:picMkLst>
+            <pc:docMk/>
+            <pc:sldMk cId="2333712965" sldId="261"/>
+            <ac:picMk id="7" creationId="{D6B9E4ED-3A9F-B072-F2D4-936D7D84590D}"/>
+          </ac:picMkLst>
+        </pc:picChg>
+        <pc:cxnChg chg="add">
+          <ac:chgData name="Jean-Christophe Serrano" userId="73106b23-ce21-4623-a757-4fcfeb57a141" providerId="ADAL" clId="{4188578B-42E3-4D2B-A026-117DFA88464C}" dt="2026-03-16T14:53:38.385" v="554" actId="26606"/>
+          <ac:cxnSpMkLst>
+            <pc:docMk/>
+            <pc:sldMk cId="2333712965" sldId="261"/>
+            <ac:cxnSpMk id="12" creationId="{192712F8-36FA-35DF-0CE8-4098D93322A3}"/>
+          </ac:cxnSpMkLst>
+        </pc:cxnChg>
+        <pc:cxnChg chg="add">
+          <ac:chgData name="Jean-Christophe Serrano" userId="73106b23-ce21-4623-a757-4fcfeb57a141" providerId="ADAL" clId="{4188578B-42E3-4D2B-A026-117DFA88464C}" dt="2026-03-16T14:53:38.385" v="554" actId="26606"/>
+          <ac:cxnSpMkLst>
+            <pc:docMk/>
+            <pc:sldMk cId="2333712965" sldId="261"/>
+            <ac:cxnSpMk id="14" creationId="{AF9469B9-6468-5B6A-E832-8D4590388432}"/>
+          </ac:cxnSpMkLst>
+        </pc:cxnChg>
+      </pc:sldChg>
+      <pc:sldChg chg="addSp delSp modSp mod">
+        <pc:chgData name="Jean-Christophe Serrano" userId="73106b23-ce21-4623-a757-4fcfeb57a141" providerId="ADAL" clId="{4188578B-42E3-4D2B-A026-117DFA88464C}" dt="2026-03-16T15:13:39.040" v="593" actId="22"/>
+        <pc:sldMkLst>
+          <pc:docMk/>
+          <pc:sldMk cId="1787426261" sldId="262"/>
+        </pc:sldMkLst>
+      </pc:sldChg>
+      <pc:sldChg chg="addSp delSp modSp new mod setBg addAnim delAnim setClrOvrMap">
+        <pc:chgData name="Jean-Christophe Serrano" userId="73106b23-ce21-4623-a757-4fcfeb57a141" providerId="ADAL" clId="{4188578B-42E3-4D2B-A026-117DFA88464C}" dt="2026-03-16T15:33:35.813" v="628" actId="27636"/>
+        <pc:sldMkLst>
+          <pc:docMk/>
+          <pc:sldMk cId="454465971" sldId="266"/>
+        </pc:sldMkLst>
+        <pc:spChg chg="add del mod">
+          <ac:chgData name="Jean-Christophe Serrano" userId="73106b23-ce21-4623-a757-4fcfeb57a141" providerId="ADAL" clId="{4188578B-42E3-4D2B-A026-117DFA88464C}" dt="2026-03-16T14:49:40.399" v="544" actId="26606"/>
+          <ac:spMkLst>
+            <pc:docMk/>
+            <pc:sldMk cId="454465971" sldId="266"/>
+            <ac:spMk id="2" creationId="{C14D521E-D0AF-01F2-23E4-C396C1798FB7}"/>
+          </ac:spMkLst>
+        </pc:spChg>
+        <pc:spChg chg="mod ord">
+          <ac:chgData name="Jean-Christophe Serrano" userId="73106b23-ce21-4623-a757-4fcfeb57a141" providerId="ADAL" clId="{4188578B-42E3-4D2B-A026-117DFA88464C}" dt="2026-03-16T15:33:35.813" v="628" actId="27636"/>
+          <ac:spMkLst>
+            <pc:docMk/>
+            <pc:sldMk cId="454465971" sldId="266"/>
+            <ac:spMk id="3" creationId="{EC8AD011-E0A0-F298-4635-208779C049F3}"/>
+          </ac:spMkLst>
+        </pc:spChg>
+        <pc:spChg chg="add">
+          <ac:chgData name="Jean-Christophe Serrano" userId="73106b23-ce21-4623-a757-4fcfeb57a141" providerId="ADAL" clId="{4188578B-42E3-4D2B-A026-117DFA88464C}" dt="2026-03-16T14:49:40.399" v="544" actId="26606"/>
+          <ac:spMkLst>
+            <pc:docMk/>
+            <pc:sldMk cId="454465971" sldId="266"/>
+            <ac:spMk id="2061" creationId="{71B2258F-86CA-4D4D-8270-BC05FCDEBFB3}"/>
+          </ac:spMkLst>
+        </pc:spChg>
+        <pc:picChg chg="add mod ord">
+          <ac:chgData name="Jean-Christophe Serrano" userId="73106b23-ce21-4623-a757-4fcfeb57a141" providerId="ADAL" clId="{4188578B-42E3-4D2B-A026-117DFA88464C}" dt="2026-03-16T14:49:40.399" v="544" actId="26606"/>
+          <ac:picMkLst>
+            <pc:docMk/>
+            <pc:sldMk cId="454465971" sldId="266"/>
+            <ac:picMk id="2052" creationId="{595BD9EE-2879-06EC-4027-896DBC18BAD5}"/>
+          </ac:picMkLst>
+        </pc:picChg>
+      </pc:sldChg>
+      <pc:sldChg chg="addSp delSp modSp new mod setBg">
+        <pc:chgData name="Jean-Christophe Serrano" userId="73106b23-ce21-4623-a757-4fcfeb57a141" providerId="ADAL" clId="{4188578B-42E3-4D2B-A026-117DFA88464C}" dt="2026-03-16T15:00:46.113" v="575" actId="255"/>
+        <pc:sldMkLst>
+          <pc:docMk/>
+          <pc:sldMk cId="583398316" sldId="267"/>
+        </pc:sldMkLst>
+        <pc:spChg chg="mod">
+          <ac:chgData name="Jean-Christophe Serrano" userId="73106b23-ce21-4623-a757-4fcfeb57a141" providerId="ADAL" clId="{4188578B-42E3-4D2B-A026-117DFA88464C}" dt="2026-03-16T15:00:39.761" v="574" actId="255"/>
+          <ac:spMkLst>
+            <pc:docMk/>
+            <pc:sldMk cId="583398316" sldId="267"/>
+            <ac:spMk id="2" creationId="{E71F5456-04F7-A51B-EBE9-FF87983F81FE}"/>
+          </ac:spMkLst>
+        </pc:spChg>
+        <pc:spChg chg="mod">
+          <ac:chgData name="Jean-Christophe Serrano" userId="73106b23-ce21-4623-a757-4fcfeb57a141" providerId="ADAL" clId="{4188578B-42E3-4D2B-A026-117DFA88464C}" dt="2026-03-16T15:00:46.113" v="575" actId="255"/>
+          <ac:spMkLst>
+            <pc:docMk/>
+            <pc:sldMk cId="583398316" sldId="267"/>
+            <ac:spMk id="3" creationId="{62D05BA1-EBB2-8356-B4CB-D1D35BE01ED9}"/>
+          </ac:spMkLst>
+        </pc:spChg>
+        <pc:spChg chg="add">
+          <ac:chgData name="Jean-Christophe Serrano" userId="73106b23-ce21-4623-a757-4fcfeb57a141" providerId="ADAL" clId="{4188578B-42E3-4D2B-A026-117DFA88464C}" dt="2026-03-16T15:00:29.972" v="573" actId="26606"/>
+          <ac:spMkLst>
+            <pc:docMk/>
+            <pc:sldMk cId="583398316" sldId="267"/>
+            <ac:spMk id="14" creationId="{7C432AFE-B3D2-4BFF-BF8F-96C27AFF1AC7}"/>
+          </ac:spMkLst>
+        </pc:spChg>
+        <pc:spChg chg="add">
+          <ac:chgData name="Jean-Christophe Serrano" userId="73106b23-ce21-4623-a757-4fcfeb57a141" providerId="ADAL" clId="{4188578B-42E3-4D2B-A026-117DFA88464C}" dt="2026-03-16T15:00:29.972" v="573" actId="26606"/>
+          <ac:spMkLst>
+            <pc:docMk/>
+            <pc:sldMk cId="583398316" sldId="267"/>
+            <ac:spMk id="16" creationId="{AF2F604E-43BE-4DC3-B983-E071523364F8}"/>
+          </ac:spMkLst>
+        </pc:spChg>
+        <pc:spChg chg="add">
+          <ac:chgData name="Jean-Christophe Serrano" userId="73106b23-ce21-4623-a757-4fcfeb57a141" providerId="ADAL" clId="{4188578B-42E3-4D2B-A026-117DFA88464C}" dt="2026-03-16T15:00:29.972" v="573" actId="26606"/>
+          <ac:spMkLst>
+            <pc:docMk/>
+            <pc:sldMk cId="583398316" sldId="267"/>
+            <ac:spMk id="18" creationId="{08C9B587-E65E-4B52-B37C-ABEBB6E87928}"/>
+          </ac:spMkLst>
+        </pc:spChg>
+        <pc:picChg chg="add mod ord">
+          <ac:chgData name="Jean-Christophe Serrano" userId="73106b23-ce21-4623-a757-4fcfeb57a141" providerId="ADAL" clId="{4188578B-42E3-4D2B-A026-117DFA88464C}" dt="2026-03-16T15:00:29.972" v="573" actId="26606"/>
+          <ac:picMkLst>
+            <pc:docMk/>
+            <pc:sldMk cId="583398316" sldId="267"/>
+            <ac:picMk id="9" creationId="{78261043-6369-4E71-3892-5BC5B66E53E4}"/>
+          </ac:picMkLst>
+        </pc:picChg>
+      </pc:sldChg>
+      <pc:sldChg chg="addSp delSp modSp new mod setBg">
+        <pc:chgData name="Jean-Christophe Serrano" userId="73106b23-ce21-4623-a757-4fcfeb57a141" providerId="ADAL" clId="{4188578B-42E3-4D2B-A026-117DFA88464C}" dt="2026-03-16T15:06:12.893" v="589" actId="255"/>
+        <pc:sldMkLst>
+          <pc:docMk/>
+          <pc:sldMk cId="2851429643" sldId="268"/>
+        </pc:sldMkLst>
+        <pc:spChg chg="mod">
+          <ac:chgData name="Jean-Christophe Serrano" userId="73106b23-ce21-4623-a757-4fcfeb57a141" providerId="ADAL" clId="{4188578B-42E3-4D2B-A026-117DFA88464C}" dt="2026-03-16T15:06:08.342" v="588" actId="255"/>
+          <ac:spMkLst>
+            <pc:docMk/>
+            <pc:sldMk cId="2851429643" sldId="268"/>
+            <ac:spMk id="2" creationId="{631C4BE3-5A67-D135-9AC4-CC44A608D40F}"/>
+          </ac:spMkLst>
+        </pc:spChg>
+        <pc:spChg chg="mod">
+          <ac:chgData name="Jean-Christophe Serrano" userId="73106b23-ce21-4623-a757-4fcfeb57a141" providerId="ADAL" clId="{4188578B-42E3-4D2B-A026-117DFA88464C}" dt="2026-03-16T15:06:12.893" v="589" actId="255"/>
+          <ac:spMkLst>
+            <pc:docMk/>
+            <pc:sldMk cId="2851429643" sldId="268"/>
+            <ac:spMk id="3" creationId="{63D20B42-5F64-B9E1-51FB-CD795EAF44CC}"/>
+          </ac:spMkLst>
+        </pc:spChg>
+        <pc:spChg chg="add">
+          <ac:chgData name="Jean-Christophe Serrano" userId="73106b23-ce21-4623-a757-4fcfeb57a141" providerId="ADAL" clId="{4188578B-42E3-4D2B-A026-117DFA88464C}" dt="2026-03-16T15:05:53.151" v="587" actId="26606"/>
+          <ac:spMkLst>
+            <pc:docMk/>
+            <pc:sldMk cId="2851429643" sldId="268"/>
+            <ac:spMk id="4105" creationId="{7C432AFE-B3D2-4BFF-BF8F-96C27AFF1AC7}"/>
+          </ac:spMkLst>
+        </pc:spChg>
+        <pc:spChg chg="add">
+          <ac:chgData name="Jean-Christophe Serrano" userId="73106b23-ce21-4623-a757-4fcfeb57a141" providerId="ADAL" clId="{4188578B-42E3-4D2B-A026-117DFA88464C}" dt="2026-03-16T15:05:53.151" v="587" actId="26606"/>
+          <ac:spMkLst>
+            <pc:docMk/>
+            <pc:sldMk cId="2851429643" sldId="268"/>
+            <ac:spMk id="4107" creationId="{AF2F604E-43BE-4DC3-B983-E071523364F8}"/>
+          </ac:spMkLst>
+        </pc:spChg>
+        <pc:spChg chg="add">
+          <ac:chgData name="Jean-Christophe Serrano" userId="73106b23-ce21-4623-a757-4fcfeb57a141" providerId="ADAL" clId="{4188578B-42E3-4D2B-A026-117DFA88464C}" dt="2026-03-16T15:05:53.151" v="587" actId="26606"/>
+          <ac:spMkLst>
+            <pc:docMk/>
+            <pc:sldMk cId="2851429643" sldId="268"/>
+            <ac:spMk id="4109" creationId="{08C9B587-E65E-4B52-B37C-ABEBB6E87928}"/>
+          </ac:spMkLst>
+        </pc:spChg>
+        <pc:picChg chg="add mod ord">
+          <ac:chgData name="Jean-Christophe Serrano" userId="73106b23-ce21-4623-a757-4fcfeb57a141" providerId="ADAL" clId="{4188578B-42E3-4D2B-A026-117DFA88464C}" dt="2026-03-16T15:05:53.151" v="587" actId="26606"/>
+          <ac:picMkLst>
+            <pc:docMk/>
+            <pc:sldMk cId="2851429643" sldId="268"/>
+            <ac:picMk id="4100" creationId="{817FD8BC-2BD3-432A-B40C-F692220329AF}"/>
+          </ac:picMkLst>
+        </pc:picChg>
+      </pc:sldChg>
+      <pc:sldChg chg="addSp modSp new mod setBg">
+        <pc:chgData name="Jean-Christophe Serrano" userId="73106b23-ce21-4623-a757-4fcfeb57a141" providerId="ADAL" clId="{4188578B-42E3-4D2B-A026-117DFA88464C}" dt="2026-03-16T15:25:29.220" v="605" actId="255"/>
+        <pc:sldMkLst>
+          <pc:docMk/>
+          <pc:sldMk cId="1401128112" sldId="269"/>
+        </pc:sldMkLst>
+        <pc:spChg chg="mod">
+          <ac:chgData name="Jean-Christophe Serrano" userId="73106b23-ce21-4623-a757-4fcfeb57a141" providerId="ADAL" clId="{4188578B-42E3-4D2B-A026-117DFA88464C}" dt="2026-03-16T15:25:23.920" v="604" actId="255"/>
+          <ac:spMkLst>
+            <pc:docMk/>
+            <pc:sldMk cId="1401128112" sldId="269"/>
+            <ac:spMk id="2" creationId="{814DECF0-73AB-6298-5C23-1B750C189EF1}"/>
+          </ac:spMkLst>
+        </pc:spChg>
+        <pc:spChg chg="mod">
+          <ac:chgData name="Jean-Christophe Serrano" userId="73106b23-ce21-4623-a757-4fcfeb57a141" providerId="ADAL" clId="{4188578B-42E3-4D2B-A026-117DFA88464C}" dt="2026-03-16T15:25:29.220" v="605" actId="255"/>
+          <ac:spMkLst>
+            <pc:docMk/>
+            <pc:sldMk cId="1401128112" sldId="269"/>
+            <ac:spMk id="3" creationId="{5443BAAB-A06E-951F-91F8-B8F9DB8A8D8D}"/>
+          </ac:spMkLst>
+        </pc:spChg>
+        <pc:spChg chg="add">
+          <ac:chgData name="Jean-Christophe Serrano" userId="73106b23-ce21-4623-a757-4fcfeb57a141" providerId="ADAL" clId="{4188578B-42E3-4D2B-A026-117DFA88464C}" dt="2026-03-16T15:25:10.574" v="603" actId="26606"/>
+          <ac:spMkLst>
+            <pc:docMk/>
+            <pc:sldMk cId="1401128112" sldId="269"/>
+            <ac:spMk id="13" creationId="{7C432AFE-B3D2-4BFF-BF8F-96C27AFF1AC7}"/>
+          </ac:spMkLst>
+        </pc:spChg>
+        <pc:spChg chg="add">
+          <ac:chgData name="Jean-Christophe Serrano" userId="73106b23-ce21-4623-a757-4fcfeb57a141" providerId="ADAL" clId="{4188578B-42E3-4D2B-A026-117DFA88464C}" dt="2026-03-16T15:25:10.574" v="603" actId="26606"/>
+          <ac:spMkLst>
+            <pc:docMk/>
+            <pc:sldMk cId="1401128112" sldId="269"/>
+            <ac:spMk id="15" creationId="{AF2F604E-43BE-4DC3-B983-E071523364F8}"/>
+          </ac:spMkLst>
+        </pc:spChg>
+        <pc:spChg chg="add">
+          <ac:chgData name="Jean-Christophe Serrano" userId="73106b23-ce21-4623-a757-4fcfeb57a141" providerId="ADAL" clId="{4188578B-42E3-4D2B-A026-117DFA88464C}" dt="2026-03-16T15:25:10.574" v="603" actId="26606"/>
+          <ac:spMkLst>
+            <pc:docMk/>
+            <pc:sldMk cId="1401128112" sldId="269"/>
+            <ac:spMk id="17" creationId="{08C9B587-E65E-4B52-B37C-ABEBB6E87928}"/>
+          </ac:spMkLst>
+        </pc:spChg>
+        <pc:picChg chg="add mod ord">
+          <ac:chgData name="Jean-Christophe Serrano" userId="73106b23-ce21-4623-a757-4fcfeb57a141" providerId="ADAL" clId="{4188578B-42E3-4D2B-A026-117DFA88464C}" dt="2026-03-16T15:25:10.574" v="603" actId="26606"/>
+          <ac:picMkLst>
+            <pc:docMk/>
+            <pc:sldMk cId="1401128112" sldId="269"/>
+            <ac:picMk id="8" creationId="{FC5731C2-BF2B-193F-7BAD-BCEE933D2132}"/>
+          </ac:picMkLst>
+        </pc:picChg>
+      </pc:sldChg>
+      <pc:sldChg chg="new del">
+        <pc:chgData name="Jean-Christophe Serrano" userId="73106b23-ce21-4623-a757-4fcfeb57a141" providerId="ADAL" clId="{4188578B-42E3-4D2B-A026-117DFA88464C}" dt="2026-03-23T07:39:04.179" v="630" actId="680"/>
+        <pc:sldMkLst>
+          <pc:docMk/>
+          <pc:sldMk cId="592093891" sldId="275"/>
+        </pc:sldMkLst>
+      </pc:sldChg>
+    </pc:docChg>
+  </pc:docChgLst>
+  <pc:docChgLst>
+    <pc:chgData name="Dylan Pinto Davide" userId="6a681bae-764f-48de-b341-59cd27edd092" providerId="ADAL" clId="{D8E87E9A-7E9D-4E85-B3B4-E705950A12B6}"/>
+    <pc:docChg chg="modSld">
+      <pc:chgData name="Dylan Pinto Davide" userId="6a681bae-764f-48de-b341-59cd27edd092" providerId="ADAL" clId="{D8E87E9A-7E9D-4E85-B3B4-E705950A12B6}" dt="2026-03-16T14:30:41.252" v="17" actId="9405"/>
+      <pc:docMkLst>
+        <pc:docMk/>
+      </pc:docMkLst>
+      <pc:sldChg chg="addSp delSp modSp mod">
+        <pc:chgData name="Dylan Pinto Davide" userId="6a681bae-764f-48de-b341-59cd27edd092" providerId="ADAL" clId="{D8E87E9A-7E9D-4E85-B3B4-E705950A12B6}" dt="2026-03-16T14:27:50.559" v="13"/>
+        <pc:sldMkLst>
+          <pc:docMk/>
+          <pc:sldMk cId="506015394" sldId="259"/>
+        </pc:sldMkLst>
+      </pc:sldChg>
+      <pc:sldChg chg="addSp mod">
+        <pc:chgData name="Dylan Pinto Davide" userId="6a681bae-764f-48de-b341-59cd27edd092" providerId="ADAL" clId="{D8E87E9A-7E9D-4E85-B3B4-E705950A12B6}" dt="2026-03-16T14:30:41.252" v="17" actId="9405"/>
+        <pc:sldMkLst>
+          <pc:docMk/>
+          <pc:sldMk cId="940697554" sldId="263"/>
+        </pc:sldMkLst>
+      </pc:sldChg>
+    </pc:docChg>
+  </pc:docChgLst>
+  <pc:docChgLst>
+    <pc:chgData name="Oleksii Kamarali" userId="de8324e2-fdf7-4792-9275-2e8816b9f59b" providerId="ADAL" clId="{C0799EF4-FEE2-49D6-9381-FB1629B3C905}"/>
+    <pc:docChg chg="undo custSel addSld delSld modSld sldOrd">
+      <pc:chgData name="Oleksii Kamarali" userId="de8324e2-fdf7-4792-9275-2e8816b9f59b" providerId="ADAL" clId="{C0799EF4-FEE2-49D6-9381-FB1629B3C905}" dt="2026-03-23T07:35:35.121" v="171" actId="20577"/>
+      <pc:docMkLst>
+        <pc:docMk/>
+      </pc:docMkLst>
+      <pc:sldChg chg="modSp mod">
+        <pc:chgData name="Oleksii Kamarali" userId="de8324e2-fdf7-4792-9275-2e8816b9f59b" providerId="ADAL" clId="{C0799EF4-FEE2-49D6-9381-FB1629B3C905}" dt="2026-03-16T14:10:17.638" v="81" actId="20577"/>
+        <pc:sldMkLst>
+          <pc:docMk/>
+          <pc:sldMk cId="1760741132" sldId="257"/>
+        </pc:sldMkLst>
+      </pc:sldChg>
+      <pc:sldChg chg="modNotesTx">
+        <pc:chgData name="Oleksii Kamarali" userId="de8324e2-fdf7-4792-9275-2e8816b9f59b" providerId="ADAL" clId="{C0799EF4-FEE2-49D6-9381-FB1629B3C905}" dt="2026-03-23T07:35:35.121" v="171" actId="20577"/>
+        <pc:sldMkLst>
+          <pc:docMk/>
+          <pc:sldMk cId="1787426261" sldId="262"/>
+        </pc:sldMkLst>
+      </pc:sldChg>
+      <pc:sldChg chg="addSp delSp modSp mod setBg modNotesTx">
+        <pc:chgData name="Oleksii Kamarali" userId="de8324e2-fdf7-4792-9275-2e8816b9f59b" providerId="ADAL" clId="{C0799EF4-FEE2-49D6-9381-FB1629B3C905}" dt="2026-03-16T15:07:08.768" v="156" actId="20577"/>
+        <pc:sldMkLst>
+          <pc:docMk/>
+          <pc:sldMk cId="2370203106" sldId="265"/>
+        </pc:sldMkLst>
+        <pc:spChg chg="mod ord">
+          <ac:chgData name="Oleksii Kamarali" userId="de8324e2-fdf7-4792-9275-2e8816b9f59b" providerId="ADAL" clId="{C0799EF4-FEE2-49D6-9381-FB1629B3C905}" dt="2026-03-16T14:48:12.283" v="154" actId="26606"/>
+          <ac:spMkLst>
+            <pc:docMk/>
+            <pc:sldMk cId="2370203106" sldId="265"/>
+            <ac:spMk id="2" creationId="{991DF873-154E-1107-3B30-F012AF78D6CE}"/>
+          </ac:spMkLst>
+        </pc:spChg>
+        <pc:spChg chg="add mod">
+          <ac:chgData name="Oleksii Kamarali" userId="de8324e2-fdf7-4792-9275-2e8816b9f59b" providerId="ADAL" clId="{C0799EF4-FEE2-49D6-9381-FB1629B3C905}" dt="2026-03-16T14:31:16.942" v="121" actId="14100"/>
+          <ac:spMkLst>
+            <pc:docMk/>
+            <pc:sldMk cId="2370203106" sldId="265"/>
+            <ac:spMk id="5" creationId="{80E66FF3-A71B-A782-7C4A-08950C73AA71}"/>
+          </ac:spMkLst>
+        </pc:spChg>
+        <pc:spChg chg="add del">
+          <ac:chgData name="Oleksii Kamarali" userId="de8324e2-fdf7-4792-9275-2e8816b9f59b" providerId="ADAL" clId="{C0799EF4-FEE2-49D6-9381-FB1629B3C905}" dt="2026-03-16T14:48:12.283" v="154" actId="26606"/>
+          <ac:spMkLst>
+            <pc:docMk/>
+            <pc:sldMk cId="2370203106" sldId="265"/>
+            <ac:spMk id="7" creationId="{6F5A5072-7B47-4D32-B52A-4EBBF590B8A5}"/>
+          </ac:spMkLst>
+        </pc:spChg>
+        <pc:spChg chg="add">
+          <ac:chgData name="Oleksii Kamarali" userId="de8324e2-fdf7-4792-9275-2e8816b9f59b" providerId="ADAL" clId="{C0799EF4-FEE2-49D6-9381-FB1629B3C905}" dt="2026-03-16T14:28:47.544" v="96" actId="26606"/>
+          <ac:spMkLst>
+            <pc:docMk/>
+            <pc:sldMk cId="2370203106" sldId="265"/>
+            <ac:spMk id="9" creationId="{9715DAF0-AE1B-46C9-8A6B-DB2AA05AB91D}"/>
+          </ac:spMkLst>
+        </pc:spChg>
+        <pc:spChg chg="add del">
+          <ac:chgData name="Oleksii Kamarali" userId="de8324e2-fdf7-4792-9275-2e8816b9f59b" providerId="ADAL" clId="{C0799EF4-FEE2-49D6-9381-FB1629B3C905}" dt="2026-03-16T14:48:12.283" v="154" actId="26606"/>
+          <ac:spMkLst>
+            <pc:docMk/>
+            <pc:sldMk cId="2370203106" sldId="265"/>
+            <ac:spMk id="11" creationId="{6016219D-510E-4184-9090-6D5578A87BD1}"/>
+          </ac:spMkLst>
+        </pc:spChg>
+        <pc:spChg chg="add del">
+          <ac:chgData name="Oleksii Kamarali" userId="de8324e2-fdf7-4792-9275-2e8816b9f59b" providerId="ADAL" clId="{C0799EF4-FEE2-49D6-9381-FB1629B3C905}" dt="2026-03-16T14:48:12.283" v="154" actId="26606"/>
+          <ac:spMkLst>
+            <pc:docMk/>
+            <pc:sldMk cId="2370203106" sldId="265"/>
+            <ac:spMk id="13" creationId="{AFF4A713-7B75-4B21-90D7-5AB19547C728}"/>
+          </ac:spMkLst>
+        </pc:spChg>
+        <pc:spChg chg="add del">
+          <ac:chgData name="Oleksii Kamarali" userId="de8324e2-fdf7-4792-9275-2e8816b9f59b" providerId="ADAL" clId="{C0799EF4-FEE2-49D6-9381-FB1629B3C905}" dt="2026-03-16T14:48:12.283" v="154" actId="26606"/>
+          <ac:spMkLst>
+            <pc:docMk/>
+            <pc:sldMk cId="2370203106" sldId="265"/>
+            <ac:spMk id="15" creationId="{DC631C0B-6DA6-4E57-8231-CE32B3434A7E}"/>
+          </ac:spMkLst>
+        </pc:spChg>
+        <pc:spChg chg="add">
+          <ac:chgData name="Oleksii Kamarali" userId="de8324e2-fdf7-4792-9275-2e8816b9f59b" providerId="ADAL" clId="{C0799EF4-FEE2-49D6-9381-FB1629B3C905}" dt="2026-03-16T14:28:47.544" v="96" actId="26606"/>
+          <ac:spMkLst>
+            <pc:docMk/>
+            <pc:sldMk cId="2370203106" sldId="265"/>
+            <ac:spMk id="17" creationId="{C29501E6-A978-4A61-9689-9085AF97A53A}"/>
+          </ac:spMkLst>
+        </pc:spChg>
+      </pc:sldChg>
+    </pc:docChg>
+  </pc:docChgLst>
   <pc:docChgLst>
     <pc:chgData name="Lucas Santos Leandro" userId="0605dfd2-f67f-4b60-95d0-aa0a7121a079" providerId="ADAL" clId="{0BD1A175-A5B9-4DF1-8D8A-4D968B0FFA11}"/>
     <pc:docChg chg="undo custSel addSld delSld modSld sldOrd">
@@ -158,116 +675,12 @@
             <ac:spMk id="2" creationId="{E4041585-2273-DCC1-7137-9CF9AD0F2A06}"/>
           </ac:spMkLst>
         </pc:spChg>
-        <pc:spChg chg="del mod">
-          <ac:chgData name="Lucas Santos Leandro" userId="0605dfd2-f67f-4b60-95d0-aa0a7121a079" providerId="ADAL" clId="{0BD1A175-A5B9-4DF1-8D8A-4D968B0FFA11}" dt="2026-03-16T14:28:43.861" v="226" actId="26606"/>
-          <ac:spMkLst>
-            <pc:docMk/>
-            <pc:sldMk cId="1760741132" sldId="257"/>
-            <ac:spMk id="3" creationId="{25B6DD9B-14CC-5F80-99AE-B086C7FF86A8}"/>
-          </ac:spMkLst>
-        </pc:spChg>
-        <pc:spChg chg="add del">
-          <ac:chgData name="Lucas Santos Leandro" userId="0605dfd2-f67f-4b60-95d0-aa0a7121a079" providerId="ADAL" clId="{0BD1A175-A5B9-4DF1-8D8A-4D968B0FFA11}" dt="2026-03-16T09:11:02.475" v="123" actId="26606"/>
-          <ac:spMkLst>
-            <pc:docMk/>
-            <pc:sldMk cId="1760741132" sldId="257"/>
-            <ac:spMk id="5" creationId="{84697CDA-BDB7-4883-B48B-1D4EDB2F0E93}"/>
-          </ac:spMkLst>
-        </pc:spChg>
-        <pc:spChg chg="add del">
-          <ac:chgData name="Lucas Santos Leandro" userId="0605dfd2-f67f-4b60-95d0-aa0a7121a079" providerId="ADAL" clId="{0BD1A175-A5B9-4DF1-8D8A-4D968B0FFA11}" dt="2026-03-16T09:11:02.475" v="123" actId="26606"/>
-          <ac:spMkLst>
-            <pc:docMk/>
-            <pc:sldMk cId="1760741132" sldId="257"/>
-            <ac:spMk id="6" creationId="{6295B176-FA0E-4B6A-A190-5E2E82BEA57A}"/>
-          </ac:spMkLst>
-        </pc:spChg>
-        <pc:spChg chg="add del">
-          <ac:chgData name="Lucas Santos Leandro" userId="0605dfd2-f67f-4b60-95d0-aa0a7121a079" providerId="ADAL" clId="{0BD1A175-A5B9-4DF1-8D8A-4D968B0FFA11}" dt="2026-03-16T09:11:02.475" v="123" actId="26606"/>
-          <ac:spMkLst>
-            <pc:docMk/>
-            <pc:sldMk cId="1760741132" sldId="257"/>
-            <ac:spMk id="7" creationId="{48F779DE-4744-42D6-9C74-33EC94460CCC}"/>
-          </ac:spMkLst>
-        </pc:spChg>
-        <pc:spChg chg="add del">
-          <ac:chgData name="Lucas Santos Leandro" userId="0605dfd2-f67f-4b60-95d0-aa0a7121a079" providerId="ADAL" clId="{0BD1A175-A5B9-4DF1-8D8A-4D968B0FFA11}" dt="2026-03-16T08:41:06.173" v="59" actId="26606"/>
-          <ac:spMkLst>
-            <pc:docMk/>
-            <pc:sldMk cId="1760741132" sldId="257"/>
-            <ac:spMk id="8" creationId="{DEE2AD96-B495-4E06-9291-B71706F728CB}"/>
-          </ac:spMkLst>
-        </pc:spChg>
-        <pc:spChg chg="add del">
-          <ac:chgData name="Lucas Santos Leandro" userId="0605dfd2-f67f-4b60-95d0-aa0a7121a079" providerId="ADAL" clId="{0BD1A175-A5B9-4DF1-8D8A-4D968B0FFA11}" dt="2026-03-16T09:15:33.966" v="128" actId="26606"/>
-          <ac:spMkLst>
-            <pc:docMk/>
-            <pc:sldMk cId="1760741132" sldId="257"/>
-            <ac:spMk id="9" creationId="{979E27D9-03C7-44E2-9FF8-15D0C8506AF7}"/>
-          </ac:spMkLst>
-        </pc:spChg>
-        <pc:spChg chg="add del">
-          <ac:chgData name="Lucas Santos Leandro" userId="0605dfd2-f67f-4b60-95d0-aa0a7121a079" providerId="ADAL" clId="{0BD1A175-A5B9-4DF1-8D8A-4D968B0FFA11}" dt="2026-03-16T08:41:06.173" v="59" actId="26606"/>
-          <ac:spMkLst>
-            <pc:docMk/>
-            <pc:sldMk cId="1760741132" sldId="257"/>
-            <ac:spMk id="10" creationId="{53CF6D67-C5A8-4ADD-9E8E-1E38CA1D3166}"/>
-          </ac:spMkLst>
-        </pc:spChg>
-        <pc:spChg chg="add del">
-          <ac:chgData name="Lucas Santos Leandro" userId="0605dfd2-f67f-4b60-95d0-aa0a7121a079" providerId="ADAL" clId="{0BD1A175-A5B9-4DF1-8D8A-4D968B0FFA11}" dt="2026-03-16T09:15:33.966" v="128" actId="26606"/>
-          <ac:spMkLst>
-            <pc:docMk/>
-            <pc:sldMk cId="1760741132" sldId="257"/>
-            <ac:spMk id="11" creationId="{EEBF1590-3B36-48EE-A89D-3B6F3CB256AB}"/>
-          </ac:spMkLst>
-        </pc:spChg>
-        <pc:spChg chg="add del">
-          <ac:chgData name="Lucas Santos Leandro" userId="0605dfd2-f67f-4b60-95d0-aa0a7121a079" providerId="ADAL" clId="{0BD1A175-A5B9-4DF1-8D8A-4D968B0FFA11}" dt="2026-03-16T08:41:06.173" v="59" actId="26606"/>
-          <ac:spMkLst>
-            <pc:docMk/>
-            <pc:sldMk cId="1760741132" sldId="257"/>
-            <ac:spMk id="12" creationId="{86909FA0-B515-4681-B7A8-FA281D133B94}"/>
-          </ac:spMkLst>
-        </pc:spChg>
-        <pc:spChg chg="add del">
-          <ac:chgData name="Lucas Santos Leandro" userId="0605dfd2-f67f-4b60-95d0-aa0a7121a079" providerId="ADAL" clId="{0BD1A175-A5B9-4DF1-8D8A-4D968B0FFA11}" dt="2026-03-16T09:15:33.966" v="128" actId="26606"/>
-          <ac:spMkLst>
-            <pc:docMk/>
-            <pc:sldMk cId="1760741132" sldId="257"/>
-            <ac:spMk id="13" creationId="{AC8F6C8C-AB5A-4548-942D-E3FD40ACBC49}"/>
-          </ac:spMkLst>
-        </pc:spChg>
-        <pc:spChg chg="add del">
-          <ac:chgData name="Lucas Santos Leandro" userId="0605dfd2-f67f-4b60-95d0-aa0a7121a079" providerId="ADAL" clId="{0BD1A175-A5B9-4DF1-8D8A-4D968B0FFA11}" dt="2026-03-16T08:41:06.173" v="59" actId="26606"/>
-          <ac:spMkLst>
-            <pc:docMk/>
-            <pc:sldMk cId="1760741132" sldId="257"/>
-            <ac:spMk id="14" creationId="{21C9FE86-FCC3-4A31-AA1C-C882262B7FE7}"/>
-          </ac:spMkLst>
-        </pc:spChg>
         <pc:spChg chg="add">
           <ac:chgData name="Lucas Santos Leandro" userId="0605dfd2-f67f-4b60-95d0-aa0a7121a079" providerId="ADAL" clId="{0BD1A175-A5B9-4DF1-8D8A-4D968B0FFA11}" dt="2026-03-16T09:15:33.966" v="128" actId="26606"/>
           <ac:spMkLst>
             <pc:docMk/>
             <pc:sldMk cId="1760741132" sldId="257"/>
             <ac:spMk id="15" creationId="{979E27D9-03C7-44E2-9FF8-15D0C8506AF7}"/>
-          </ac:spMkLst>
-        </pc:spChg>
-        <pc:spChg chg="add del">
-          <ac:chgData name="Lucas Santos Leandro" userId="0605dfd2-f67f-4b60-95d0-aa0a7121a079" providerId="ADAL" clId="{0BD1A175-A5B9-4DF1-8D8A-4D968B0FFA11}" dt="2026-03-16T08:41:06.173" v="59" actId="26606"/>
-          <ac:spMkLst>
-            <pc:docMk/>
-            <pc:sldMk cId="1760741132" sldId="257"/>
-            <ac:spMk id="16" creationId="{7D96243B-ECED-4B71-8E06-AE9A285EAD20}"/>
-          </ac:spMkLst>
-        </pc:spChg>
-        <pc:spChg chg="add del">
-          <ac:chgData name="Lucas Santos Leandro" userId="0605dfd2-f67f-4b60-95d0-aa0a7121a079" providerId="ADAL" clId="{0BD1A175-A5B9-4DF1-8D8A-4D968B0FFA11}" dt="2026-03-16T08:41:06.173" v="59" actId="26606"/>
-          <ac:spMkLst>
-            <pc:docMk/>
-            <pc:sldMk cId="1760741132" sldId="257"/>
-            <ac:spMk id="18" creationId="{A09989E4-EFDC-4A90-A633-E0525FB4139E}"/>
           </ac:spMkLst>
         </pc:spChg>
         <pc:spChg chg="add">
@@ -294,21 +707,6 @@
             <ac:graphicFrameMk id="24" creationId="{364EE30F-55C8-C7BA-DAD0-53BF6A124B6A}"/>
           </ac:graphicFrameMkLst>
         </pc:graphicFrameChg>
-      </pc:sldChg>
-      <pc:sldChg chg="modSp mod">
-        <pc:chgData name="Lucas Santos Leandro" userId="0605dfd2-f67f-4b60-95d0-aa0a7121a079" providerId="ADAL" clId="{0BD1A175-A5B9-4DF1-8D8A-4D968B0FFA11}" dt="2026-03-16T08:40:28.402" v="57" actId="122"/>
-        <pc:sldMkLst>
-          <pc:docMk/>
-          <pc:sldMk cId="313293860" sldId="258"/>
-        </pc:sldMkLst>
-        <pc:spChg chg="mod">
-          <ac:chgData name="Lucas Santos Leandro" userId="0605dfd2-f67f-4b60-95d0-aa0a7121a079" providerId="ADAL" clId="{0BD1A175-A5B9-4DF1-8D8A-4D968B0FFA11}" dt="2026-03-16T08:40:28.402" v="57" actId="122"/>
-          <ac:spMkLst>
-            <pc:docMk/>
-            <pc:sldMk cId="313293860" sldId="258"/>
-            <ac:spMk id="2" creationId="{2F579816-04D3-A856-0D33-D70A9550C746}"/>
-          </ac:spMkLst>
-        </pc:spChg>
       </pc:sldChg>
       <pc:sldChg chg="addSp delSp modSp new mod setBg">
         <pc:chgData name="Lucas Santos Leandro" userId="0605dfd2-f67f-4b60-95d0-aa0a7121a079" providerId="ADAL" clId="{0BD1A175-A5B9-4DF1-8D8A-4D968B0FFA11}" dt="2026-03-16T14:28:33.492" v="225" actId="478"/>
@@ -348,54 +746,6 @@
             <ac:spMk id="1033" creationId="{D1EA859B-E555-4109-94F3-6700E046E008}"/>
           </ac:spMkLst>
         </pc:spChg>
-        <pc:grpChg chg="del">
-          <ac:chgData name="Lucas Santos Leandro" userId="0605dfd2-f67f-4b60-95d0-aa0a7121a079" providerId="ADAL" clId="{0BD1A175-A5B9-4DF1-8D8A-4D968B0FFA11}" dt="2026-03-16T14:27:10.278" v="220" actId="478"/>
-          <ac:grpSpMkLst>
-            <pc:docMk/>
-            <pc:sldMk cId="506015394" sldId="259"/>
-            <ac:grpSpMk id="15" creationId="{B5F31FFA-4399-18F5-5904-A4D3D40C990F}"/>
-          </ac:grpSpMkLst>
-        </pc:grpChg>
-        <pc:grpChg chg="del mod">
-          <ac:chgData name="Lucas Santos Leandro" userId="0605dfd2-f67f-4b60-95d0-aa0a7121a079" providerId="ADAL" clId="{0BD1A175-A5B9-4DF1-8D8A-4D968B0FFA11}" dt="2026-03-16T14:28:33.492" v="225" actId="478"/>
-          <ac:grpSpMkLst>
-            <pc:docMk/>
-            <pc:sldMk cId="506015394" sldId="259"/>
-            <ac:grpSpMk id="27" creationId="{FC9DD356-91A9-C093-E50D-A5F6DE267DD1}"/>
-          </ac:grpSpMkLst>
-        </pc:grpChg>
-        <pc:grpChg chg="del">
-          <ac:chgData name="Lucas Santos Leandro" userId="0605dfd2-f67f-4b60-95d0-aa0a7121a079" providerId="ADAL" clId="{0BD1A175-A5B9-4DF1-8D8A-4D968B0FFA11}" dt="2026-03-16T14:27:14.259" v="221" actId="478"/>
-          <ac:grpSpMkLst>
-            <pc:docMk/>
-            <pc:sldMk cId="506015394" sldId="259"/>
-            <ac:grpSpMk id="40" creationId="{B9AC840C-677D-BF26-73CA-46C2165E94DC}"/>
-          </ac:grpSpMkLst>
-        </pc:grpChg>
-        <pc:grpChg chg="del">
-          <ac:chgData name="Lucas Santos Leandro" userId="0605dfd2-f67f-4b60-95d0-aa0a7121a079" providerId="ADAL" clId="{0BD1A175-A5B9-4DF1-8D8A-4D968B0FFA11}" dt="2026-03-16T14:27:16.117" v="222" actId="478"/>
-          <ac:grpSpMkLst>
-            <pc:docMk/>
-            <pc:sldMk cId="506015394" sldId="259"/>
-            <ac:grpSpMk id="56" creationId="{D89A75BB-2255-A550-7E42-27AF2726D78F}"/>
-          </ac:grpSpMkLst>
-        </pc:grpChg>
-        <pc:picChg chg="add del mod">
-          <ac:chgData name="Lucas Santos Leandro" userId="0605dfd2-f67f-4b60-95d0-aa0a7121a079" providerId="ADAL" clId="{0BD1A175-A5B9-4DF1-8D8A-4D968B0FFA11}" dt="2026-03-16T14:19:36.034" v="178" actId="478"/>
-          <ac:picMkLst>
-            <pc:docMk/>
-            <pc:sldMk cId="506015394" sldId="259"/>
-            <ac:picMk id="5" creationId="{C0C83A79-6C28-C85B-1FDB-BFAA0CE8255D}"/>
-          </ac:picMkLst>
-        </pc:picChg>
-        <pc:picChg chg="add del mod">
-          <ac:chgData name="Lucas Santos Leandro" userId="0605dfd2-f67f-4b60-95d0-aa0a7121a079" providerId="ADAL" clId="{0BD1A175-A5B9-4DF1-8D8A-4D968B0FFA11}" dt="2026-03-16T14:20:12.212" v="181" actId="478"/>
-          <ac:picMkLst>
-            <pc:docMk/>
-            <pc:sldMk cId="506015394" sldId="259"/>
-            <ac:picMk id="7" creationId="{BDE0FF4E-9AFE-D7C7-2A8A-4060BA4B8BA5}"/>
-          </ac:picMkLst>
-        </pc:picChg>
         <pc:picChg chg="add mod ord">
           <ac:chgData name="Lucas Santos Leandro" userId="0605dfd2-f67f-4b60-95d0-aa0a7121a079" providerId="ADAL" clId="{0BD1A175-A5B9-4DF1-8D8A-4D968B0FFA11}" dt="2026-03-16T14:21:29.302" v="185"/>
           <ac:picMkLst>
@@ -404,14 +754,6 @@
             <ac:picMk id="1026" creationId="{9E3AAF12-B278-0A4C-BC66-0BB023D15790}"/>
           </ac:picMkLst>
         </pc:picChg>
-        <pc:inkChg chg="del">
-          <ac:chgData name="Lucas Santos Leandro" userId="0605dfd2-f67f-4b60-95d0-aa0a7121a079" providerId="ADAL" clId="{0BD1A175-A5B9-4DF1-8D8A-4D968B0FFA11}" dt="2026-03-16T14:27:18.240" v="223" actId="478"/>
-          <ac:inkMkLst>
-            <pc:docMk/>
-            <pc:sldMk cId="506015394" sldId="259"/>
-            <ac:inkMk id="57" creationId="{19BA8302-393C-980B-A8F4-BA1DC8240878}"/>
-          </ac:inkMkLst>
-        </pc:inkChg>
       </pc:sldChg>
       <pc:sldChg chg="modSp new mod">
         <pc:chgData name="Lucas Santos Leandro" userId="0605dfd2-f67f-4b60-95d0-aa0a7121a079" providerId="ADAL" clId="{0BD1A175-A5B9-4DF1-8D8A-4D968B0FFA11}" dt="2026-03-16T14:32:40.189" v="254" actId="122"/>
@@ -457,14 +799,6 @@
             <ac:spMk id="2" creationId="{F4B7D872-EABE-5A57-BD94-DC36C82DD445}"/>
           </ac:spMkLst>
         </pc:spChg>
-        <pc:spChg chg="add del mod">
-          <ac:chgData name="Lucas Santos Leandro" userId="0605dfd2-f67f-4b60-95d0-aa0a7121a079" providerId="ADAL" clId="{0BD1A175-A5B9-4DF1-8D8A-4D968B0FFA11}" dt="2026-03-16T14:48:53.660" v="429" actId="26606"/>
-          <ac:spMkLst>
-            <pc:docMk/>
-            <pc:sldMk cId="1787426261" sldId="262"/>
-            <ac:spMk id="3" creationId="{0EF36F1B-417E-0DC8-87C4-6021028BC959}"/>
-          </ac:spMkLst>
-        </pc:spChg>
         <pc:spChg chg="add mod ord">
           <ac:chgData name="Lucas Santos Leandro" userId="0605dfd2-f67f-4b60-95d0-aa0a7121a079" providerId="ADAL" clId="{0BD1A175-A5B9-4DF1-8D8A-4D968B0FFA11}" dt="2026-03-16T14:50:03.113" v="439" actId="167"/>
           <ac:spMkLst>
@@ -489,38 +823,6 @@
             <ac:spMk id="9" creationId="{79238761-2910-7CC0-F7BF-CDA72BEAF15C}"/>
           </ac:spMkLst>
         </pc:spChg>
-        <pc:spChg chg="add del">
-          <ac:chgData name="Lucas Santos Leandro" userId="0605dfd2-f67f-4b60-95d0-aa0a7121a079" providerId="ADAL" clId="{0BD1A175-A5B9-4DF1-8D8A-4D968B0FFA11}" dt="2026-03-16T14:49:17.978" v="433" actId="26606"/>
-          <ac:spMkLst>
-            <pc:docMk/>
-            <pc:sldMk cId="1787426261" sldId="262"/>
-            <ac:spMk id="11" creationId="{BACC6370-2D7E-4714-9D71-7542949D7D5D}"/>
-          </ac:spMkLst>
-        </pc:spChg>
-        <pc:spChg chg="add del">
-          <ac:chgData name="Lucas Santos Leandro" userId="0605dfd2-f67f-4b60-95d0-aa0a7121a079" providerId="ADAL" clId="{0BD1A175-A5B9-4DF1-8D8A-4D968B0FFA11}" dt="2026-03-16T14:49:17.978" v="433" actId="26606"/>
-          <ac:spMkLst>
-            <pc:docMk/>
-            <pc:sldMk cId="1787426261" sldId="262"/>
-            <ac:spMk id="13" creationId="{F68B3F68-107C-434F-AA38-110D5EA91B85}"/>
-          </ac:spMkLst>
-        </pc:spChg>
-        <pc:spChg chg="add del">
-          <ac:chgData name="Lucas Santos Leandro" userId="0605dfd2-f67f-4b60-95d0-aa0a7121a079" providerId="ADAL" clId="{0BD1A175-A5B9-4DF1-8D8A-4D968B0FFA11}" dt="2026-03-16T14:49:17.978" v="433" actId="26606"/>
-          <ac:spMkLst>
-            <pc:docMk/>
-            <pc:sldMk cId="1787426261" sldId="262"/>
-            <ac:spMk id="15" creationId="{AAD0DBB9-1A4B-4391-81D4-CB19F9AB918A}"/>
-          </ac:spMkLst>
-        </pc:spChg>
-        <pc:spChg chg="add del">
-          <ac:chgData name="Lucas Santos Leandro" userId="0605dfd2-f67f-4b60-95d0-aa0a7121a079" providerId="ADAL" clId="{0BD1A175-A5B9-4DF1-8D8A-4D968B0FFA11}" dt="2026-03-16T14:49:17.978" v="433" actId="26606"/>
-          <ac:spMkLst>
-            <pc:docMk/>
-            <pc:sldMk cId="1787426261" sldId="262"/>
-            <ac:spMk id="17" creationId="{063BBA22-50EA-4C4D-BE05-F1CE4E63AA56}"/>
-          </ac:spMkLst>
-        </pc:spChg>
         <pc:grpChg chg="add mod">
           <ac:chgData name="Lucas Santos Leandro" userId="0605dfd2-f67f-4b60-95d0-aa0a7121a079" providerId="ADAL" clId="{0BD1A175-A5B9-4DF1-8D8A-4D968B0FFA11}" dt="2026-03-16T14:50:37.606" v="446" actId="1076"/>
           <ac:grpSpMkLst>
@@ -529,14 +831,6 @@
             <ac:grpSpMk id="7" creationId="{04E44D1E-03BD-15E3-7AFB-D22F3B1ED758}"/>
           </ac:grpSpMkLst>
         </pc:grpChg>
-        <pc:graphicFrameChg chg="add del">
-          <ac:chgData name="Lucas Santos Leandro" userId="0605dfd2-f67f-4b60-95d0-aa0a7121a079" providerId="ADAL" clId="{0BD1A175-A5B9-4DF1-8D8A-4D968B0FFA11}" dt="2026-03-16T14:48:52.342" v="428" actId="26606"/>
-          <ac:graphicFrameMkLst>
-            <pc:docMk/>
-            <pc:sldMk cId="1787426261" sldId="262"/>
-            <ac:graphicFrameMk id="5" creationId="{B72BDA4F-D6B9-8A5C-DEC9-3CFDCEDFF970}"/>
-          </ac:graphicFrameMkLst>
-        </pc:graphicFrameChg>
         <pc:graphicFrameChg chg="add mod modGraphic">
           <ac:chgData name="Lucas Santos Leandro" userId="0605dfd2-f67f-4b60-95d0-aa0a7121a079" providerId="ADAL" clId="{0BD1A175-A5B9-4DF1-8D8A-4D968B0FFA11}" dt="2026-03-16T14:50:08.760" v="440"/>
           <ac:graphicFrameMkLst>
@@ -560,30 +854,6 @@
             <ac:spMk id="2" creationId="{EAA8C147-8B5C-43D4-2FED-6DB87C578130}"/>
           </ac:spMkLst>
         </pc:spChg>
-        <pc:spChg chg="del mod">
-          <ac:chgData name="Lucas Santos Leandro" userId="0605dfd2-f67f-4b60-95d0-aa0a7121a079" providerId="ADAL" clId="{0BD1A175-A5B9-4DF1-8D8A-4D968B0FFA11}" dt="2026-03-16T14:32:31.544" v="252" actId="26606"/>
-          <ac:spMkLst>
-            <pc:docMk/>
-            <pc:sldMk cId="940697554" sldId="263"/>
-            <ac:spMk id="3" creationId="{E701DBFB-D0FB-4951-10CE-92048E4B27D4}"/>
-          </ac:spMkLst>
-        </pc:spChg>
-        <pc:spChg chg="add del">
-          <ac:chgData name="Lucas Santos Leandro" userId="0605dfd2-f67f-4b60-95d0-aa0a7121a079" providerId="ADAL" clId="{0BD1A175-A5B9-4DF1-8D8A-4D968B0FFA11}" dt="2026-03-16T14:34:41.064" v="259" actId="26606"/>
-          <ac:spMkLst>
-            <pc:docMk/>
-            <pc:sldMk cId="940697554" sldId="263"/>
-            <ac:spMk id="10" creationId="{6C4028FD-8BAA-4A19-BFDE-594D991B7552}"/>
-          </ac:spMkLst>
-        </pc:spChg>
-        <pc:spChg chg="add del">
-          <ac:chgData name="Lucas Santos Leandro" userId="0605dfd2-f67f-4b60-95d0-aa0a7121a079" providerId="ADAL" clId="{0BD1A175-A5B9-4DF1-8D8A-4D968B0FFA11}" dt="2026-03-16T14:34:31.163" v="257" actId="26606"/>
-          <ac:spMkLst>
-            <pc:docMk/>
-            <pc:sldMk cId="940697554" sldId="263"/>
-            <ac:spMk id="13" creationId="{955A2079-FA98-4876-80F0-72364A7D2EA4}"/>
-          </ac:spMkLst>
-        </pc:spChg>
         <pc:graphicFrameChg chg="add mod modGraphic">
           <ac:chgData name="Lucas Santos Leandro" userId="0605dfd2-f67f-4b60-95d0-aa0a7121a079" providerId="ADAL" clId="{0BD1A175-A5B9-4DF1-8D8A-4D968B0FFA11}" dt="2026-03-16T14:34:41.064" v="259" actId="26606"/>
           <ac:graphicFrameMkLst>
@@ -592,61 +862,6 @@
             <ac:graphicFrameMk id="8" creationId="{F5D1F0DA-C632-94C4-DD99-741A7B534AD9}"/>
           </ac:graphicFrameMkLst>
         </pc:graphicFrameChg>
-        <pc:inkChg chg="del">
-          <ac:chgData name="Lucas Santos Leandro" userId="0605dfd2-f67f-4b60-95d0-aa0a7121a079" providerId="ADAL" clId="{0BD1A175-A5B9-4DF1-8D8A-4D968B0FFA11}" dt="2026-03-16T14:31:02.982" v="237" actId="478"/>
-          <ac:inkMkLst>
-            <pc:docMk/>
-            <pc:sldMk cId="940697554" sldId="263"/>
-            <ac:inkMk id="4" creationId="{A3CBF75D-2386-105C-556E-539633B07533}"/>
-          </ac:inkMkLst>
-        </pc:inkChg>
-        <pc:inkChg chg="del">
-          <ac:chgData name="Lucas Santos Leandro" userId="0605dfd2-f67f-4b60-95d0-aa0a7121a079" providerId="ADAL" clId="{0BD1A175-A5B9-4DF1-8D8A-4D968B0FFA11}" dt="2026-03-16T14:31:01.059" v="236" actId="478"/>
-          <ac:inkMkLst>
-            <pc:docMk/>
-            <pc:sldMk cId="940697554" sldId="263"/>
-            <ac:inkMk id="5" creationId="{F191C64E-0185-9692-BBB7-EFC499B4A221}"/>
-          </ac:inkMkLst>
-        </pc:inkChg>
-        <pc:inkChg chg="del">
-          <ac:chgData name="Lucas Santos Leandro" userId="0605dfd2-f67f-4b60-95d0-aa0a7121a079" providerId="ADAL" clId="{0BD1A175-A5B9-4DF1-8D8A-4D968B0FFA11}" dt="2026-03-16T14:31:04.543" v="238" actId="478"/>
-          <ac:inkMkLst>
-            <pc:docMk/>
-            <pc:sldMk cId="940697554" sldId="263"/>
-            <ac:inkMk id="6" creationId="{6EB54EF5-0053-3683-E3D0-5E591F9ACA54}"/>
-          </ac:inkMkLst>
-        </pc:inkChg>
-        <pc:inkChg chg="del">
-          <ac:chgData name="Lucas Santos Leandro" userId="0605dfd2-f67f-4b60-95d0-aa0a7121a079" providerId="ADAL" clId="{0BD1A175-A5B9-4DF1-8D8A-4D968B0FFA11}" dt="2026-03-16T14:31:05.102" v="239" actId="478"/>
-          <ac:inkMkLst>
-            <pc:docMk/>
-            <pc:sldMk cId="940697554" sldId="263"/>
-            <ac:inkMk id="7" creationId="{27A55413-A3F0-FD98-51F4-B1530FF17881}"/>
-          </ac:inkMkLst>
-        </pc:inkChg>
-      </pc:sldChg>
-      <pc:sldChg chg="modSp new del mod">
-        <pc:chgData name="Lucas Santos Leandro" userId="0605dfd2-f67f-4b60-95d0-aa0a7121a079" providerId="ADAL" clId="{0BD1A175-A5B9-4DF1-8D8A-4D968B0FFA11}" dt="2026-03-16T14:51:45.689" v="573" actId="2696"/>
-        <pc:sldMkLst>
-          <pc:docMk/>
-          <pc:sldMk cId="4250767071" sldId="264"/>
-        </pc:sldMkLst>
-        <pc:spChg chg="mod">
-          <ac:chgData name="Lucas Santos Leandro" userId="0605dfd2-f67f-4b60-95d0-aa0a7121a079" providerId="ADAL" clId="{0BD1A175-A5B9-4DF1-8D8A-4D968B0FFA11}" dt="2026-03-16T14:45:01.070" v="415" actId="122"/>
-          <ac:spMkLst>
-            <pc:docMk/>
-            <pc:sldMk cId="4250767071" sldId="264"/>
-            <ac:spMk id="2" creationId="{0AB24928-1D7C-49FD-A366-E54806E3D897}"/>
-          </ac:spMkLst>
-        </pc:spChg>
-        <pc:spChg chg="mod">
-          <ac:chgData name="Lucas Santos Leandro" userId="0605dfd2-f67f-4b60-95d0-aa0a7121a079" providerId="ADAL" clId="{0BD1A175-A5B9-4DF1-8D8A-4D968B0FFA11}" dt="2026-03-16T14:47:04.196" v="426" actId="20577"/>
-          <ac:spMkLst>
-            <pc:docMk/>
-            <pc:sldMk cId="4250767071" sldId="264"/>
-            <ac:spMk id="3" creationId="{F71C8352-948C-EAF5-F4FE-B6A12E61719F}"/>
-          </ac:spMkLst>
-        </pc:spChg>
       </pc:sldChg>
       <pc:sldChg chg="addSp delSp modSp new mod">
         <pc:chgData name="Lucas Santos Leandro" userId="0605dfd2-f67f-4b60-95d0-aa0a7121a079" providerId="ADAL" clId="{0BD1A175-A5B9-4DF1-8D8A-4D968B0FFA11}" dt="2026-03-16T15:03:13.712" v="615" actId="122"/>
@@ -670,561 +885,98 @@
             <ac:spMk id="5" creationId="{80E66FF3-A71B-A782-7C4A-08950C73AA71}"/>
           </ac:spMkLst>
         </pc:spChg>
-        <pc:spChg chg="add mod">
-          <ac:chgData name="Lucas Santos Leandro" userId="0605dfd2-f67f-4b60-95d0-aa0a7121a079" providerId="ADAL" clId="{0BD1A175-A5B9-4DF1-8D8A-4D968B0FFA11}" dt="2026-03-16T14:58:48.878" v="577"/>
-          <ac:spMkLst>
-            <pc:docMk/>
-            <pc:sldMk cId="2370203106" sldId="265"/>
-            <ac:spMk id="6" creationId="{29D82FEF-358F-9ED1-192A-C93B7913E57A}"/>
-          </ac:spMkLst>
-        </pc:spChg>
       </pc:sldChg>
     </pc:docChg>
   </pc:docChgLst>
   <pc:docChgLst>
-    <pc:chgData name="Oleksii Kamarali" userId="de8324e2-fdf7-4792-9275-2e8816b9f59b" providerId="ADAL" clId="{C0799EF4-FEE2-49D6-9381-FB1629B3C905}"/>
-    <pc:docChg chg="undo custSel addSld delSld modSld sldOrd">
-      <pc:chgData name="Oleksii Kamarali" userId="de8324e2-fdf7-4792-9275-2e8816b9f59b" providerId="ADAL" clId="{C0799EF4-FEE2-49D6-9381-FB1629B3C905}" dt="2026-03-16T15:07:08.768" v="156" actId="20577"/>
+    <pc:chgData name="Oleksii Kamarali" userId="de8324e2-fdf7-4792-9275-2e8816b9f59b" providerId="ADAL" clId="{FF9CE91F-C4AC-4D79-AC83-95F7466119A5}"/>
+    <pc:docChg chg="custSel addSld delSld modSld">
+      <pc:chgData name="Oleksii Kamarali" userId="de8324e2-fdf7-4792-9275-2e8816b9f59b" providerId="ADAL" clId="{FF9CE91F-C4AC-4D79-AC83-95F7466119A5}" dt="2026-03-23T07:01:04.658" v="522" actId="478"/>
       <pc:docMkLst>
         <pc:docMk/>
       </pc:docMkLst>
       <pc:sldChg chg="modSp mod">
-        <pc:chgData name="Oleksii Kamarali" userId="de8324e2-fdf7-4792-9275-2e8816b9f59b" providerId="ADAL" clId="{C0799EF4-FEE2-49D6-9381-FB1629B3C905}" dt="2026-03-16T14:10:17.638" v="81" actId="20577"/>
+        <pc:chgData name="Oleksii Kamarali" userId="de8324e2-fdf7-4792-9275-2e8816b9f59b" providerId="ADAL" clId="{FF9CE91F-C4AC-4D79-AC83-95F7466119A5}" dt="2026-03-22T19:53:31.533" v="520" actId="20577"/>
         <pc:sldMkLst>
           <pc:docMk/>
           <pc:sldMk cId="1760741132" sldId="257"/>
         </pc:sldMkLst>
+        <pc:graphicFrameChg chg="mod modGraphic">
+          <ac:chgData name="Oleksii Kamarali" userId="de8324e2-fdf7-4792-9275-2e8816b9f59b" providerId="ADAL" clId="{FF9CE91F-C4AC-4D79-AC83-95F7466119A5}" dt="2026-03-22T19:53:31.533" v="520" actId="20577"/>
+          <ac:graphicFrameMkLst>
+            <pc:docMk/>
+            <pc:sldMk cId="1760741132" sldId="257"/>
+            <ac:graphicFrameMk id="24" creationId="{364EE30F-55C8-C7BA-DAD0-53BF6A124B6A}"/>
+          </ac:graphicFrameMkLst>
+        </pc:graphicFrameChg>
+      </pc:sldChg>
+      <pc:sldChg chg="modSp add mod setBg">
+        <pc:chgData name="Oleksii Kamarali" userId="de8324e2-fdf7-4792-9275-2e8816b9f59b" providerId="ADAL" clId="{FF9CE91F-C4AC-4D79-AC83-95F7466119A5}" dt="2026-03-22T19:40:09.600" v="151" actId="12"/>
+        <pc:sldMkLst>
+          <pc:docMk/>
+          <pc:sldMk cId="0" sldId="258"/>
+        </pc:sldMkLst>
         <pc:spChg chg="mod">
-          <ac:chgData name="Oleksii Kamarali" userId="de8324e2-fdf7-4792-9275-2e8816b9f59b" providerId="ADAL" clId="{C0799EF4-FEE2-49D6-9381-FB1629B3C905}" dt="2026-03-16T14:10:17.638" v="81" actId="20577"/>
+          <ac:chgData name="Oleksii Kamarali" userId="de8324e2-fdf7-4792-9275-2e8816b9f59b" providerId="ADAL" clId="{FF9CE91F-C4AC-4D79-AC83-95F7466119A5}" dt="2026-03-22T19:40:09.600" v="151" actId="12"/>
           <ac:spMkLst>
             <pc:docMk/>
-            <pc:sldMk cId="1760741132" sldId="257"/>
-            <ac:spMk id="3" creationId="{25B6DD9B-14CC-5F80-99AE-B086C7FF86A8}"/>
+            <pc:sldMk cId="0" sldId="258"/>
+            <ac:spMk id="3" creationId="{C5D5FB87-1FAE-E42D-94EA-F6D295074703}"/>
           </ac:spMkLst>
         </pc:spChg>
       </pc:sldChg>
-      <pc:sldChg chg="addSp delSp modSp new mod ord setBg">
-        <pc:chgData name="Oleksii Kamarali" userId="de8324e2-fdf7-4792-9275-2e8816b9f59b" providerId="ADAL" clId="{C0799EF4-FEE2-49D6-9381-FB1629B3C905}" dt="2026-03-16T14:10:31.829" v="85"/>
+      <pc:sldChg chg="modSp add mod">
+        <pc:chgData name="Oleksii Kamarali" userId="de8324e2-fdf7-4792-9275-2e8816b9f59b" providerId="ADAL" clId="{FF9CE91F-C4AC-4D79-AC83-95F7466119A5}" dt="2026-03-22T19:53:17.376" v="517" actId="20577"/>
         <pc:sldMkLst>
           <pc:docMk/>
-          <pc:sldMk cId="313293860" sldId="258"/>
+          <pc:sldMk cId="0" sldId="272"/>
         </pc:sldMkLst>
-        <pc:spChg chg="mod ord">
-          <ac:chgData name="Oleksii Kamarali" userId="de8324e2-fdf7-4792-9275-2e8816b9f59b" providerId="ADAL" clId="{C0799EF4-FEE2-49D6-9381-FB1629B3C905}" dt="2026-03-16T08:26:10.426" v="58" actId="255"/>
+        <pc:spChg chg="mod">
+          <ac:chgData name="Oleksii Kamarali" userId="de8324e2-fdf7-4792-9275-2e8816b9f59b" providerId="ADAL" clId="{FF9CE91F-C4AC-4D79-AC83-95F7466119A5}" dt="2026-03-22T19:53:17.376" v="517" actId="20577"/>
           <ac:spMkLst>
             <pc:docMk/>
-            <pc:sldMk cId="313293860" sldId="258"/>
-            <ac:spMk id="2" creationId="{2F579816-04D3-A856-0D33-D70A9550C746}"/>
-          </ac:spMkLst>
-        </pc:spChg>
-        <pc:spChg chg="add del mod">
-          <ac:chgData name="Oleksii Kamarali" userId="de8324e2-fdf7-4792-9275-2e8816b9f59b" providerId="ADAL" clId="{C0799EF4-FEE2-49D6-9381-FB1629B3C905}" dt="2026-03-16T08:22:22.411" v="46" actId="26606"/>
-          <ac:spMkLst>
-            <pc:docMk/>
-            <pc:sldMk cId="313293860" sldId="258"/>
-            <ac:spMk id="3" creationId="{BB24070D-FBC7-5757-BCC9-E3D876C78061}"/>
-          </ac:spMkLst>
-        </pc:spChg>
-        <pc:spChg chg="add del">
-          <ac:chgData name="Oleksii Kamarali" userId="de8324e2-fdf7-4792-9275-2e8816b9f59b" providerId="ADAL" clId="{C0799EF4-FEE2-49D6-9381-FB1629B3C905}" dt="2026-03-16T08:22:09.815" v="41" actId="26606"/>
-          <ac:spMkLst>
-            <pc:docMk/>
-            <pc:sldMk cId="313293860" sldId="258"/>
-            <ac:spMk id="1031" creationId="{9AA72BD9-2C5A-4EDC-931F-5AA08EACA0F3}"/>
-          </ac:spMkLst>
-        </pc:spChg>
-        <pc:spChg chg="add del">
-          <ac:chgData name="Oleksii Kamarali" userId="de8324e2-fdf7-4792-9275-2e8816b9f59b" providerId="ADAL" clId="{C0799EF4-FEE2-49D6-9381-FB1629B3C905}" dt="2026-03-16T08:22:09.815" v="41" actId="26606"/>
-          <ac:spMkLst>
-            <pc:docMk/>
-            <pc:sldMk cId="313293860" sldId="258"/>
-            <ac:spMk id="1033" creationId="{DD3981AC-7B61-4947-BCF3-F7AA7FA385B9}"/>
-          </ac:spMkLst>
-        </pc:spChg>
-        <pc:spChg chg="add del">
-          <ac:chgData name="Oleksii Kamarali" userId="de8324e2-fdf7-4792-9275-2e8816b9f59b" providerId="ADAL" clId="{C0799EF4-FEE2-49D6-9381-FB1629B3C905}" dt="2026-03-16T08:22:09.815" v="41" actId="26606"/>
-          <ac:spMkLst>
-            <pc:docMk/>
-            <pc:sldMk cId="313293860" sldId="258"/>
-            <ac:spMk id="1035" creationId="{55D4142C-5077-457F-A6AD-3FECFDB39685}"/>
-          </ac:spMkLst>
-        </pc:spChg>
-        <pc:spChg chg="add del">
-          <ac:chgData name="Oleksii Kamarali" userId="de8324e2-fdf7-4792-9275-2e8816b9f59b" providerId="ADAL" clId="{C0799EF4-FEE2-49D6-9381-FB1629B3C905}" dt="2026-03-16T08:22:09.815" v="41" actId="26606"/>
-          <ac:spMkLst>
-            <pc:docMk/>
-            <pc:sldMk cId="313293860" sldId="258"/>
-            <ac:spMk id="1037" creationId="{7A5F0580-5EE9-419F-96EE-B6529EF6E7D0}"/>
-          </ac:spMkLst>
-        </pc:spChg>
-        <pc:spChg chg="add del">
-          <ac:chgData name="Oleksii Kamarali" userId="de8324e2-fdf7-4792-9275-2e8816b9f59b" providerId="ADAL" clId="{C0799EF4-FEE2-49D6-9381-FB1629B3C905}" dt="2026-03-16T08:22:17.098" v="43" actId="26606"/>
-          <ac:spMkLst>
-            <pc:docMk/>
-            <pc:sldMk cId="313293860" sldId="258"/>
-            <ac:spMk id="1039" creationId="{37C89E4B-3C9F-44B9-8B86-D9E3D112D8EC}"/>
-          </ac:spMkLst>
-        </pc:spChg>
-        <pc:spChg chg="add del">
-          <ac:chgData name="Oleksii Kamarali" userId="de8324e2-fdf7-4792-9275-2e8816b9f59b" providerId="ADAL" clId="{C0799EF4-FEE2-49D6-9381-FB1629B3C905}" dt="2026-03-16T08:22:22.400" v="45" actId="26606"/>
-          <ac:spMkLst>
-            <pc:docMk/>
-            <pc:sldMk cId="313293860" sldId="258"/>
-            <ac:spMk id="1043" creationId="{522A94E1-AEBD-4286-BFF8-0711E4CD3E3B}"/>
-          </ac:spMkLst>
-        </pc:spChg>
-        <pc:spChg chg="add">
-          <ac:chgData name="Oleksii Kamarali" userId="de8324e2-fdf7-4792-9275-2e8816b9f59b" providerId="ADAL" clId="{C0799EF4-FEE2-49D6-9381-FB1629B3C905}" dt="2026-03-16T08:22:22.411" v="46" actId="26606"/>
-          <ac:spMkLst>
-            <pc:docMk/>
-            <pc:sldMk cId="313293860" sldId="258"/>
-            <ac:spMk id="1045" creationId="{96CF2A2B-0745-440C-9224-C5C6A0A4286F}"/>
-          </ac:spMkLst>
-        </pc:spChg>
-        <pc:spChg chg="add">
-          <ac:chgData name="Oleksii Kamarali" userId="de8324e2-fdf7-4792-9275-2e8816b9f59b" providerId="ADAL" clId="{C0799EF4-FEE2-49D6-9381-FB1629B3C905}" dt="2026-03-16T08:22:22.411" v="46" actId="26606"/>
-          <ac:spMkLst>
-            <pc:docMk/>
-            <pc:sldMk cId="313293860" sldId="258"/>
-            <ac:spMk id="1046" creationId="{75BE6D6B-84C9-4D2B-97EB-773B7369EF82}"/>
-          </ac:spMkLst>
-        </pc:spChg>
-        <pc:spChg chg="add mod">
-          <ac:chgData name="Oleksii Kamarali" userId="de8324e2-fdf7-4792-9275-2e8816b9f59b" providerId="ADAL" clId="{C0799EF4-FEE2-49D6-9381-FB1629B3C905}" dt="2026-03-16T08:27:52.286" v="70" actId="14100"/>
-          <ac:spMkLst>
-            <pc:docMk/>
-            <pc:sldMk cId="313293860" sldId="258"/>
-            <ac:spMk id="1047" creationId="{BB24070D-FBC7-5757-BCC9-E3D876C78061}"/>
-          </ac:spMkLst>
-        </pc:spChg>
-        <pc:picChg chg="add mod ord">
-          <ac:chgData name="Oleksii Kamarali" userId="de8324e2-fdf7-4792-9275-2e8816b9f59b" providerId="ADAL" clId="{C0799EF4-FEE2-49D6-9381-FB1629B3C905}" dt="2026-03-16T08:27:43.778" v="69"/>
-          <ac:picMkLst>
-            <pc:docMk/>
-            <pc:sldMk cId="313293860" sldId="258"/>
-            <ac:picMk id="1026" creationId="{6C046BAE-91C8-EE8A-1004-A63F5049BA8D}"/>
-          </ac:picMkLst>
-        </pc:picChg>
-        <pc:cxnChg chg="add del">
-          <ac:chgData name="Oleksii Kamarali" userId="de8324e2-fdf7-4792-9275-2e8816b9f59b" providerId="ADAL" clId="{C0799EF4-FEE2-49D6-9381-FB1629B3C905}" dt="2026-03-16T08:22:17.098" v="43" actId="26606"/>
-          <ac:cxnSpMkLst>
-            <pc:docMk/>
-            <pc:sldMk cId="313293860" sldId="258"/>
-            <ac:cxnSpMk id="1040" creationId="{AA2EAA10-076F-46BD-8F0F-B9A2FB77A85C}"/>
-          </ac:cxnSpMkLst>
-        </pc:cxnChg>
-        <pc:cxnChg chg="add del">
-          <ac:chgData name="Oleksii Kamarali" userId="de8324e2-fdf7-4792-9275-2e8816b9f59b" providerId="ADAL" clId="{C0799EF4-FEE2-49D6-9381-FB1629B3C905}" dt="2026-03-16T08:22:17.098" v="43" actId="26606"/>
-          <ac:cxnSpMkLst>
-            <pc:docMk/>
-            <pc:sldMk cId="313293860" sldId="258"/>
-            <ac:cxnSpMk id="1041" creationId="{D891E407-403B-4764-86C9-33A56D3BCAA3}"/>
-          </ac:cxnSpMkLst>
-        </pc:cxnChg>
-      </pc:sldChg>
-      <pc:sldChg chg="modSp mod">
-        <pc:chgData name="Oleksii Kamarali" userId="de8324e2-fdf7-4792-9275-2e8816b9f59b" providerId="ADAL" clId="{C0799EF4-FEE2-49D6-9381-FB1629B3C905}" dt="2026-03-16T14:41:03.229" v="147" actId="20577"/>
-        <pc:sldMkLst>
-          <pc:docMk/>
-          <pc:sldMk cId="4250767071" sldId="264"/>
-        </pc:sldMkLst>
-        <pc:spChg chg="mod">
-          <ac:chgData name="Oleksii Kamarali" userId="de8324e2-fdf7-4792-9275-2e8816b9f59b" providerId="ADAL" clId="{C0799EF4-FEE2-49D6-9381-FB1629B3C905}" dt="2026-03-16T14:41:03.229" v="147" actId="20577"/>
-          <ac:spMkLst>
-            <pc:docMk/>
-            <pc:sldMk cId="4250767071" sldId="264"/>
-            <ac:spMk id="3" creationId="{F71C8352-948C-EAF5-F4FE-B6A12E61719F}"/>
+            <pc:sldMk cId="0" sldId="272"/>
+            <ac:spMk id="3" creationId="{5BA430ED-044B-3E3E-0D00-16A16228C17B}"/>
           </ac:spMkLst>
         </pc:spChg>
       </pc:sldChg>
-      <pc:sldChg chg="addSp delSp modSp mod setBg modNotesTx">
-        <pc:chgData name="Oleksii Kamarali" userId="de8324e2-fdf7-4792-9275-2e8816b9f59b" providerId="ADAL" clId="{C0799EF4-FEE2-49D6-9381-FB1629B3C905}" dt="2026-03-16T15:07:08.768" v="156" actId="20577"/>
+      <pc:sldChg chg="modSp add mod">
+        <pc:chgData name="Oleksii Kamarali" userId="de8324e2-fdf7-4792-9275-2e8816b9f59b" providerId="ADAL" clId="{FF9CE91F-C4AC-4D79-AC83-95F7466119A5}" dt="2026-03-22T19:44:17.830" v="233" actId="207"/>
         <pc:sldMkLst>
           <pc:docMk/>
-          <pc:sldMk cId="2370203106" sldId="265"/>
+          <pc:sldMk cId="0" sldId="273"/>
         </pc:sldMkLst>
-        <pc:spChg chg="mod ord">
-          <ac:chgData name="Oleksii Kamarali" userId="de8324e2-fdf7-4792-9275-2e8816b9f59b" providerId="ADAL" clId="{C0799EF4-FEE2-49D6-9381-FB1629B3C905}" dt="2026-03-16T14:48:12.283" v="154" actId="26606"/>
+        <pc:spChg chg="mod">
+          <ac:chgData name="Oleksii Kamarali" userId="de8324e2-fdf7-4792-9275-2e8816b9f59b" providerId="ADAL" clId="{FF9CE91F-C4AC-4D79-AC83-95F7466119A5}" dt="2026-03-22T19:44:17.830" v="233" actId="207"/>
           <ac:spMkLst>
             <pc:docMk/>
-            <pc:sldMk cId="2370203106" sldId="265"/>
-            <ac:spMk id="2" creationId="{991DF873-154E-1107-3B30-F012AF78D6CE}"/>
+            <pc:sldMk cId="0" sldId="273"/>
+            <ac:spMk id="3" creationId="{D0D21DDF-944D-B1EA-3D8A-8480D6BD6819}"/>
           </ac:spMkLst>
         </pc:spChg>
-        <pc:spChg chg="del mod">
-          <ac:chgData name="Oleksii Kamarali" userId="de8324e2-fdf7-4792-9275-2e8816b9f59b" providerId="ADAL" clId="{C0799EF4-FEE2-49D6-9381-FB1629B3C905}" dt="2026-03-16T14:25:32.042" v="88"/>
+      </pc:sldChg>
+      <pc:sldChg chg="addSp delSp modSp add del mod">
+        <pc:chgData name="Oleksii Kamarali" userId="de8324e2-fdf7-4792-9275-2e8816b9f59b" providerId="ADAL" clId="{FF9CE91F-C4AC-4D79-AC83-95F7466119A5}" dt="2026-03-23T07:01:04.658" v="522" actId="478"/>
+        <pc:sldMkLst>
+          <pc:docMk/>
+          <pc:sldMk cId="0" sldId="274"/>
+        </pc:sldMkLst>
+        <pc:spChg chg="mod">
+          <ac:chgData name="Oleksii Kamarali" userId="de8324e2-fdf7-4792-9275-2e8816b9f59b" providerId="ADAL" clId="{FF9CE91F-C4AC-4D79-AC83-95F7466119A5}" dt="2026-03-22T19:48:18.301" v="407" actId="207"/>
           <ac:spMkLst>
             <pc:docMk/>
-            <pc:sldMk cId="2370203106" sldId="265"/>
-            <ac:spMk id="3" creationId="{F79BA47D-420B-1D76-3413-A9705D6CF39D}"/>
+            <pc:sldMk cId="0" sldId="274"/>
+            <ac:spMk id="3" creationId="{1B688925-D083-21DA-6739-478DFB60F370}"/>
           </ac:spMkLst>
         </pc:spChg>
-        <pc:spChg chg="add del mod">
-          <ac:chgData name="Oleksii Kamarali" userId="de8324e2-fdf7-4792-9275-2e8816b9f59b" providerId="ADAL" clId="{C0799EF4-FEE2-49D6-9381-FB1629B3C905}" dt="2026-03-16T14:28:43.238" v="95" actId="478"/>
-          <ac:spMkLst>
-            <pc:docMk/>
-            <pc:sldMk cId="2370203106" sldId="265"/>
-            <ac:spMk id="4" creationId="{C26834D9-49F0-1BFB-3E6F-257338E6A982}"/>
-          </ac:spMkLst>
-        </pc:spChg>
-        <pc:spChg chg="add mod">
-          <ac:chgData name="Oleksii Kamarali" userId="de8324e2-fdf7-4792-9275-2e8816b9f59b" providerId="ADAL" clId="{C0799EF4-FEE2-49D6-9381-FB1629B3C905}" dt="2026-03-16T14:31:16.942" v="121" actId="14100"/>
-          <ac:spMkLst>
-            <pc:docMk/>
-            <pc:sldMk cId="2370203106" sldId="265"/>
-            <ac:spMk id="5" creationId="{80E66FF3-A71B-A782-7C4A-08950C73AA71}"/>
-          </ac:spMkLst>
-        </pc:spChg>
-        <pc:spChg chg="add del">
-          <ac:chgData name="Oleksii Kamarali" userId="de8324e2-fdf7-4792-9275-2e8816b9f59b" providerId="ADAL" clId="{C0799EF4-FEE2-49D6-9381-FB1629B3C905}" dt="2026-03-16T14:48:12.283" v="154" actId="26606"/>
-          <ac:spMkLst>
-            <pc:docMk/>
-            <pc:sldMk cId="2370203106" sldId="265"/>
-            <ac:spMk id="7" creationId="{6F5A5072-7B47-4D32-B52A-4EBBF590B8A5}"/>
-          </ac:spMkLst>
-        </pc:spChg>
-        <pc:spChg chg="add del">
-          <ac:chgData name="Oleksii Kamarali" userId="de8324e2-fdf7-4792-9275-2e8816b9f59b" providerId="ADAL" clId="{C0799EF4-FEE2-49D6-9381-FB1629B3C905}" dt="2026-03-16T14:19:33.651" v="87" actId="26606"/>
-          <ac:spMkLst>
-            <pc:docMk/>
-            <pc:sldMk cId="2370203106" sldId="265"/>
-            <ac:spMk id="8" creationId="{A7AE9375-4664-4DB2-922D-2782A6E439AC}"/>
-          </ac:spMkLst>
-        </pc:spChg>
-        <pc:spChg chg="add">
-          <ac:chgData name="Oleksii Kamarali" userId="de8324e2-fdf7-4792-9275-2e8816b9f59b" providerId="ADAL" clId="{C0799EF4-FEE2-49D6-9381-FB1629B3C905}" dt="2026-03-16T14:28:47.544" v="96" actId="26606"/>
-          <ac:spMkLst>
-            <pc:docMk/>
-            <pc:sldMk cId="2370203106" sldId="265"/>
-            <ac:spMk id="9" creationId="{9715DAF0-AE1B-46C9-8A6B-DB2AA05AB91D}"/>
-          </ac:spMkLst>
-        </pc:spChg>
-        <pc:spChg chg="add del">
-          <ac:chgData name="Oleksii Kamarali" userId="de8324e2-fdf7-4792-9275-2e8816b9f59b" providerId="ADAL" clId="{C0799EF4-FEE2-49D6-9381-FB1629B3C905}" dt="2026-03-16T14:48:12.283" v="154" actId="26606"/>
-          <ac:spMkLst>
-            <pc:docMk/>
-            <pc:sldMk cId="2370203106" sldId="265"/>
-            <ac:spMk id="11" creationId="{6016219D-510E-4184-9090-6D5578A87BD1}"/>
-          </ac:spMkLst>
-        </pc:spChg>
-        <pc:spChg chg="add del">
-          <ac:chgData name="Oleksii Kamarali" userId="de8324e2-fdf7-4792-9275-2e8816b9f59b" providerId="ADAL" clId="{C0799EF4-FEE2-49D6-9381-FB1629B3C905}" dt="2026-03-16T14:19:33.651" v="87" actId="26606"/>
-          <ac:spMkLst>
-            <pc:docMk/>
-            <pc:sldMk cId="2370203106" sldId="265"/>
-            <ac:spMk id="12" creationId="{9DD005C1-8C51-42D6-9BEE-B9B83849743D}"/>
-          </ac:spMkLst>
-        </pc:spChg>
-        <pc:spChg chg="add del">
-          <ac:chgData name="Oleksii Kamarali" userId="de8324e2-fdf7-4792-9275-2e8816b9f59b" providerId="ADAL" clId="{C0799EF4-FEE2-49D6-9381-FB1629B3C905}" dt="2026-03-16T14:48:12.283" v="154" actId="26606"/>
-          <ac:spMkLst>
-            <pc:docMk/>
-            <pc:sldMk cId="2370203106" sldId="265"/>
-            <ac:spMk id="13" creationId="{AFF4A713-7B75-4B21-90D7-5AB19547C728}"/>
-          </ac:spMkLst>
-        </pc:spChg>
-        <pc:spChg chg="add del">
-          <ac:chgData name="Oleksii Kamarali" userId="de8324e2-fdf7-4792-9275-2e8816b9f59b" providerId="ADAL" clId="{C0799EF4-FEE2-49D6-9381-FB1629B3C905}" dt="2026-03-16T14:48:12.283" v="154" actId="26606"/>
-          <ac:spMkLst>
-            <pc:docMk/>
-            <pc:sldMk cId="2370203106" sldId="265"/>
-            <ac:spMk id="15" creationId="{DC631C0B-6DA6-4E57-8231-CE32B3434A7E}"/>
-          </ac:spMkLst>
-        </pc:spChg>
-        <pc:spChg chg="add">
-          <ac:chgData name="Oleksii Kamarali" userId="de8324e2-fdf7-4792-9275-2e8816b9f59b" providerId="ADAL" clId="{C0799EF4-FEE2-49D6-9381-FB1629B3C905}" dt="2026-03-16T14:28:47.544" v="96" actId="26606"/>
-          <ac:spMkLst>
-            <pc:docMk/>
-            <pc:sldMk cId="2370203106" sldId="265"/>
-            <ac:spMk id="17" creationId="{C29501E6-A978-4A61-9689-9085AF97A53A}"/>
-          </ac:spMkLst>
-        </pc:spChg>
-        <pc:spChg chg="add del">
-          <ac:chgData name="Oleksii Kamarali" userId="de8324e2-fdf7-4792-9275-2e8816b9f59b" providerId="ADAL" clId="{C0799EF4-FEE2-49D6-9381-FB1629B3C905}" dt="2026-03-16T14:26:04.260" v="93" actId="26606"/>
-          <ac:spMkLst>
-            <pc:docMk/>
-            <pc:sldMk cId="2370203106" sldId="265"/>
-            <ac:spMk id="1030" creationId="{7BAC9077-639E-77BA-08B9-674FAF0D40E3}"/>
-          </ac:spMkLst>
-        </pc:spChg>
-        <pc:spChg chg="add del">
-          <ac:chgData name="Oleksii Kamarali" userId="de8324e2-fdf7-4792-9275-2e8816b9f59b" providerId="ADAL" clId="{C0799EF4-FEE2-49D6-9381-FB1629B3C905}" dt="2026-03-16T14:48:12.283" v="154" actId="26606"/>
-          <ac:spMkLst>
-            <pc:docMk/>
-            <pc:sldMk cId="2370203106" sldId="265"/>
-            <ac:spMk id="1031" creationId="{73BCEA90-F7D5-4EC1-9BE2-5A49A20F4B1D}"/>
-          </ac:spMkLst>
-        </pc:spChg>
-        <pc:spChg chg="add del">
-          <ac:chgData name="Oleksii Kamarali" userId="de8324e2-fdf7-4792-9275-2e8816b9f59b" providerId="ADAL" clId="{C0799EF4-FEE2-49D6-9381-FB1629B3C905}" dt="2026-03-16T14:48:12.283" v="154" actId="26606"/>
-          <ac:spMkLst>
-            <pc:docMk/>
-            <pc:sldMk cId="2370203106" sldId="265"/>
-            <ac:spMk id="1032" creationId="{9848F91B-FA65-4A06-A177-8CCF7EBC8631}"/>
-          </ac:spMkLst>
-        </pc:spChg>
-        <pc:spChg chg="add del">
-          <ac:chgData name="Oleksii Kamarali" userId="de8324e2-fdf7-4792-9275-2e8816b9f59b" providerId="ADAL" clId="{C0799EF4-FEE2-49D6-9381-FB1629B3C905}" dt="2026-03-16T14:26:04.260" v="93" actId="26606"/>
-          <ac:spMkLst>
-            <pc:docMk/>
-            <pc:sldMk cId="2370203106" sldId="265"/>
-            <ac:spMk id="1033" creationId="{913AE63C-D5B4-45D1-ACFC-648CFFCF9805}"/>
-          </ac:spMkLst>
-        </pc:spChg>
-        <pc:spChg chg="add del">
-          <ac:chgData name="Oleksii Kamarali" userId="de8324e2-fdf7-4792-9275-2e8816b9f59b" providerId="ADAL" clId="{C0799EF4-FEE2-49D6-9381-FB1629B3C905}" dt="2026-03-16T14:48:12.283" v="154" actId="26606"/>
-          <ac:spMkLst>
-            <pc:docMk/>
-            <pc:sldMk cId="2370203106" sldId="265"/>
-            <ac:spMk id="1036" creationId="{D98779F6-5395-4B82-BDCB-4ADF6A5BB9E5}"/>
-          </ac:spMkLst>
-        </pc:spChg>
-        <pc:spChg chg="add del">
-          <ac:chgData name="Oleksii Kamarali" userId="de8324e2-fdf7-4792-9275-2e8816b9f59b" providerId="ADAL" clId="{C0799EF4-FEE2-49D6-9381-FB1629B3C905}" dt="2026-03-16T14:48:12.283" v="154" actId="26606"/>
-          <ac:spMkLst>
-            <pc:docMk/>
-            <pc:sldMk cId="2370203106" sldId="265"/>
-            <ac:spMk id="1037" creationId="{2CF7CF5F-D747-47B3-80B1-8392750446C6}"/>
-          </ac:spMkLst>
-        </pc:spChg>
-        <pc:spChg chg="add del">
-          <ac:chgData name="Oleksii Kamarali" userId="de8324e2-fdf7-4792-9275-2e8816b9f59b" providerId="ADAL" clId="{C0799EF4-FEE2-49D6-9381-FB1629B3C905}" dt="2026-03-16T14:26:04.260" v="93" actId="26606"/>
-          <ac:spMkLst>
-            <pc:docMk/>
-            <pc:sldMk cId="2370203106" sldId="265"/>
-            <ac:spMk id="1039" creationId="{BF9E7B5D-88C3-4C36-A22E-93AA384BA7B1}"/>
-          </ac:spMkLst>
-        </pc:spChg>
-        <pc:spChg chg="add del">
-          <ac:chgData name="Oleksii Kamarali" userId="de8324e2-fdf7-4792-9275-2e8816b9f59b" providerId="ADAL" clId="{C0799EF4-FEE2-49D6-9381-FB1629B3C905}" dt="2026-03-16T14:48:12.283" v="154" actId="26606"/>
-          <ac:spMkLst>
-            <pc:docMk/>
-            <pc:sldMk cId="2370203106" sldId="265"/>
-            <ac:spMk id="1045" creationId="{C70191CD-D48F-4F7A-8077-0380603A29E2}"/>
-          </ac:spMkLst>
-        </pc:spChg>
-        <pc:grpChg chg="add del">
-          <ac:chgData name="Oleksii Kamarali" userId="de8324e2-fdf7-4792-9275-2e8816b9f59b" providerId="ADAL" clId="{C0799EF4-FEE2-49D6-9381-FB1629B3C905}" dt="2026-03-16T14:26:04.260" v="93" actId="26606"/>
-          <ac:grpSpMkLst>
-            <pc:docMk/>
-            <pc:sldMk cId="2370203106" sldId="265"/>
-            <ac:grpSpMk id="1035" creationId="{6DCEF60B-EF3F-4A5E-BDC6-A2D840B90F2E}"/>
-          </ac:grpSpMkLst>
-        </pc:grpChg>
-        <pc:grpChg chg="add del">
-          <ac:chgData name="Oleksii Kamarali" userId="de8324e2-fdf7-4792-9275-2e8816b9f59b" providerId="ADAL" clId="{C0799EF4-FEE2-49D6-9381-FB1629B3C905}" dt="2026-03-16T14:26:04.260" v="93" actId="26606"/>
-          <ac:grpSpMkLst>
-            <pc:docMk/>
-            <pc:sldMk cId="2370203106" sldId="265"/>
-            <ac:grpSpMk id="1041" creationId="{E27AF472-EAE3-4572-AB69-B92BD10DBC6D}"/>
-          </ac:grpSpMkLst>
-        </pc:grpChg>
         <pc:picChg chg="add del mod">
-          <ac:chgData name="Oleksii Kamarali" userId="de8324e2-fdf7-4792-9275-2e8816b9f59b" providerId="ADAL" clId="{C0799EF4-FEE2-49D6-9381-FB1629B3C905}" dt="2026-03-16T14:26:08.516" v="94" actId="478"/>
+          <ac:chgData name="Oleksii Kamarali" userId="de8324e2-fdf7-4792-9275-2e8816b9f59b" providerId="ADAL" clId="{FF9CE91F-C4AC-4D79-AC83-95F7466119A5}" dt="2026-03-23T07:01:04.658" v="522" actId="478"/>
           <ac:picMkLst>
             <pc:docMk/>
-            <pc:sldMk cId="2370203106" sldId="265"/>
-            <ac:picMk id="1026" creationId="{D2A2AD62-59DA-7A0C-D1C4-53BA48B73473}"/>
+            <pc:sldMk cId="0" sldId="274"/>
+            <ac:picMk id="5" creationId="{AACE59F0-0452-910D-2799-B50A48ABE669}"/>
           </ac:picMkLst>
         </pc:picChg>
-        <pc:picChg chg="add del mod">
-          <ac:chgData name="Oleksii Kamarali" userId="de8324e2-fdf7-4792-9275-2e8816b9f59b" providerId="ADAL" clId="{C0799EF4-FEE2-49D6-9381-FB1629B3C905}" dt="2026-03-16T14:48:15.751" v="155" actId="478"/>
-          <ac:picMkLst>
-            <pc:docMk/>
-            <pc:sldMk cId="2370203106" sldId="265"/>
-            <ac:picMk id="1028" creationId="{CC46958E-98FA-BEC3-204B-77D5B6AA2F59}"/>
-          </ac:picMkLst>
-        </pc:picChg>
-        <pc:cxnChg chg="add del">
-          <ac:chgData name="Oleksii Kamarali" userId="de8324e2-fdf7-4792-9275-2e8816b9f59b" providerId="ADAL" clId="{C0799EF4-FEE2-49D6-9381-FB1629B3C905}" dt="2026-03-16T14:19:33.651" v="87" actId="26606"/>
-          <ac:cxnSpMkLst>
-            <pc:docMk/>
-            <pc:sldMk cId="2370203106" sldId="265"/>
-            <ac:cxnSpMk id="10" creationId="{EE504C98-6397-41C1-A8D8-2D9C4ED307E0}"/>
-          </ac:cxnSpMkLst>
-        </pc:cxnChg>
-      </pc:sldChg>
-      <pc:sldChg chg="addSp delSp new del mod">
-        <pc:chgData name="Oleksii Kamarali" userId="de8324e2-fdf7-4792-9275-2e8816b9f59b" providerId="ADAL" clId="{C0799EF4-FEE2-49D6-9381-FB1629B3C905}" dt="2026-03-16T14:46:24.407" v="151" actId="680"/>
-        <pc:sldMkLst>
-          <pc:docMk/>
-          <pc:sldMk cId="4287014719" sldId="266"/>
-        </pc:sldMkLst>
-        <pc:picChg chg="add del">
-          <ac:chgData name="Oleksii Kamarali" userId="de8324e2-fdf7-4792-9275-2e8816b9f59b" providerId="ADAL" clId="{C0799EF4-FEE2-49D6-9381-FB1629B3C905}" dt="2026-03-16T14:46:24.071" v="150" actId="22"/>
-          <ac:picMkLst>
-            <pc:docMk/>
-            <pc:sldMk cId="4287014719" sldId="266"/>
-            <ac:picMk id="5" creationId="{674C8B4B-6261-43B9-6078-3DB18853C8A7}"/>
-          </ac:picMkLst>
-        </pc:picChg>
-      </pc:sldChg>
-    </pc:docChg>
-  </pc:docChgLst>
-  <pc:docChgLst>
-    <pc:chgData name="Dylan Pinto Davide" userId="6a681bae-764f-48de-b341-59cd27edd092" providerId="ADAL" clId="{D8E87E9A-7E9D-4E85-B3B4-E705950A12B6}"/>
-    <pc:docChg chg="modSld">
-      <pc:chgData name="Dylan Pinto Davide" userId="6a681bae-764f-48de-b341-59cd27edd092" providerId="ADAL" clId="{D8E87E9A-7E9D-4E85-B3B4-E705950A12B6}" dt="2026-03-16T14:30:41.252" v="17" actId="9405"/>
-      <pc:docMkLst>
-        <pc:docMk/>
-      </pc:docMkLst>
-      <pc:sldChg chg="addSp delSp modSp mod">
-        <pc:chgData name="Dylan Pinto Davide" userId="6a681bae-764f-48de-b341-59cd27edd092" providerId="ADAL" clId="{D8E87E9A-7E9D-4E85-B3B4-E705950A12B6}" dt="2026-03-16T14:27:50.559" v="13"/>
-        <pc:sldMkLst>
-          <pc:docMk/>
-          <pc:sldMk cId="506015394" sldId="259"/>
-        </pc:sldMkLst>
-        <pc:grpChg chg="del mod">
-          <ac:chgData name="Dylan Pinto Davide" userId="6a681bae-764f-48de-b341-59cd27edd092" providerId="ADAL" clId="{D8E87E9A-7E9D-4E85-B3B4-E705950A12B6}" dt="2026-03-16T14:26:25.082" v="8"/>
-          <ac:grpSpMkLst>
-            <pc:docMk/>
-            <pc:sldMk cId="506015394" sldId="259"/>
-            <ac:grpSpMk id="13" creationId="{A5BB75CA-8EFB-ACB3-8588-9735166C3427}"/>
-          </ac:grpSpMkLst>
-        </pc:grpChg>
-        <pc:grpChg chg="mod">
-          <ac:chgData name="Dylan Pinto Davide" userId="6a681bae-764f-48de-b341-59cd27edd092" providerId="ADAL" clId="{D8E87E9A-7E9D-4E85-B3B4-E705950A12B6}" dt="2026-03-16T14:26:25.082" v="8"/>
-          <ac:grpSpMkLst>
-            <pc:docMk/>
-            <pc:sldMk cId="506015394" sldId="259"/>
-            <ac:grpSpMk id="15" creationId="{B5F31FFA-4399-18F5-5904-A4D3D40C990F}"/>
-          </ac:grpSpMkLst>
-        </pc:grpChg>
-        <pc:grpChg chg="mod">
-          <ac:chgData name="Dylan Pinto Davide" userId="6a681bae-764f-48de-b341-59cd27edd092" providerId="ADAL" clId="{D8E87E9A-7E9D-4E85-B3B4-E705950A12B6}" dt="2026-03-16T14:27:50.559" v="13"/>
-          <ac:grpSpMkLst>
-            <pc:docMk/>
-            <pc:sldMk cId="506015394" sldId="259"/>
-            <ac:grpSpMk id="27" creationId="{FC9DD356-91A9-C093-E50D-A5F6DE267DD1}"/>
-          </ac:grpSpMkLst>
-        </pc:grpChg>
-        <pc:grpChg chg="mod">
-          <ac:chgData name="Dylan Pinto Davide" userId="6a681bae-764f-48de-b341-59cd27edd092" providerId="ADAL" clId="{D8E87E9A-7E9D-4E85-B3B4-E705950A12B6}" dt="2026-03-16T14:25:05.031" v="3"/>
-          <ac:grpSpMkLst>
-            <pc:docMk/>
-            <pc:sldMk cId="506015394" sldId="259"/>
-            <ac:grpSpMk id="40" creationId="{B9AC840C-677D-BF26-73CA-46C2165E94DC}"/>
-          </ac:grpSpMkLst>
-        </pc:grpChg>
-        <pc:inkChg chg="add mod">
-          <ac:chgData name="Dylan Pinto Davide" userId="6a681bae-764f-48de-b341-59cd27edd092" providerId="ADAL" clId="{D8E87E9A-7E9D-4E85-B3B4-E705950A12B6}" dt="2026-03-16T14:26:25.082" v="8"/>
-          <ac:inkMkLst>
-            <pc:docMk/>
-            <pc:sldMk cId="506015394" sldId="259"/>
-            <ac:inkMk id="11" creationId="{F9EAE66A-66F2-091C-3AC5-F89938FE6865}"/>
-          </ac:inkMkLst>
-        </pc:inkChg>
-        <pc:inkChg chg="add mod">
-          <ac:chgData name="Dylan Pinto Davide" userId="6a681bae-764f-48de-b341-59cd27edd092" providerId="ADAL" clId="{D8E87E9A-7E9D-4E85-B3B4-E705950A12B6}" dt="2026-03-16T14:26:25.082" v="8"/>
-          <ac:inkMkLst>
-            <pc:docMk/>
-            <pc:sldMk cId="506015394" sldId="259"/>
-            <ac:inkMk id="12" creationId="{56CD4534-C01C-2F64-1F72-6821BECDCDA0}"/>
-          </ac:inkMkLst>
-        </pc:inkChg>
-        <pc:inkChg chg="add mod">
-          <ac:chgData name="Dylan Pinto Davide" userId="6a681bae-764f-48de-b341-59cd27edd092" providerId="ADAL" clId="{D8E87E9A-7E9D-4E85-B3B4-E705950A12B6}" dt="2026-03-16T14:26:25.082" v="8"/>
-          <ac:inkMkLst>
-            <pc:docMk/>
-            <pc:sldMk cId="506015394" sldId="259"/>
-            <ac:inkMk id="14" creationId="{6DABA873-FF41-518B-DEB3-D5B1B0359A82}"/>
-          </ac:inkMkLst>
-        </pc:inkChg>
-        <pc:inkChg chg="add mod">
-          <ac:chgData name="Dylan Pinto Davide" userId="6a681bae-764f-48de-b341-59cd27edd092" providerId="ADAL" clId="{D8E87E9A-7E9D-4E85-B3B4-E705950A12B6}" dt="2026-03-16T14:27:50.559" v="13"/>
-          <ac:inkMkLst>
-            <pc:docMk/>
-            <pc:sldMk cId="506015394" sldId="259"/>
-            <ac:inkMk id="23" creationId="{C9C5CE7D-EC49-7CBD-D3C4-E17F254A97EC}"/>
-          </ac:inkMkLst>
-        </pc:inkChg>
-        <pc:inkChg chg="add mod">
-          <ac:chgData name="Dylan Pinto Davide" userId="6a681bae-764f-48de-b341-59cd27edd092" providerId="ADAL" clId="{D8E87E9A-7E9D-4E85-B3B4-E705950A12B6}" dt="2026-03-16T14:27:50.559" v="13"/>
-          <ac:inkMkLst>
-            <pc:docMk/>
-            <pc:sldMk cId="506015394" sldId="259"/>
-            <ac:inkMk id="24" creationId="{ACBD6697-D92F-78E1-E3B9-1BD40D962E21}"/>
-          </ac:inkMkLst>
-        </pc:inkChg>
-        <pc:inkChg chg="add mod">
-          <ac:chgData name="Dylan Pinto Davide" userId="6a681bae-764f-48de-b341-59cd27edd092" providerId="ADAL" clId="{D8E87E9A-7E9D-4E85-B3B4-E705950A12B6}" dt="2026-03-16T14:27:50.559" v="13"/>
-          <ac:inkMkLst>
-            <pc:docMk/>
-            <pc:sldMk cId="506015394" sldId="259"/>
-            <ac:inkMk id="25" creationId="{9F50E3CC-CCA6-44E9-CFB7-B8E8AD9CE34E}"/>
-          </ac:inkMkLst>
-        </pc:inkChg>
-        <pc:inkChg chg="add mod">
-          <ac:chgData name="Dylan Pinto Davide" userId="6a681bae-764f-48de-b341-59cd27edd092" providerId="ADAL" clId="{D8E87E9A-7E9D-4E85-B3B4-E705950A12B6}" dt="2026-03-16T14:27:50.559" v="13"/>
-          <ac:inkMkLst>
-            <pc:docMk/>
-            <pc:sldMk cId="506015394" sldId="259"/>
-            <ac:inkMk id="26" creationId="{3F84F1EC-4702-9E37-D9FC-ADA68C486CCB}"/>
-          </ac:inkMkLst>
-        </pc:inkChg>
-        <pc:inkChg chg="add mod">
-          <ac:chgData name="Dylan Pinto Davide" userId="6a681bae-764f-48de-b341-59cd27edd092" providerId="ADAL" clId="{D8E87E9A-7E9D-4E85-B3B4-E705950A12B6}" dt="2026-03-16T14:25:05.031" v="3"/>
-          <ac:inkMkLst>
-            <pc:docMk/>
-            <pc:sldMk cId="506015394" sldId="259"/>
-            <ac:inkMk id="37" creationId="{EEBA7489-412C-7D75-F3B9-D62349E42093}"/>
-          </ac:inkMkLst>
-        </pc:inkChg>
-        <pc:inkChg chg="add mod">
-          <ac:chgData name="Dylan Pinto Davide" userId="6a681bae-764f-48de-b341-59cd27edd092" providerId="ADAL" clId="{D8E87E9A-7E9D-4E85-B3B4-E705950A12B6}" dt="2026-03-16T14:25:05.031" v="3"/>
-          <ac:inkMkLst>
-            <pc:docMk/>
-            <pc:sldMk cId="506015394" sldId="259"/>
-            <ac:inkMk id="38" creationId="{3E7C8E0C-4770-94B5-FFBB-A5584C5E26CA}"/>
-          </ac:inkMkLst>
-        </pc:inkChg>
-        <pc:inkChg chg="add mod">
-          <ac:chgData name="Dylan Pinto Davide" userId="6a681bae-764f-48de-b341-59cd27edd092" providerId="ADAL" clId="{D8E87E9A-7E9D-4E85-B3B4-E705950A12B6}" dt="2026-03-16T14:25:05.031" v="3"/>
-          <ac:inkMkLst>
-            <pc:docMk/>
-            <pc:sldMk cId="506015394" sldId="259"/>
-            <ac:inkMk id="39" creationId="{E39EDBA9-6B8C-680F-9012-AE86EC6790D0}"/>
-          </ac:inkMkLst>
-        </pc:inkChg>
-      </pc:sldChg>
-      <pc:sldChg chg="addSp mod">
-        <pc:chgData name="Dylan Pinto Davide" userId="6a681bae-764f-48de-b341-59cd27edd092" providerId="ADAL" clId="{D8E87E9A-7E9D-4E85-B3B4-E705950A12B6}" dt="2026-03-16T14:30:41.252" v="17" actId="9405"/>
-        <pc:sldMkLst>
-          <pc:docMk/>
-          <pc:sldMk cId="940697554" sldId="263"/>
-        </pc:sldMkLst>
-        <pc:inkChg chg="add">
-          <ac:chgData name="Dylan Pinto Davide" userId="6a681bae-764f-48de-b341-59cd27edd092" providerId="ADAL" clId="{D8E87E9A-7E9D-4E85-B3B4-E705950A12B6}" dt="2026-03-16T14:30:38.665" v="14" actId="9405"/>
-          <ac:inkMkLst>
-            <pc:docMk/>
-            <pc:sldMk cId="940697554" sldId="263"/>
-            <ac:inkMk id="4" creationId="{A3CBF75D-2386-105C-556E-539633B07533}"/>
-          </ac:inkMkLst>
-        </pc:inkChg>
-        <pc:inkChg chg="add">
-          <ac:chgData name="Dylan Pinto Davide" userId="6a681bae-764f-48de-b341-59cd27edd092" providerId="ADAL" clId="{D8E87E9A-7E9D-4E85-B3B4-E705950A12B6}" dt="2026-03-16T14:30:39.825" v="15" actId="9405"/>
-          <ac:inkMkLst>
-            <pc:docMk/>
-            <pc:sldMk cId="940697554" sldId="263"/>
-            <ac:inkMk id="5" creationId="{F191C64E-0185-9692-BBB7-EFC499B4A221}"/>
-          </ac:inkMkLst>
-        </pc:inkChg>
-        <pc:inkChg chg="add">
-          <ac:chgData name="Dylan Pinto Davide" userId="6a681bae-764f-48de-b341-59cd27edd092" providerId="ADAL" clId="{D8E87E9A-7E9D-4E85-B3B4-E705950A12B6}" dt="2026-03-16T14:30:40.460" v="16" actId="9405"/>
-          <ac:inkMkLst>
-            <pc:docMk/>
-            <pc:sldMk cId="940697554" sldId="263"/>
-            <ac:inkMk id="6" creationId="{6EB54EF5-0053-3683-E3D0-5E591F9ACA54}"/>
-          </ac:inkMkLst>
-        </pc:inkChg>
-        <pc:inkChg chg="add">
-          <ac:chgData name="Dylan Pinto Davide" userId="6a681bae-764f-48de-b341-59cd27edd092" providerId="ADAL" clId="{D8E87E9A-7E9D-4E85-B3B4-E705950A12B6}" dt="2026-03-16T14:30:41.252" v="17" actId="9405"/>
-          <ac:inkMkLst>
-            <pc:docMk/>
-            <pc:sldMk cId="940697554" sldId="263"/>
-            <ac:inkMk id="7" creationId="{27A55413-A3F0-FD98-51F4-B1530FF17881}"/>
-          </ac:inkMkLst>
-        </pc:inkChg>
       </pc:sldChg>
     </pc:docChg>
   </pc:docChgLst>
@@ -1302,62 +1054,6 @@
             <ac:spMk id="3" creationId="{C1731B35-5E8F-645D-6841-B6E3CEC9258F}"/>
           </ac:spMkLst>
         </pc:spChg>
-        <pc:spChg chg="add del">
-          <ac:chgData name="Jean-Christophe Serrano" userId="73106b23-ce21-4623-a757-4fcfeb57a141" providerId="ADAL" clId="{5FB5CB0E-73FB-479E-9B49-D92C12A229E2}" dt="2026-03-16T17:37:11.776" v="176" actId="26606"/>
-          <ac:spMkLst>
-            <pc:docMk/>
-            <pc:sldMk cId="4179127901" sldId="270"/>
-            <ac:spMk id="2055" creationId="{7C432AFE-B3D2-4BFF-BF8F-96C27AFF1AC7}"/>
-          </ac:spMkLst>
-        </pc:spChg>
-        <pc:spChg chg="add del">
-          <ac:chgData name="Jean-Christophe Serrano" userId="73106b23-ce21-4623-a757-4fcfeb57a141" providerId="ADAL" clId="{5FB5CB0E-73FB-479E-9B49-D92C12A229E2}" dt="2026-03-16T17:37:11.776" v="176" actId="26606"/>
-          <ac:spMkLst>
-            <pc:docMk/>
-            <pc:sldMk cId="4179127901" sldId="270"/>
-            <ac:spMk id="2057" creationId="{AF2F604E-43BE-4DC3-B983-E071523364F8}"/>
-          </ac:spMkLst>
-        </pc:spChg>
-        <pc:spChg chg="add del">
-          <ac:chgData name="Jean-Christophe Serrano" userId="73106b23-ce21-4623-a757-4fcfeb57a141" providerId="ADAL" clId="{5FB5CB0E-73FB-479E-9B49-D92C12A229E2}" dt="2026-03-16T17:37:11.776" v="176" actId="26606"/>
-          <ac:spMkLst>
-            <pc:docMk/>
-            <pc:sldMk cId="4179127901" sldId="270"/>
-            <ac:spMk id="2059" creationId="{08C9B587-E65E-4B52-B37C-ABEBB6E87928}"/>
-          </ac:spMkLst>
-        </pc:spChg>
-        <pc:spChg chg="add del">
-          <ac:chgData name="Jean-Christophe Serrano" userId="73106b23-ce21-4623-a757-4fcfeb57a141" providerId="ADAL" clId="{5FB5CB0E-73FB-479E-9B49-D92C12A229E2}" dt="2026-03-16T17:37:23.838" v="180" actId="26606"/>
-          <ac:spMkLst>
-            <pc:docMk/>
-            <pc:sldMk cId="4179127901" sldId="270"/>
-            <ac:spMk id="2061" creationId="{9DECDBF4-02B6-4BB4-B65B-B8107AD6A9E8}"/>
-          </ac:spMkLst>
-        </pc:spChg>
-        <pc:spChg chg="add del">
-          <ac:chgData name="Jean-Christophe Serrano" userId="73106b23-ce21-4623-a757-4fcfeb57a141" providerId="ADAL" clId="{5FB5CB0E-73FB-479E-9B49-D92C12A229E2}" dt="2026-03-16T17:37:23.838" v="180" actId="26606"/>
-          <ac:spMkLst>
-            <pc:docMk/>
-            <pc:sldMk cId="4179127901" sldId="270"/>
-            <ac:spMk id="2062" creationId="{675FFAD0-2409-47F2-980A-2CF4FFC69BE2}"/>
-          </ac:spMkLst>
-        </pc:spChg>
-        <pc:spChg chg="add del">
-          <ac:chgData name="Jean-Christophe Serrano" userId="73106b23-ce21-4623-a757-4fcfeb57a141" providerId="ADAL" clId="{5FB5CB0E-73FB-479E-9B49-D92C12A229E2}" dt="2026-03-16T17:37:23.838" v="180" actId="26606"/>
-          <ac:spMkLst>
-            <pc:docMk/>
-            <pc:sldMk cId="4179127901" sldId="270"/>
-            <ac:spMk id="2063" creationId="{CBB2B1F0-0DD6-4744-9A46-7A344FB48E40}"/>
-          </ac:spMkLst>
-        </pc:spChg>
-        <pc:spChg chg="add del">
-          <ac:chgData name="Jean-Christophe Serrano" userId="73106b23-ce21-4623-a757-4fcfeb57a141" providerId="ADAL" clId="{5FB5CB0E-73FB-479E-9B49-D92C12A229E2}" dt="2026-03-16T17:37:23.838" v="180" actId="26606"/>
-          <ac:spMkLst>
-            <pc:docMk/>
-            <pc:sldMk cId="4179127901" sldId="270"/>
-            <ac:spMk id="2064" creationId="{52D502E5-F6B4-4D58-B4AE-FC466FF15EE8}"/>
-          </ac:spMkLst>
-        </pc:spChg>
         <pc:spChg chg="add">
           <ac:chgData name="Jean-Christophe Serrano" userId="73106b23-ce21-4623-a757-4fcfeb57a141" providerId="ADAL" clId="{5FB5CB0E-73FB-479E-9B49-D92C12A229E2}" dt="2026-03-16T17:37:23.838" v="180" actId="26606"/>
           <ac:spMkLst>
@@ -1390,51 +1086,11 @@
           <pc:sldMk cId="2341938027" sldId="271"/>
         </pc:sldMkLst>
         <pc:spChg chg="add del mod">
-          <ac:chgData name="Jean-Christophe Serrano" userId="73106b23-ce21-4623-a757-4fcfeb57a141" providerId="ADAL" clId="{5FB5CB0E-73FB-479E-9B49-D92C12A229E2}" dt="2026-03-16T17:40:37.607" v="208" actId="478"/>
-          <ac:spMkLst>
-            <pc:docMk/>
-            <pc:sldMk cId="2341938027" sldId="271"/>
-            <ac:spMk id="2" creationId="{A7183C3B-C55F-C205-E48E-3E95E9D4BF35}"/>
-          </ac:spMkLst>
-        </pc:spChg>
-        <pc:spChg chg="add del mod">
           <ac:chgData name="Jean-Christophe Serrano" userId="73106b23-ce21-4623-a757-4fcfeb57a141" providerId="ADAL" clId="{5FB5CB0E-73FB-479E-9B49-D92C12A229E2}" dt="2026-03-16T17:40:51.734" v="210" actId="255"/>
           <ac:spMkLst>
             <pc:docMk/>
             <pc:sldMk cId="2341938027" sldId="271"/>
             <ac:spMk id="3" creationId="{69D638EB-ECE8-30BE-D94C-650044848A23}"/>
-          </ac:spMkLst>
-        </pc:spChg>
-        <pc:spChg chg="add del mod">
-          <ac:chgData name="Jean-Christophe Serrano" userId="73106b23-ce21-4623-a757-4fcfeb57a141" providerId="ADAL" clId="{5FB5CB0E-73FB-479E-9B49-D92C12A229E2}" dt="2026-03-16T17:39:57.093" v="204" actId="26606"/>
-          <ac:spMkLst>
-            <pc:docMk/>
-            <pc:sldMk cId="2341938027" sldId="271"/>
-            <ac:spMk id="7" creationId="{69D638EB-ECE8-30BE-D94C-650044848A23}"/>
-          </ac:spMkLst>
-        </pc:spChg>
-        <pc:spChg chg="add del">
-          <ac:chgData name="Jean-Christophe Serrano" userId="73106b23-ce21-4623-a757-4fcfeb57a141" providerId="ADAL" clId="{5FB5CB0E-73FB-479E-9B49-D92C12A229E2}" dt="2026-03-16T17:39:57.093" v="204" actId="26606"/>
-          <ac:spMkLst>
-            <pc:docMk/>
-            <pc:sldMk cId="2341938027" sldId="271"/>
-            <ac:spMk id="8" creationId="{B6CDA21F-E7AF-4C75-8395-33F58D5B0E45}"/>
-          </ac:spMkLst>
-        </pc:spChg>
-        <pc:spChg chg="add del">
-          <ac:chgData name="Jean-Christophe Serrano" userId="73106b23-ce21-4623-a757-4fcfeb57a141" providerId="ADAL" clId="{5FB5CB0E-73FB-479E-9B49-D92C12A229E2}" dt="2026-03-16T17:39:57.093" v="204" actId="26606"/>
-          <ac:spMkLst>
-            <pc:docMk/>
-            <pc:sldMk cId="2341938027" sldId="271"/>
-            <ac:spMk id="15" creationId="{D5B0017B-2ECA-49AF-B397-DC140825DF8D}"/>
-          </ac:spMkLst>
-        </pc:spChg>
-        <pc:spChg chg="add del">
-          <ac:chgData name="Jean-Christophe Serrano" userId="73106b23-ce21-4623-a757-4fcfeb57a141" providerId="ADAL" clId="{5FB5CB0E-73FB-479E-9B49-D92C12A229E2}" dt="2026-03-16T17:39:55.563" v="200" actId="26606"/>
-          <ac:spMkLst>
-            <pc:docMk/>
-            <pc:sldMk cId="2341938027" sldId="271"/>
-            <ac:spMk id="24" creationId="{D1D34770-47A8-402C-AF23-2B653F2D88C1}"/>
           </ac:spMkLst>
         </pc:spChg>
         <pc:spChg chg="add">
@@ -1445,14 +1101,6 @@
             <ac:spMk id="1032" creationId="{04812C46-200A-4DEB-A05E-3ED6C68C2387}"/>
           </ac:spMkLst>
         </pc:spChg>
-        <pc:spChg chg="add del">
-          <ac:chgData name="Jean-Christophe Serrano" userId="73106b23-ce21-4623-a757-4fcfeb57a141" providerId="ADAL" clId="{5FB5CB0E-73FB-479E-9B49-D92C12A229E2}" dt="2026-03-16T17:39:50.900" v="196" actId="26606"/>
-          <ac:spMkLst>
-            <pc:docMk/>
-            <pc:sldMk cId="2341938027" sldId="271"/>
-            <ac:spMk id="1033" creationId="{7C432AFE-B3D2-4BFF-BF8F-96C27AFF1AC7}"/>
-          </ac:spMkLst>
-        </pc:spChg>
         <pc:spChg chg="add">
           <ac:chgData name="Jean-Christophe Serrano" userId="73106b23-ce21-4623-a757-4fcfeb57a141" providerId="ADAL" clId="{5FB5CB0E-73FB-479E-9B49-D92C12A229E2}" dt="2026-03-16T17:40:25.996" v="206" actId="26606"/>
           <ac:spMkLst>
@@ -1461,1314 +1109,12 @@
             <ac:spMk id="1034" creationId="{D1EA859B-E555-4109-94F3-6700E046E008}"/>
           </ac:spMkLst>
         </pc:spChg>
-        <pc:spChg chg="add del">
-          <ac:chgData name="Jean-Christophe Serrano" userId="73106b23-ce21-4623-a757-4fcfeb57a141" providerId="ADAL" clId="{5FB5CB0E-73FB-479E-9B49-D92C12A229E2}" dt="2026-03-16T17:39:50.900" v="196" actId="26606"/>
-          <ac:spMkLst>
-            <pc:docMk/>
-            <pc:sldMk cId="2341938027" sldId="271"/>
-            <ac:spMk id="1035" creationId="{AF2F604E-43BE-4DC3-B983-E071523364F8}"/>
-          </ac:spMkLst>
-        </pc:spChg>
-        <pc:spChg chg="add del">
-          <ac:chgData name="Jean-Christophe Serrano" userId="73106b23-ce21-4623-a757-4fcfeb57a141" providerId="ADAL" clId="{5FB5CB0E-73FB-479E-9B49-D92C12A229E2}" dt="2026-03-16T17:39:50.900" v="196" actId="26606"/>
-          <ac:spMkLst>
-            <pc:docMk/>
-            <pc:sldMk cId="2341938027" sldId="271"/>
-            <ac:spMk id="1037" creationId="{08C9B587-E65E-4B52-B37C-ABEBB6E87928}"/>
-          </ac:spMkLst>
-        </pc:spChg>
-        <pc:spChg chg="add del">
-          <ac:chgData name="Jean-Christophe Serrano" userId="73106b23-ce21-4623-a757-4fcfeb57a141" providerId="ADAL" clId="{5FB5CB0E-73FB-479E-9B49-D92C12A229E2}" dt="2026-03-16T17:39:54.782" v="198" actId="26606"/>
-          <ac:spMkLst>
-            <pc:docMk/>
-            <pc:sldMk cId="2341938027" sldId="271"/>
-            <ac:spMk id="1039" creationId="{F5897CCA-486C-491C-B4C1-5E5C95A82709}"/>
-          </ac:spMkLst>
-        </pc:spChg>
-        <pc:grpChg chg="add del">
-          <ac:chgData name="Jean-Christophe Serrano" userId="73106b23-ce21-4623-a757-4fcfeb57a141" providerId="ADAL" clId="{5FB5CB0E-73FB-479E-9B49-D92C12A229E2}" dt="2026-03-16T17:39:57.093" v="204" actId="26606"/>
-          <ac:grpSpMkLst>
-            <pc:docMk/>
-            <pc:sldMk cId="2341938027" sldId="271"/>
-            <ac:grpSpMk id="10" creationId="{AE1C45F0-260A-458C-96ED-C1F6D2151219}"/>
-          </ac:grpSpMkLst>
-        </pc:grpChg>
-        <pc:graphicFrameChg chg="add del">
-          <ac:chgData name="Jean-Christophe Serrano" userId="73106b23-ce21-4623-a757-4fcfeb57a141" providerId="ADAL" clId="{5FB5CB0E-73FB-479E-9B49-D92C12A229E2}" dt="2026-03-16T17:38:19.920" v="184" actId="26606"/>
-          <ac:graphicFrameMkLst>
-            <pc:docMk/>
-            <pc:sldMk cId="2341938027" sldId="271"/>
-            <ac:graphicFrameMk id="5" creationId="{63350B4F-A024-9729-CC13-15B54E06D4E2}"/>
-          </ac:graphicFrameMkLst>
-        </pc:graphicFrameChg>
-        <pc:graphicFrameChg chg="add del mod ord modGraphic">
-          <ac:chgData name="Jean-Christophe Serrano" userId="73106b23-ce21-4623-a757-4fcfeb57a141" providerId="ADAL" clId="{5FB5CB0E-73FB-479E-9B49-D92C12A229E2}" dt="2026-03-16T17:39:55.563" v="200" actId="26606"/>
-          <ac:graphicFrameMkLst>
-            <pc:docMk/>
-            <pc:sldMk cId="2341938027" sldId="271"/>
-            <ac:graphicFrameMk id="19" creationId="{74433912-197E-16BB-48F6-3D1F0129F8AF}"/>
-          </ac:graphicFrameMkLst>
-        </pc:graphicFrameChg>
-        <pc:picChg chg="add del">
-          <ac:chgData name="Jean-Christophe Serrano" userId="73106b23-ce21-4623-a757-4fcfeb57a141" providerId="ADAL" clId="{5FB5CB0E-73FB-479E-9B49-D92C12A229E2}" dt="2026-03-16T17:39:55.563" v="200" actId="26606"/>
-          <ac:picMkLst>
-            <pc:docMk/>
-            <pc:sldMk cId="2341938027" sldId="271"/>
-            <ac:picMk id="20" creationId="{722AA6A4-68AF-056C-D537-DC3516D992D8}"/>
-          </ac:picMkLst>
-        </pc:picChg>
-        <pc:picChg chg="add">
-          <ac:chgData name="Jean-Christophe Serrano" userId="73106b23-ce21-4623-a757-4fcfeb57a141" providerId="ADAL" clId="{5FB5CB0E-73FB-479E-9B49-D92C12A229E2}" dt="2026-03-16T17:36:55.914" v="173"/>
-          <ac:picMkLst>
-            <pc:docMk/>
-            <pc:sldMk cId="2341938027" sldId="271"/>
-            <ac:picMk id="1026" creationId="{EBF68F8C-F424-8D9B-5465-A92806472D43}"/>
-          </ac:picMkLst>
-        </pc:picChg>
-        <pc:picChg chg="add mod">
-          <ac:chgData name="Jean-Christophe Serrano" userId="73106b23-ce21-4623-a757-4fcfeb57a141" providerId="ADAL" clId="{5FB5CB0E-73FB-479E-9B49-D92C12A229E2}" dt="2026-03-16T17:39:54.782" v="198" actId="26606"/>
-          <ac:picMkLst>
-            <pc:docMk/>
-            <pc:sldMk cId="2341938027" sldId="271"/>
-            <ac:picMk id="1028" creationId="{AA626BD7-B032-3689-5B6A-904133CDC2E0}"/>
-          </ac:picMkLst>
-        </pc:picChg>
         <pc:picChg chg="add mod ord">
           <ac:chgData name="Jean-Christophe Serrano" userId="73106b23-ce21-4623-a757-4fcfeb57a141" providerId="ADAL" clId="{5FB5CB0E-73FB-479E-9B49-D92C12A229E2}" dt="2026-03-16T17:40:25.996" v="206" actId="26606"/>
           <ac:picMkLst>
             <pc:docMk/>
             <pc:sldMk cId="2341938027" sldId="271"/>
             <ac:picMk id="1030" creationId="{B8DD8A70-B3E4-0CAC-FDA2-8B76B3DD4AB6}"/>
-          </ac:picMkLst>
-        </pc:picChg>
-        <pc:cxnChg chg="add del">
-          <ac:chgData name="Jean-Christophe Serrano" userId="73106b23-ce21-4623-a757-4fcfeb57a141" providerId="ADAL" clId="{5FB5CB0E-73FB-479E-9B49-D92C12A229E2}" dt="2026-03-16T17:39:57.093" v="204" actId="26606"/>
-          <ac:cxnSpMkLst>
-            <pc:docMk/>
-            <pc:sldMk cId="2341938027" sldId="271"/>
-            <ac:cxnSpMk id="17" creationId="{6CF1BAF6-AD41-4082-B212-8A1F9A2E8779}"/>
-          </ac:cxnSpMkLst>
-        </pc:cxnChg>
-      </pc:sldChg>
-    </pc:docChg>
-  </pc:docChgLst>
-  <pc:docChgLst>
-    <pc:chgData name="Jean-Christophe Serrano" userId="73106b23-ce21-4623-a757-4fcfeb57a141" providerId="ADAL" clId="{4188578B-42E3-4D2B-A026-117DFA88464C}"/>
-    <pc:docChg chg="undo custSel addSld delSld modSld sldOrd">
-      <pc:chgData name="Jean-Christophe Serrano" userId="73106b23-ce21-4623-a757-4fcfeb57a141" providerId="ADAL" clId="{4188578B-42E3-4D2B-A026-117DFA88464C}" dt="2026-03-16T15:33:35.813" v="628" actId="27636"/>
-      <pc:docMkLst>
-        <pc:docMk/>
-      </pc:docMkLst>
-      <pc:sldChg chg="addSp modSp mod setBg addAnim setClrOvrMap">
-        <pc:chgData name="Jean-Christophe Serrano" userId="73106b23-ce21-4623-a757-4fcfeb57a141" providerId="ADAL" clId="{4188578B-42E3-4D2B-A026-117DFA88464C}" dt="2026-03-16T08:33:30.187" v="171" actId="1076"/>
-        <pc:sldMkLst>
-          <pc:docMk/>
-          <pc:sldMk cId="1623985094" sldId="256"/>
-        </pc:sldMkLst>
-        <pc:spChg chg="mod">
-          <ac:chgData name="Jean-Christophe Serrano" userId="73106b23-ce21-4623-a757-4fcfeb57a141" providerId="ADAL" clId="{4188578B-42E3-4D2B-A026-117DFA88464C}" dt="2026-03-16T08:33:30.187" v="171" actId="1076"/>
-          <ac:spMkLst>
-            <pc:docMk/>
-            <pc:sldMk cId="1623985094" sldId="256"/>
-            <ac:spMk id="2" creationId="{BAB67F4C-9EA4-9664-DDE9-DC766CC155D3}"/>
-          </ac:spMkLst>
-        </pc:spChg>
-        <pc:spChg chg="mod">
-          <ac:chgData name="Jean-Christophe Serrano" userId="73106b23-ce21-4623-a757-4fcfeb57a141" providerId="ADAL" clId="{4188578B-42E3-4D2B-A026-117DFA88464C}" dt="2026-03-16T08:32:51.926" v="169" actId="20577"/>
-          <ac:spMkLst>
-            <pc:docMk/>
-            <pc:sldMk cId="1623985094" sldId="256"/>
-            <ac:spMk id="3" creationId="{2EDA3886-903B-DE31-1125-593DCBF51C66}"/>
-          </ac:spMkLst>
-        </pc:spChg>
-        <pc:spChg chg="add">
-          <ac:chgData name="Jean-Christophe Serrano" userId="73106b23-ce21-4623-a757-4fcfeb57a141" providerId="ADAL" clId="{4188578B-42E3-4D2B-A026-117DFA88464C}" dt="2026-03-16T08:31:45.370" v="91" actId="26606"/>
-          <ac:spMkLst>
-            <pc:docMk/>
-            <pc:sldMk cId="1623985094" sldId="256"/>
-            <ac:spMk id="1031" creationId="{71B2258F-86CA-4D4D-8270-BC05FCDEBFB3}"/>
-          </ac:spMkLst>
-        </pc:spChg>
-        <pc:picChg chg="add mod ord">
-          <ac:chgData name="Jean-Christophe Serrano" userId="73106b23-ce21-4623-a757-4fcfeb57a141" providerId="ADAL" clId="{4188578B-42E3-4D2B-A026-117DFA88464C}" dt="2026-03-16T08:31:45.370" v="91" actId="26606"/>
-          <ac:picMkLst>
-            <pc:docMk/>
-            <pc:sldMk cId="1623985094" sldId="256"/>
-            <ac:picMk id="1026" creationId="{245325C8-7E10-30A8-0DE1-94F4EB3F81FB}"/>
-          </ac:picMkLst>
-        </pc:picChg>
-      </pc:sldChg>
-      <pc:sldChg chg="modSp new mod">
-        <pc:chgData name="Jean-Christophe Serrano" userId="73106b23-ce21-4623-a757-4fcfeb57a141" providerId="ADAL" clId="{4188578B-42E3-4D2B-A026-117DFA88464C}" dt="2026-03-16T14:11:11.658" v="267" actId="27636"/>
-        <pc:sldMkLst>
-          <pc:docMk/>
-          <pc:sldMk cId="1760741132" sldId="257"/>
-        </pc:sldMkLst>
-        <pc:spChg chg="mod">
-          <ac:chgData name="Jean-Christophe Serrano" userId="73106b23-ce21-4623-a757-4fcfeb57a141" providerId="ADAL" clId="{4188578B-42E3-4D2B-A026-117DFA88464C}" dt="2026-03-16T14:11:05.222" v="265" actId="255"/>
-          <ac:spMkLst>
-            <pc:docMk/>
-            <pc:sldMk cId="1760741132" sldId="257"/>
-            <ac:spMk id="2" creationId="{E4041585-2273-DCC1-7137-9CF9AD0F2A06}"/>
-          </ac:spMkLst>
-        </pc:spChg>
-        <pc:spChg chg="mod">
-          <ac:chgData name="Jean-Christophe Serrano" userId="73106b23-ce21-4623-a757-4fcfeb57a141" providerId="ADAL" clId="{4188578B-42E3-4D2B-A026-117DFA88464C}" dt="2026-03-16T14:11:11.658" v="267" actId="27636"/>
-          <ac:spMkLst>
-            <pc:docMk/>
-            <pc:sldMk cId="1760741132" sldId="257"/>
-            <ac:spMk id="3" creationId="{25B6DD9B-14CC-5F80-99AE-B086C7FF86A8}"/>
-          </ac:spMkLst>
-        </pc:spChg>
-      </pc:sldChg>
-      <pc:sldChg chg="del ord">
-        <pc:chgData name="Jean-Christophe Serrano" userId="73106b23-ce21-4623-a757-4fcfeb57a141" providerId="ADAL" clId="{4188578B-42E3-4D2B-A026-117DFA88464C}" dt="2026-03-16T15:01:15.088" v="576" actId="2696"/>
-        <pc:sldMkLst>
-          <pc:docMk/>
-          <pc:sldMk cId="313293860" sldId="258"/>
-        </pc:sldMkLst>
-      </pc:sldChg>
-      <pc:sldChg chg="addSp delSp modSp mod">
-        <pc:chgData name="Jean-Christophe Serrano" userId="73106b23-ce21-4623-a757-4fcfeb57a141" providerId="ADAL" clId="{4188578B-42E3-4D2B-A026-117DFA88464C}" dt="2026-03-16T14:53:30.911" v="553" actId="255"/>
-        <pc:sldMkLst>
-          <pc:docMk/>
-          <pc:sldMk cId="506015394" sldId="259"/>
-        </pc:sldMkLst>
-        <pc:spChg chg="mod">
-          <ac:chgData name="Jean-Christophe Serrano" userId="73106b23-ce21-4623-a757-4fcfeb57a141" providerId="ADAL" clId="{4188578B-42E3-4D2B-A026-117DFA88464C}" dt="2026-03-16T14:53:30.911" v="553" actId="255"/>
-          <ac:spMkLst>
-            <pc:docMk/>
-            <pc:sldMk cId="506015394" sldId="259"/>
-            <ac:spMk id="2" creationId="{4E56D5A8-E6E0-922B-2956-0F76551EF8CF}"/>
-          </ac:spMkLst>
-        </pc:spChg>
-        <pc:spChg chg="mod">
-          <ac:chgData name="Jean-Christophe Serrano" userId="73106b23-ce21-4623-a757-4fcfeb57a141" providerId="ADAL" clId="{4188578B-42E3-4D2B-A026-117DFA88464C}" dt="2026-03-16T09:21:37.843" v="262"/>
-          <ac:spMkLst>
-            <pc:docMk/>
-            <pc:sldMk cId="506015394" sldId="259"/>
-            <ac:spMk id="3" creationId="{221C2E44-5722-350A-AEDC-E0DDD904B450}"/>
-          </ac:spMkLst>
-        </pc:spChg>
-        <pc:grpChg chg="add del mod">
-          <ac:chgData name="Jean-Christophe Serrano" userId="73106b23-ce21-4623-a757-4fcfeb57a141" providerId="ADAL" clId="{4188578B-42E3-4D2B-A026-117DFA88464C}" dt="2026-03-16T14:23:26.880" v="286"/>
-          <ac:grpSpMkLst>
-            <pc:docMk/>
-            <pc:sldMk cId="506015394" sldId="259"/>
-            <ac:grpSpMk id="10" creationId="{258885C3-477A-47DE-9249-192F073E4DEF}"/>
-          </ac:grpSpMkLst>
-        </pc:grpChg>
-        <pc:grpChg chg="add del mod">
-          <ac:chgData name="Jean-Christophe Serrano" userId="73106b23-ce21-4623-a757-4fcfeb57a141" providerId="ADAL" clId="{4188578B-42E3-4D2B-A026-117DFA88464C}" dt="2026-03-16T14:23:26.247" v="283"/>
-          <ac:grpSpMkLst>
-            <pc:docMk/>
-            <pc:sldMk cId="506015394" sldId="259"/>
-            <ac:grpSpMk id="13" creationId="{A2339569-2842-F917-4824-4180339521F0}"/>
-          </ac:grpSpMkLst>
-        </pc:grpChg>
-        <pc:grpChg chg="mod">
-          <ac:chgData name="Jean-Christophe Serrano" userId="73106b23-ce21-4623-a757-4fcfeb57a141" providerId="ADAL" clId="{4188578B-42E3-4D2B-A026-117DFA88464C}" dt="2026-03-16T14:23:25.717" v="280"/>
-          <ac:grpSpMkLst>
-            <pc:docMk/>
-            <pc:sldMk cId="506015394" sldId="259"/>
-            <ac:grpSpMk id="16" creationId="{96EED30F-16CA-1064-E0E1-6E76D73AA4E2}"/>
-          </ac:grpSpMkLst>
-        </pc:grpChg>
-        <pc:grpChg chg="mod">
-          <ac:chgData name="Jean-Christophe Serrano" userId="73106b23-ce21-4623-a757-4fcfeb57a141" providerId="ADAL" clId="{4188578B-42E3-4D2B-A026-117DFA88464C}" dt="2026-03-16T14:27:41.889" v="363"/>
-          <ac:grpSpMkLst>
-            <pc:docMk/>
-            <pc:sldMk cId="506015394" sldId="259"/>
-            <ac:grpSpMk id="21" creationId="{C6DAFB7E-950E-907B-4BAE-24A4700BFB51}"/>
-          </ac:grpSpMkLst>
-        </pc:grpChg>
-        <pc:grpChg chg="mod">
-          <ac:chgData name="Jean-Christophe Serrano" userId="73106b23-ce21-4623-a757-4fcfeb57a141" providerId="ADAL" clId="{4188578B-42E3-4D2B-A026-117DFA88464C}" dt="2026-03-16T14:27:41.889" v="363"/>
-          <ac:grpSpMkLst>
-            <pc:docMk/>
-            <pc:sldMk cId="506015394" sldId="259"/>
-            <ac:grpSpMk id="22" creationId="{8028B753-09B6-5F52-D84A-563083575C62}"/>
-          </ac:grpSpMkLst>
-        </pc:grpChg>
-        <pc:grpChg chg="mod">
-          <ac:chgData name="Jean-Christophe Serrano" userId="73106b23-ce21-4623-a757-4fcfeb57a141" providerId="ADAL" clId="{4188578B-42E3-4D2B-A026-117DFA88464C}" dt="2026-03-16T14:24:41.990" v="323"/>
-          <ac:grpSpMkLst>
-            <pc:docMk/>
-            <pc:sldMk cId="506015394" sldId="259"/>
-            <ac:grpSpMk id="24" creationId="{054D1F60-802A-AB1D-1439-86C9CC66A673}"/>
-          </ac:grpSpMkLst>
-        </pc:grpChg>
-        <pc:grpChg chg="mod">
-          <ac:chgData name="Jean-Christophe Serrano" userId="73106b23-ce21-4623-a757-4fcfeb57a141" providerId="ADAL" clId="{4188578B-42E3-4D2B-A026-117DFA88464C}" dt="2026-03-16T14:24:39.898" v="312"/>
-          <ac:grpSpMkLst>
-            <pc:docMk/>
-            <pc:sldMk cId="506015394" sldId="259"/>
-            <ac:grpSpMk id="35" creationId="{89B51E43-C922-ABE5-5AE9-1F5CD7B3F24E}"/>
-          </ac:grpSpMkLst>
-        </pc:grpChg>
-        <pc:grpChg chg="mod">
-          <ac:chgData name="Jean-Christophe Serrano" userId="73106b23-ce21-4623-a757-4fcfeb57a141" providerId="ADAL" clId="{4188578B-42E3-4D2B-A026-117DFA88464C}" dt="2026-03-16T14:24:39.898" v="312"/>
-          <ac:grpSpMkLst>
-            <pc:docMk/>
-            <pc:sldMk cId="506015394" sldId="259"/>
-            <ac:grpSpMk id="36" creationId="{AF621CBF-C0C7-8710-BBB2-1276B8052934}"/>
-          </ac:grpSpMkLst>
-        </pc:grpChg>
-        <pc:grpChg chg="mod">
-          <ac:chgData name="Jean-Christophe Serrano" userId="73106b23-ce21-4623-a757-4fcfeb57a141" providerId="ADAL" clId="{4188578B-42E3-4D2B-A026-117DFA88464C}" dt="2026-03-16T14:25:26.677" v="336"/>
-          <ac:grpSpMkLst>
-            <pc:docMk/>
-            <pc:sldMk cId="506015394" sldId="259"/>
-            <ac:grpSpMk id="47" creationId="{DC143B82-381A-FA4B-A038-DB5E381A5E61}"/>
-          </ac:grpSpMkLst>
-        </pc:grpChg>
-        <pc:grpChg chg="del mod">
-          <ac:chgData name="Jean-Christophe Serrano" userId="73106b23-ce21-4623-a757-4fcfeb57a141" providerId="ADAL" clId="{4188578B-42E3-4D2B-A026-117DFA88464C}" dt="2026-03-16T14:25:49.454" v="350"/>
-          <ac:grpSpMkLst>
-            <pc:docMk/>
-            <pc:sldMk cId="506015394" sldId="259"/>
-            <ac:grpSpMk id="53" creationId="{E0789E16-5EC0-DFDC-6E28-C65362031E81}"/>
-          </ac:grpSpMkLst>
-        </pc:grpChg>
-        <pc:grpChg chg="mod">
-          <ac:chgData name="Jean-Christophe Serrano" userId="73106b23-ce21-4623-a757-4fcfeb57a141" providerId="ADAL" clId="{4188578B-42E3-4D2B-A026-117DFA88464C}" dt="2026-03-16T14:25:49.454" v="350"/>
-          <ac:grpSpMkLst>
-            <pc:docMk/>
-            <pc:sldMk cId="506015394" sldId="259"/>
-            <ac:grpSpMk id="56" creationId="{D89A75BB-2255-A550-7E42-27AF2726D78F}"/>
-          </ac:grpSpMkLst>
-        </pc:grpChg>
-        <pc:inkChg chg="add del mod">
-          <ac:chgData name="Jean-Christophe Serrano" userId="73106b23-ce21-4623-a757-4fcfeb57a141" providerId="ADAL" clId="{4188578B-42E3-4D2B-A026-117DFA88464C}" dt="2026-03-16T14:23:27.861" v="289" actId="9405"/>
-          <ac:inkMkLst>
-            <pc:docMk/>
-            <pc:sldMk cId="506015394" sldId="259"/>
-            <ac:inkMk id="4" creationId="{FF9C1692-0537-EE07-5D17-336A64DB88D4}"/>
-          </ac:inkMkLst>
-        </pc:inkChg>
-        <pc:inkChg chg="add del mod">
-          <ac:chgData name="Jean-Christophe Serrano" userId="73106b23-ce21-4623-a757-4fcfeb57a141" providerId="ADAL" clId="{4188578B-42E3-4D2B-A026-117DFA88464C}" dt="2026-03-16T14:23:27.556" v="288" actId="9405"/>
-          <ac:inkMkLst>
-            <pc:docMk/>
-            <pc:sldMk cId="506015394" sldId="259"/>
-            <ac:inkMk id="6" creationId="{97D0202F-A83D-4D67-F6D1-1D0BDC5D113D}"/>
-          </ac:inkMkLst>
-        </pc:inkChg>
-        <pc:inkChg chg="add del">
-          <ac:chgData name="Jean-Christophe Serrano" userId="73106b23-ce21-4623-a757-4fcfeb57a141" providerId="ADAL" clId="{4188578B-42E3-4D2B-A026-117DFA88464C}" dt="2026-03-16T14:27:43.650" v="371" actId="9405"/>
-          <ac:inkMkLst>
-            <pc:docMk/>
-            <pc:sldMk cId="506015394" sldId="259"/>
-            <ac:inkMk id="7" creationId="{2C945B91-B699-9EE1-3E58-70C55D71B536}"/>
-          </ac:inkMkLst>
-        </pc:inkChg>
-        <pc:inkChg chg="add del mod">
-          <ac:chgData name="Jean-Christophe Serrano" userId="73106b23-ce21-4623-a757-4fcfeb57a141" providerId="ADAL" clId="{4188578B-42E3-4D2B-A026-117DFA88464C}" dt="2026-03-16T14:23:27.220" v="287" actId="9405"/>
-          <ac:inkMkLst>
-            <pc:docMk/>
-            <pc:sldMk cId="506015394" sldId="259"/>
-            <ac:inkMk id="8" creationId="{29643740-F2BF-1EC8-7943-EB79D5ED8826}"/>
-          </ac:inkMkLst>
-        </pc:inkChg>
-        <pc:inkChg chg="add del mod">
-          <ac:chgData name="Jean-Christophe Serrano" userId="73106b23-ce21-4623-a757-4fcfeb57a141" providerId="ADAL" clId="{4188578B-42E3-4D2B-A026-117DFA88464C}" dt="2026-03-16T14:27:43.431" v="370" actId="9405"/>
-          <ac:inkMkLst>
-            <pc:docMk/>
-            <pc:sldMk cId="506015394" sldId="259"/>
-            <ac:inkMk id="8" creationId="{92342C07-8E27-CC3B-C826-C90F2E80F042}"/>
-          </ac:inkMkLst>
-        </pc:inkChg>
-        <pc:inkChg chg="add del mod">
-          <ac:chgData name="Jean-Christophe Serrano" userId="73106b23-ce21-4623-a757-4fcfeb57a141" providerId="ADAL" clId="{4188578B-42E3-4D2B-A026-117DFA88464C}" dt="2026-03-16T14:27:43.199" v="369" actId="9405"/>
-          <ac:inkMkLst>
-            <pc:docMk/>
-            <pc:sldMk cId="506015394" sldId="259"/>
-            <ac:inkMk id="9" creationId="{A4F7FB58-E10C-7817-69EB-8B2D11959935}"/>
-          </ac:inkMkLst>
-        </pc:inkChg>
-        <pc:inkChg chg="add del mod">
-          <ac:chgData name="Jean-Christophe Serrano" userId="73106b23-ce21-4623-a757-4fcfeb57a141" providerId="ADAL" clId="{4188578B-42E3-4D2B-A026-117DFA88464C}" dt="2026-03-16T14:23:26.880" v="286"/>
-          <ac:inkMkLst>
-            <pc:docMk/>
-            <pc:sldMk cId="506015394" sldId="259"/>
-            <ac:inkMk id="9" creationId="{E85C767B-0C08-6E8D-9FA8-412B2A1BCB20}"/>
-          </ac:inkMkLst>
-        </pc:inkChg>
-        <pc:inkChg chg="add del mod">
-          <ac:chgData name="Jean-Christophe Serrano" userId="73106b23-ce21-4623-a757-4fcfeb57a141" providerId="ADAL" clId="{4188578B-42E3-4D2B-A026-117DFA88464C}" dt="2026-03-16T14:27:42.972" v="368" actId="9405"/>
-          <ac:inkMkLst>
-            <pc:docMk/>
-            <pc:sldMk cId="506015394" sldId="259"/>
-            <ac:inkMk id="10" creationId="{807E7CD2-FD1A-C63E-DD54-79B0F600E484}"/>
-          </ac:inkMkLst>
-        </pc:inkChg>
-        <pc:inkChg chg="add del mod">
-          <ac:chgData name="Jean-Christophe Serrano" userId="73106b23-ce21-4623-a757-4fcfeb57a141" providerId="ADAL" clId="{4188578B-42E3-4D2B-A026-117DFA88464C}" dt="2026-03-16T14:23:26.534" v="284" actId="9405"/>
-          <ac:inkMkLst>
-            <pc:docMk/>
-            <pc:sldMk cId="506015394" sldId="259"/>
-            <ac:inkMk id="11" creationId="{BB52C3B5-A21A-B44F-5D0B-141F785FBC11}"/>
-          </ac:inkMkLst>
-        </pc:inkChg>
-        <pc:inkChg chg="add del mod">
-          <ac:chgData name="Jean-Christophe Serrano" userId="73106b23-ce21-4623-a757-4fcfeb57a141" providerId="ADAL" clId="{4188578B-42E3-4D2B-A026-117DFA88464C}" dt="2026-03-16T14:23:26.247" v="283"/>
-          <ac:inkMkLst>
-            <pc:docMk/>
-            <pc:sldMk cId="506015394" sldId="259"/>
-            <ac:inkMk id="12" creationId="{0BC47492-4181-ACF2-A5B4-0177DFED7008}"/>
-          </ac:inkMkLst>
-        </pc:inkChg>
-        <pc:inkChg chg="add del mod">
-          <ac:chgData name="Jean-Christophe Serrano" userId="73106b23-ce21-4623-a757-4fcfeb57a141" providerId="ADAL" clId="{4188578B-42E3-4D2B-A026-117DFA88464C}" dt="2026-03-16T14:23:26.001" v="281" actId="9405"/>
-          <ac:inkMkLst>
-            <pc:docMk/>
-            <pc:sldMk cId="506015394" sldId="259"/>
-            <ac:inkMk id="14" creationId="{2E5AC214-89FF-4009-2D9A-1341F0D1DA3D}"/>
-          </ac:inkMkLst>
-        </pc:inkChg>
-        <pc:inkChg chg="add del mod">
-          <ac:chgData name="Jean-Christophe Serrano" userId="73106b23-ce21-4623-a757-4fcfeb57a141" providerId="ADAL" clId="{4188578B-42E3-4D2B-A026-117DFA88464C}" dt="2026-03-16T14:23:25.717" v="280"/>
-          <ac:inkMkLst>
-            <pc:docMk/>
-            <pc:sldMk cId="506015394" sldId="259"/>
-            <ac:inkMk id="15" creationId="{77C8FD51-882A-9F1D-8BD8-CC41010C1E0F}"/>
-          </ac:inkMkLst>
-        </pc:inkChg>
-        <pc:inkChg chg="add del mod">
-          <ac:chgData name="Jean-Christophe Serrano" userId="73106b23-ce21-4623-a757-4fcfeb57a141" providerId="ADAL" clId="{4188578B-42E3-4D2B-A026-117DFA88464C}" dt="2026-03-16T14:27:42.747" v="367" actId="9405"/>
-          <ac:inkMkLst>
-            <pc:docMk/>
-            <pc:sldMk cId="506015394" sldId="259"/>
-            <ac:inkMk id="16" creationId="{8D34F1C5-5E75-E7C7-6672-9B593C9421AA}"/>
-          </ac:inkMkLst>
-        </pc:inkChg>
-        <pc:inkChg chg="add del mod">
-          <ac:chgData name="Jean-Christophe Serrano" userId="73106b23-ce21-4623-a757-4fcfeb57a141" providerId="ADAL" clId="{4188578B-42E3-4D2B-A026-117DFA88464C}" dt="2026-03-16T14:27:42.574" v="366" actId="9405"/>
-          <ac:inkMkLst>
-            <pc:docMk/>
-            <pc:sldMk cId="506015394" sldId="259"/>
-            <ac:inkMk id="17" creationId="{9C1960A0-1138-A1BA-C4A1-8CF2C76FA11C}"/>
-          </ac:inkMkLst>
-        </pc:inkChg>
-        <pc:inkChg chg="add del">
-          <ac:chgData name="Jean-Christophe Serrano" userId="73106b23-ce21-4623-a757-4fcfeb57a141" providerId="ADAL" clId="{4188578B-42E3-4D2B-A026-117DFA88464C}" dt="2026-03-16T14:23:34.480" v="293" actId="9405"/>
-          <ac:inkMkLst>
-            <pc:docMk/>
-            <pc:sldMk cId="506015394" sldId="259"/>
-            <ac:inkMk id="17" creationId="{9D9552E3-26E4-904C-94F7-701EEBA9E6C9}"/>
-          </ac:inkMkLst>
-        </pc:inkChg>
-        <pc:inkChg chg="add del mod">
-          <ac:chgData name="Jean-Christophe Serrano" userId="73106b23-ce21-4623-a757-4fcfeb57a141" providerId="ADAL" clId="{4188578B-42E3-4D2B-A026-117DFA88464C}" dt="2026-03-16T14:27:42.303" v="365" actId="9405"/>
-          <ac:inkMkLst>
-            <pc:docMk/>
-            <pc:sldMk cId="506015394" sldId="259"/>
-            <ac:inkMk id="18" creationId="{90DF5FAC-5BD7-E30A-5AFD-0CBAFFB81BD0}"/>
-          </ac:inkMkLst>
-        </pc:inkChg>
-        <pc:inkChg chg="add del">
-          <ac:chgData name="Jean-Christophe Serrano" userId="73106b23-ce21-4623-a757-4fcfeb57a141" providerId="ADAL" clId="{4188578B-42E3-4D2B-A026-117DFA88464C}" dt="2026-03-16T14:23:34.234" v="292" actId="9405"/>
-          <ac:inkMkLst>
-            <pc:docMk/>
-            <pc:sldMk cId="506015394" sldId="259"/>
-            <ac:inkMk id="18" creationId="{F95E0291-A955-30A3-4139-3EDCE269A76D}"/>
-          </ac:inkMkLst>
-        </pc:inkChg>
-        <pc:inkChg chg="add del mod">
-          <ac:chgData name="Jean-Christophe Serrano" userId="73106b23-ce21-4623-a757-4fcfeb57a141" providerId="ADAL" clId="{4188578B-42E3-4D2B-A026-117DFA88464C}" dt="2026-03-16T14:24:42.938" v="327" actId="9405"/>
-          <ac:inkMkLst>
-            <pc:docMk/>
-            <pc:sldMk cId="506015394" sldId="259"/>
-            <ac:inkMk id="19" creationId="{53A28916-020D-2AA8-F480-4DC8F43F8F36}"/>
-          </ac:inkMkLst>
-        </pc:inkChg>
-        <pc:inkChg chg="add del mod">
-          <ac:chgData name="Jean-Christophe Serrano" userId="73106b23-ce21-4623-a757-4fcfeb57a141" providerId="ADAL" clId="{4188578B-42E3-4D2B-A026-117DFA88464C}" dt="2026-03-16T14:27:42.143" v="364" actId="9405"/>
-          <ac:inkMkLst>
-            <pc:docMk/>
-            <pc:sldMk cId="506015394" sldId="259"/>
-            <ac:inkMk id="19" creationId="{887EFDFF-7101-A9C5-89EE-E92944AF7C20}"/>
-          </ac:inkMkLst>
-        </pc:inkChg>
-        <pc:inkChg chg="add del mod">
-          <ac:chgData name="Jean-Christophe Serrano" userId="73106b23-ce21-4623-a757-4fcfeb57a141" providerId="ADAL" clId="{4188578B-42E3-4D2B-A026-117DFA88464C}" dt="2026-03-16T14:24:42.725" v="326" actId="9405"/>
-          <ac:inkMkLst>
-            <pc:docMk/>
-            <pc:sldMk cId="506015394" sldId="259"/>
-            <ac:inkMk id="20" creationId="{E1536A6C-BBF2-B3B5-44D2-D6620A11572C}"/>
-          </ac:inkMkLst>
-        </pc:inkChg>
-        <pc:inkChg chg="add del mod">
-          <ac:chgData name="Jean-Christophe Serrano" userId="73106b23-ce21-4623-a757-4fcfeb57a141" providerId="ADAL" clId="{4188578B-42E3-4D2B-A026-117DFA88464C}" dt="2026-03-16T14:27:41.889" v="363"/>
-          <ac:inkMkLst>
-            <pc:docMk/>
-            <pc:sldMk cId="506015394" sldId="259"/>
-            <ac:inkMk id="20" creationId="{F7E6A266-1361-A9C7-84EC-60C6F88F1998}"/>
-          </ac:inkMkLst>
-        </pc:inkChg>
-        <pc:inkChg chg="add del mod">
-          <ac:chgData name="Jean-Christophe Serrano" userId="73106b23-ce21-4623-a757-4fcfeb57a141" providerId="ADAL" clId="{4188578B-42E3-4D2B-A026-117DFA88464C}" dt="2026-03-16T14:24:42.532" v="325" actId="9405"/>
-          <ac:inkMkLst>
-            <pc:docMk/>
-            <pc:sldMk cId="506015394" sldId="259"/>
-            <ac:inkMk id="21" creationId="{E03E14FF-7145-FAE6-9F7E-490E4601FB78}"/>
-          </ac:inkMkLst>
-        </pc:inkChg>
-        <pc:inkChg chg="add del mod">
-          <ac:chgData name="Jean-Christophe Serrano" userId="73106b23-ce21-4623-a757-4fcfeb57a141" providerId="ADAL" clId="{4188578B-42E3-4D2B-A026-117DFA88464C}" dt="2026-03-16T14:24:42.314" v="324" actId="9405"/>
-          <ac:inkMkLst>
-            <pc:docMk/>
-            <pc:sldMk cId="506015394" sldId="259"/>
-            <ac:inkMk id="22" creationId="{267C26C1-C8AF-3128-B44B-BB0DF0C00D58}"/>
-          </ac:inkMkLst>
-        </pc:inkChg>
-        <pc:inkChg chg="add del mod">
-          <ac:chgData name="Jean-Christophe Serrano" userId="73106b23-ce21-4623-a757-4fcfeb57a141" providerId="ADAL" clId="{4188578B-42E3-4D2B-A026-117DFA88464C}" dt="2026-03-16T14:24:41.990" v="323"/>
-          <ac:inkMkLst>
-            <pc:docMk/>
-            <pc:sldMk cId="506015394" sldId="259"/>
-            <ac:inkMk id="23" creationId="{DE24EEAB-F807-40B9-9A33-E681C1011D02}"/>
-          </ac:inkMkLst>
-        </pc:inkChg>
-        <pc:inkChg chg="add del mod">
-          <ac:chgData name="Jean-Christophe Serrano" userId="73106b23-ce21-4623-a757-4fcfeb57a141" providerId="ADAL" clId="{4188578B-42E3-4D2B-A026-117DFA88464C}" dt="2026-03-16T14:24:41.766" v="321" actId="9405"/>
-          <ac:inkMkLst>
-            <pc:docMk/>
-            <pc:sldMk cId="506015394" sldId="259"/>
-            <ac:inkMk id="25" creationId="{3C02597E-9665-5287-229E-1676B7820EAF}"/>
-          </ac:inkMkLst>
-        </pc:inkChg>
-        <pc:inkChg chg="add del mod">
-          <ac:chgData name="Jean-Christophe Serrano" userId="73106b23-ce21-4623-a757-4fcfeb57a141" providerId="ADAL" clId="{4188578B-42E3-4D2B-A026-117DFA88464C}" dt="2026-03-16T14:24:41.578" v="320" actId="9405"/>
-          <ac:inkMkLst>
-            <pc:docMk/>
-            <pc:sldMk cId="506015394" sldId="259"/>
-            <ac:inkMk id="26" creationId="{9A097EAE-94A7-686B-97F3-7703984FC2CA}"/>
-          </ac:inkMkLst>
-        </pc:inkChg>
-        <pc:inkChg chg="add del mod">
-          <ac:chgData name="Jean-Christophe Serrano" userId="73106b23-ce21-4623-a757-4fcfeb57a141" providerId="ADAL" clId="{4188578B-42E3-4D2B-A026-117DFA88464C}" dt="2026-03-16T14:24:41.364" v="319" actId="9405"/>
-          <ac:inkMkLst>
-            <pc:docMk/>
-            <pc:sldMk cId="506015394" sldId="259"/>
-            <ac:inkMk id="27" creationId="{8E8198E2-BDE9-9F98-0844-184792F8EEEA}"/>
-          </ac:inkMkLst>
-        </pc:inkChg>
-        <pc:inkChg chg="add del mod">
-          <ac:chgData name="Jean-Christophe Serrano" userId="73106b23-ce21-4623-a757-4fcfeb57a141" providerId="ADAL" clId="{4188578B-42E3-4D2B-A026-117DFA88464C}" dt="2026-03-16T14:24:41.156" v="318" actId="9405"/>
-          <ac:inkMkLst>
-            <pc:docMk/>
-            <pc:sldMk cId="506015394" sldId="259"/>
-            <ac:inkMk id="28" creationId="{84DFAA79-9423-40C8-51CC-0C660F90CF8E}"/>
-          </ac:inkMkLst>
-        </pc:inkChg>
-        <pc:inkChg chg="add del">
-          <ac:chgData name="Jean-Christophe Serrano" userId="73106b23-ce21-4623-a757-4fcfeb57a141" providerId="ADAL" clId="{4188578B-42E3-4D2B-A026-117DFA88464C}" dt="2026-03-16T14:24:40.946" v="317" actId="9405"/>
-          <ac:inkMkLst>
-            <pc:docMk/>
-            <pc:sldMk cId="506015394" sldId="259"/>
-            <ac:inkMk id="29" creationId="{F1E83247-083C-788D-8FD2-B6A3C6E2BA96}"/>
-          </ac:inkMkLst>
-        </pc:inkChg>
-        <pc:inkChg chg="add del mod">
-          <ac:chgData name="Jean-Christophe Serrano" userId="73106b23-ce21-4623-a757-4fcfeb57a141" providerId="ADAL" clId="{4188578B-42E3-4D2B-A026-117DFA88464C}" dt="2026-03-16T14:24:40.781" v="316" actId="9405"/>
-          <ac:inkMkLst>
-            <pc:docMk/>
-            <pc:sldMk cId="506015394" sldId="259"/>
-            <ac:inkMk id="30" creationId="{9B4198E6-8EED-7B25-7F05-119CD14C845A}"/>
-          </ac:inkMkLst>
-        </pc:inkChg>
-        <pc:inkChg chg="add del mod">
-          <ac:chgData name="Jean-Christophe Serrano" userId="73106b23-ce21-4623-a757-4fcfeb57a141" providerId="ADAL" clId="{4188578B-42E3-4D2B-A026-117DFA88464C}" dt="2026-03-16T14:24:40.582" v="315" actId="9405"/>
-          <ac:inkMkLst>
-            <pc:docMk/>
-            <pc:sldMk cId="506015394" sldId="259"/>
-            <ac:inkMk id="31" creationId="{E4871727-D280-EB3C-5DC0-FF77EF2AD0D9}"/>
-          </ac:inkMkLst>
-        </pc:inkChg>
-        <pc:inkChg chg="add del mod">
-          <ac:chgData name="Jean-Christophe Serrano" userId="73106b23-ce21-4623-a757-4fcfeb57a141" providerId="ADAL" clId="{4188578B-42E3-4D2B-A026-117DFA88464C}" dt="2026-03-16T14:24:40.374" v="314" actId="9405"/>
-          <ac:inkMkLst>
-            <pc:docMk/>
-            <pc:sldMk cId="506015394" sldId="259"/>
-            <ac:inkMk id="32" creationId="{8337D555-677D-547C-DC78-EA5F02509FC5}"/>
-          </ac:inkMkLst>
-        </pc:inkChg>
-        <pc:inkChg chg="add del mod">
-          <ac:chgData name="Jean-Christophe Serrano" userId="73106b23-ce21-4623-a757-4fcfeb57a141" providerId="ADAL" clId="{4188578B-42E3-4D2B-A026-117DFA88464C}" dt="2026-03-16T14:24:40.128" v="313" actId="9405"/>
-          <ac:inkMkLst>
-            <pc:docMk/>
-            <pc:sldMk cId="506015394" sldId="259"/>
-            <ac:inkMk id="33" creationId="{1C2B772B-5DE9-80DC-A61A-1C5C8D899261}"/>
-          </ac:inkMkLst>
-        </pc:inkChg>
-        <pc:inkChg chg="add del mod">
-          <ac:chgData name="Jean-Christophe Serrano" userId="73106b23-ce21-4623-a757-4fcfeb57a141" providerId="ADAL" clId="{4188578B-42E3-4D2B-A026-117DFA88464C}" dt="2026-03-16T14:24:39.898" v="312"/>
-          <ac:inkMkLst>
-            <pc:docMk/>
-            <pc:sldMk cId="506015394" sldId="259"/>
-            <ac:inkMk id="34" creationId="{CFC5F5F8-2AF5-08C9-5620-30C520F57711}"/>
-          </ac:inkMkLst>
-        </pc:inkChg>
-        <pc:inkChg chg="add del mod">
-          <ac:chgData name="Jean-Christophe Serrano" userId="73106b23-ce21-4623-a757-4fcfeb57a141" providerId="ADAL" clId="{4188578B-42E3-4D2B-A026-117DFA88464C}" dt="2026-03-16T14:25:27.875" v="341" actId="9405"/>
-          <ac:inkMkLst>
-            <pc:docMk/>
-            <pc:sldMk cId="506015394" sldId="259"/>
-            <ac:inkMk id="41" creationId="{F554220F-A1A4-B76C-DE90-EC3A62980702}"/>
-          </ac:inkMkLst>
-        </pc:inkChg>
-        <pc:inkChg chg="add del mod">
-          <ac:chgData name="Jean-Christophe Serrano" userId="73106b23-ce21-4623-a757-4fcfeb57a141" providerId="ADAL" clId="{4188578B-42E3-4D2B-A026-117DFA88464C}" dt="2026-03-16T14:25:27.614" v="340" actId="9405"/>
-          <ac:inkMkLst>
-            <pc:docMk/>
-            <pc:sldMk cId="506015394" sldId="259"/>
-            <ac:inkMk id="42" creationId="{3C4F4EEF-279F-207E-E475-C681A346A19B}"/>
-          </ac:inkMkLst>
-        </pc:inkChg>
-        <pc:inkChg chg="add del mod">
-          <ac:chgData name="Jean-Christophe Serrano" userId="73106b23-ce21-4623-a757-4fcfeb57a141" providerId="ADAL" clId="{4188578B-42E3-4D2B-A026-117DFA88464C}" dt="2026-03-16T14:25:27.357" v="339" actId="9405"/>
-          <ac:inkMkLst>
-            <pc:docMk/>
-            <pc:sldMk cId="506015394" sldId="259"/>
-            <ac:inkMk id="43" creationId="{D62FE603-8962-C029-790E-EEF9B6EEA743}"/>
-          </ac:inkMkLst>
-        </pc:inkChg>
-        <pc:inkChg chg="add del mod">
-          <ac:chgData name="Jean-Christophe Serrano" userId="73106b23-ce21-4623-a757-4fcfeb57a141" providerId="ADAL" clId="{4188578B-42E3-4D2B-A026-117DFA88464C}" dt="2026-03-16T14:25:27.131" v="338" actId="9405"/>
-          <ac:inkMkLst>
-            <pc:docMk/>
-            <pc:sldMk cId="506015394" sldId="259"/>
-            <ac:inkMk id="44" creationId="{083C9293-6264-603E-37AE-C8C235940DFD}"/>
-          </ac:inkMkLst>
-        </pc:inkChg>
-        <pc:inkChg chg="add del mod">
-          <ac:chgData name="Jean-Christophe Serrano" userId="73106b23-ce21-4623-a757-4fcfeb57a141" providerId="ADAL" clId="{4188578B-42E3-4D2B-A026-117DFA88464C}" dt="2026-03-16T14:25:26.917" v="337" actId="9405"/>
-          <ac:inkMkLst>
-            <pc:docMk/>
-            <pc:sldMk cId="506015394" sldId="259"/>
-            <ac:inkMk id="45" creationId="{292F6FF5-EB87-80F5-E688-08F6C76B41E7}"/>
-          </ac:inkMkLst>
-        </pc:inkChg>
-        <pc:inkChg chg="add del mod">
-          <ac:chgData name="Jean-Christophe Serrano" userId="73106b23-ce21-4623-a757-4fcfeb57a141" providerId="ADAL" clId="{4188578B-42E3-4D2B-A026-117DFA88464C}" dt="2026-03-16T14:25:26.677" v="336"/>
-          <ac:inkMkLst>
-            <pc:docMk/>
-            <pc:sldMk cId="506015394" sldId="259"/>
-            <ac:inkMk id="46" creationId="{4E750BF1-F5EA-9FF9-B3E0-9AF8BE966A4B}"/>
-          </ac:inkMkLst>
-        </pc:inkChg>
-        <pc:inkChg chg="add mod">
-          <ac:chgData name="Jean-Christophe Serrano" userId="73106b23-ce21-4623-a757-4fcfeb57a141" providerId="ADAL" clId="{4188578B-42E3-4D2B-A026-117DFA88464C}" dt="2026-03-16T14:25:49.454" v="350"/>
-          <ac:inkMkLst>
-            <pc:docMk/>
-            <pc:sldMk cId="506015394" sldId="259"/>
-            <ac:inkMk id="48" creationId="{3E9B83FD-1E84-6D7F-48EE-C1EDDAE15BD1}"/>
-          </ac:inkMkLst>
-        </pc:inkChg>
-        <pc:inkChg chg="add mod">
-          <ac:chgData name="Jean-Christophe Serrano" userId="73106b23-ce21-4623-a757-4fcfeb57a141" providerId="ADAL" clId="{4188578B-42E3-4D2B-A026-117DFA88464C}" dt="2026-03-16T14:25:49.454" v="350"/>
-          <ac:inkMkLst>
-            <pc:docMk/>
-            <pc:sldMk cId="506015394" sldId="259"/>
-            <ac:inkMk id="49" creationId="{9356E43F-0BF5-C43C-618D-5B245EE16B8E}"/>
-          </ac:inkMkLst>
-        </pc:inkChg>
-        <pc:inkChg chg="add mod">
-          <ac:chgData name="Jean-Christophe Serrano" userId="73106b23-ce21-4623-a757-4fcfeb57a141" providerId="ADAL" clId="{4188578B-42E3-4D2B-A026-117DFA88464C}" dt="2026-03-16T14:25:49.454" v="350"/>
-          <ac:inkMkLst>
-            <pc:docMk/>
-            <pc:sldMk cId="506015394" sldId="259"/>
-            <ac:inkMk id="50" creationId="{834D3065-6E4C-C26C-D5D7-E1C744A61400}"/>
-          </ac:inkMkLst>
-        </pc:inkChg>
-        <pc:inkChg chg="add mod">
-          <ac:chgData name="Jean-Christophe Serrano" userId="73106b23-ce21-4623-a757-4fcfeb57a141" providerId="ADAL" clId="{4188578B-42E3-4D2B-A026-117DFA88464C}" dt="2026-03-16T14:25:49.454" v="350"/>
-          <ac:inkMkLst>
-            <pc:docMk/>
-            <pc:sldMk cId="506015394" sldId="259"/>
-            <ac:inkMk id="51" creationId="{027DCDD0-95E2-C6FB-9C3F-D3B61245B10A}"/>
-          </ac:inkMkLst>
-        </pc:inkChg>
-        <pc:inkChg chg="add mod">
-          <ac:chgData name="Jean-Christophe Serrano" userId="73106b23-ce21-4623-a757-4fcfeb57a141" providerId="ADAL" clId="{4188578B-42E3-4D2B-A026-117DFA88464C}" dt="2026-03-16T14:25:49.454" v="350"/>
-          <ac:inkMkLst>
-            <pc:docMk/>
-            <pc:sldMk cId="506015394" sldId="259"/>
-            <ac:inkMk id="52" creationId="{1CD00480-5B82-E04C-B425-6049397216DD}"/>
-          </ac:inkMkLst>
-        </pc:inkChg>
-        <pc:inkChg chg="add mod">
-          <ac:chgData name="Jean-Christophe Serrano" userId="73106b23-ce21-4623-a757-4fcfeb57a141" providerId="ADAL" clId="{4188578B-42E3-4D2B-A026-117DFA88464C}" dt="2026-03-16T14:25:49.454" v="350"/>
-          <ac:inkMkLst>
-            <pc:docMk/>
-            <pc:sldMk cId="506015394" sldId="259"/>
-            <ac:inkMk id="54" creationId="{7BCC88EF-0368-2D2A-046E-37B1EF9EDF80}"/>
-          </ac:inkMkLst>
-        </pc:inkChg>
-        <pc:inkChg chg="add mod">
-          <ac:chgData name="Jean-Christophe Serrano" userId="73106b23-ce21-4623-a757-4fcfeb57a141" providerId="ADAL" clId="{4188578B-42E3-4D2B-A026-117DFA88464C}" dt="2026-03-16T14:25:49.454" v="350"/>
-          <ac:inkMkLst>
-            <pc:docMk/>
-            <pc:sldMk cId="506015394" sldId="259"/>
-            <ac:inkMk id="55" creationId="{FE9ECE7F-FDDA-0970-5864-4175267CADB1}"/>
-          </ac:inkMkLst>
-        </pc:inkChg>
-        <pc:inkChg chg="add">
-          <ac:chgData name="Jean-Christophe Serrano" userId="73106b23-ce21-4623-a757-4fcfeb57a141" providerId="ADAL" clId="{4188578B-42E3-4D2B-A026-117DFA88464C}" dt="2026-03-16T14:25:52.776" v="351" actId="9405"/>
-          <ac:inkMkLst>
-            <pc:docMk/>
-            <pc:sldMk cId="506015394" sldId="259"/>
-            <ac:inkMk id="57" creationId="{19BA8302-393C-980B-A8F4-BA1DC8240878}"/>
-          </ac:inkMkLst>
-        </pc:inkChg>
-      </pc:sldChg>
-      <pc:sldChg chg="addSp delSp modSp mod setBg setClrOvrMap">
-        <pc:chgData name="Jean-Christophe Serrano" userId="73106b23-ce21-4623-a757-4fcfeb57a141" providerId="ADAL" clId="{4188578B-42E3-4D2B-A026-117DFA88464C}" dt="2026-03-16T14:53:20.287" v="552" actId="255"/>
-        <pc:sldMkLst>
-          <pc:docMk/>
-          <pc:sldMk cId="3942389268" sldId="260"/>
-        </pc:sldMkLst>
-        <pc:spChg chg="mod ord">
-          <ac:chgData name="Jean-Christophe Serrano" userId="73106b23-ce21-4623-a757-4fcfeb57a141" providerId="ADAL" clId="{4188578B-42E3-4D2B-A026-117DFA88464C}" dt="2026-03-16T14:53:20.287" v="552" actId="255"/>
-          <ac:spMkLst>
-            <pc:docMk/>
-            <pc:sldMk cId="3942389268" sldId="260"/>
-            <ac:spMk id="2" creationId="{E0EC3B95-F112-4924-81EB-C9C6D4002BB3}"/>
-          </ac:spMkLst>
-        </pc:spChg>
-        <pc:spChg chg="mod ord">
-          <ac:chgData name="Jean-Christophe Serrano" userId="73106b23-ce21-4623-a757-4fcfeb57a141" providerId="ADAL" clId="{4188578B-42E3-4D2B-A026-117DFA88464C}" dt="2026-03-16T14:53:15.072" v="551" actId="255"/>
-          <ac:spMkLst>
-            <pc:docMk/>
-            <pc:sldMk cId="3942389268" sldId="260"/>
-            <ac:spMk id="3" creationId="{1870A98D-D40D-2D82-D609-A4CA538610F5}"/>
-          </ac:spMkLst>
-        </pc:spChg>
-        <pc:spChg chg="add del">
-          <ac:chgData name="Jean-Christophe Serrano" userId="73106b23-ce21-4623-a757-4fcfeb57a141" providerId="ADAL" clId="{4188578B-42E3-4D2B-A026-117DFA88464C}" dt="2026-03-16T14:50:06.425" v="545" actId="26606"/>
-          <ac:spMkLst>
-            <pc:docMk/>
-            <pc:sldMk cId="3942389268" sldId="260"/>
-            <ac:spMk id="1028" creationId="{04812C46-200A-4DEB-A05E-3ED6C68C2387}"/>
-          </ac:spMkLst>
-        </pc:spChg>
-        <pc:spChg chg="add del">
-          <ac:chgData name="Jean-Christophe Serrano" userId="73106b23-ce21-4623-a757-4fcfeb57a141" providerId="ADAL" clId="{4188578B-42E3-4D2B-A026-117DFA88464C}" dt="2026-03-16T14:50:06.425" v="545" actId="26606"/>
-          <ac:spMkLst>
-            <pc:docMk/>
-            <pc:sldMk cId="3942389268" sldId="260"/>
-            <ac:spMk id="1029" creationId="{D1EA859B-E555-4109-94F3-6700E046E008}"/>
-          </ac:spMkLst>
-        </pc:spChg>
-        <pc:spChg chg="add del">
-          <ac:chgData name="Jean-Christophe Serrano" userId="73106b23-ce21-4623-a757-4fcfeb57a141" providerId="ADAL" clId="{4188578B-42E3-4D2B-A026-117DFA88464C}" dt="2026-03-16T14:39:55.302" v="428" actId="26606"/>
-          <ac:spMkLst>
-            <pc:docMk/>
-            <pc:sldMk cId="3942389268" sldId="260"/>
-            <ac:spMk id="1031" creationId="{058A14AF-9FB5-4CC7-BA35-E8E85D3EDF0E}"/>
-          </ac:spMkLst>
-        </pc:spChg>
-        <pc:spChg chg="add del">
-          <ac:chgData name="Jean-Christophe Serrano" userId="73106b23-ce21-4623-a757-4fcfeb57a141" providerId="ADAL" clId="{4188578B-42E3-4D2B-A026-117DFA88464C}" dt="2026-03-16T14:52:39.639" v="547" actId="26606"/>
-          <ac:spMkLst>
-            <pc:docMk/>
-            <pc:sldMk cId="3942389268" sldId="260"/>
-            <ac:spMk id="1032" creationId="{102382E0-0A09-46AE-B955-B911CAFE7F00}"/>
-          </ac:spMkLst>
-        </pc:spChg>
-        <pc:spChg chg="add del">
-          <ac:chgData name="Jean-Christophe Serrano" userId="73106b23-ce21-4623-a757-4fcfeb57a141" providerId="ADAL" clId="{4188578B-42E3-4D2B-A026-117DFA88464C}" dt="2026-03-16T14:39:55.302" v="428" actId="26606"/>
-          <ac:spMkLst>
-            <pc:docMk/>
-            <pc:sldMk cId="3942389268" sldId="260"/>
-            <ac:spMk id="1033" creationId="{3A9A4357-BD1D-4622-A4FE-766E6AB8DE84}"/>
-          </ac:spMkLst>
-        </pc:spChg>
-        <pc:spChg chg="add del">
-          <ac:chgData name="Jean-Christophe Serrano" userId="73106b23-ce21-4623-a757-4fcfeb57a141" providerId="ADAL" clId="{4188578B-42E3-4D2B-A026-117DFA88464C}" dt="2026-03-16T14:52:39.639" v="547" actId="26606"/>
-          <ac:spMkLst>
-            <pc:docMk/>
-            <pc:sldMk cId="3942389268" sldId="260"/>
-            <ac:spMk id="1034" creationId="{0D7B6173-1D58-48E2-83CF-37350F315F75}"/>
-          </ac:spMkLst>
-        </pc:spChg>
-        <pc:spChg chg="add del">
-          <ac:chgData name="Jean-Christophe Serrano" userId="73106b23-ce21-4623-a757-4fcfeb57a141" providerId="ADAL" clId="{4188578B-42E3-4D2B-A026-117DFA88464C}" dt="2026-03-16T14:39:55.302" v="428" actId="26606"/>
-          <ac:spMkLst>
-            <pc:docMk/>
-            <pc:sldMk cId="3942389268" sldId="260"/>
-            <ac:spMk id="1035" creationId="{E659831F-0D9A-4C63-9EBB-8435B85A440F}"/>
-          </ac:spMkLst>
-        </pc:spChg>
-        <pc:spChg chg="add del">
-          <ac:chgData name="Jean-Christophe Serrano" userId="73106b23-ce21-4623-a757-4fcfeb57a141" providerId="ADAL" clId="{4188578B-42E3-4D2B-A026-117DFA88464C}" dt="2026-03-16T14:52:39.639" v="547" actId="26606"/>
-          <ac:spMkLst>
-            <pc:docMk/>
-            <pc:sldMk cId="3942389268" sldId="260"/>
-            <ac:spMk id="1036" creationId="{2F36CA75-CFBF-4844-B719-8FE9EBADA9AF}"/>
-          </ac:spMkLst>
-        </pc:spChg>
-        <pc:spChg chg="add del">
-          <ac:chgData name="Jean-Christophe Serrano" userId="73106b23-ce21-4623-a757-4fcfeb57a141" providerId="ADAL" clId="{4188578B-42E3-4D2B-A026-117DFA88464C}" dt="2026-03-16T14:39:55.302" v="428" actId="26606"/>
-          <ac:spMkLst>
-            <pc:docMk/>
-            <pc:sldMk cId="3942389268" sldId="260"/>
-            <ac:spMk id="1037" creationId="{E6995CE5-F890-4ABA-82A2-26507CE8D2A3}"/>
-          </ac:spMkLst>
-        </pc:spChg>
-        <pc:spChg chg="add del">
-          <ac:chgData name="Jean-Christophe Serrano" userId="73106b23-ce21-4623-a757-4fcfeb57a141" providerId="ADAL" clId="{4188578B-42E3-4D2B-A026-117DFA88464C}" dt="2026-03-16T14:52:39.639" v="547" actId="26606"/>
-          <ac:spMkLst>
-            <pc:docMk/>
-            <pc:sldMk cId="3942389268" sldId="260"/>
-            <ac:spMk id="1038" creationId="{3D4A84B9-E564-4DD0-97F8-DBF1C460C28A}"/>
-          </ac:spMkLst>
-        </pc:spChg>
-        <pc:spChg chg="add del">
-          <ac:chgData name="Jean-Christophe Serrano" userId="73106b23-ce21-4623-a757-4fcfeb57a141" providerId="ADAL" clId="{4188578B-42E3-4D2B-A026-117DFA88464C}" dt="2026-03-16T14:41:01.130" v="438" actId="26606"/>
-          <ac:spMkLst>
-            <pc:docMk/>
-            <pc:sldMk cId="3942389268" sldId="260"/>
-            <ac:spMk id="1039" creationId="{04812C46-200A-4DEB-A05E-3ED6C68C2387}"/>
-          </ac:spMkLst>
-        </pc:spChg>
-        <pc:spChg chg="add del">
-          <ac:chgData name="Jean-Christophe Serrano" userId="73106b23-ce21-4623-a757-4fcfeb57a141" providerId="ADAL" clId="{4188578B-42E3-4D2B-A026-117DFA88464C}" dt="2026-03-16T14:41:01.130" v="438" actId="26606"/>
-          <ac:spMkLst>
-            <pc:docMk/>
-            <pc:sldMk cId="3942389268" sldId="260"/>
-            <ac:spMk id="1040" creationId="{D1EA859B-E555-4109-94F3-6700E046E008}"/>
-          </ac:spMkLst>
-        </pc:spChg>
-        <pc:spChg chg="add del">
-          <ac:chgData name="Jean-Christophe Serrano" userId="73106b23-ce21-4623-a757-4fcfeb57a141" providerId="ADAL" clId="{4188578B-42E3-4D2B-A026-117DFA88464C}" dt="2026-03-16T14:52:39.639" v="547" actId="26606"/>
-          <ac:spMkLst>
-            <pc:docMk/>
-            <pc:sldMk cId="3942389268" sldId="260"/>
-            <ac:spMk id="1042" creationId="{7DE75D4A-0965-4973-BE75-DECCAC9A9614}"/>
-          </ac:spMkLst>
-        </pc:spChg>
-        <pc:spChg chg="add del">
-          <ac:chgData name="Jean-Christophe Serrano" userId="73106b23-ce21-4623-a757-4fcfeb57a141" providerId="ADAL" clId="{4188578B-42E3-4D2B-A026-117DFA88464C}" dt="2026-03-16T14:41:01.114" v="437" actId="26606"/>
-          <ac:spMkLst>
-            <pc:docMk/>
-            <pc:sldMk cId="3942389268" sldId="260"/>
-            <ac:spMk id="1045" creationId="{04C21BAE-6866-4C7A-A7EC-C1B2E572D5BE}"/>
-          </ac:spMkLst>
-        </pc:spChg>
-        <pc:spChg chg="add del">
-          <ac:chgData name="Jean-Christophe Serrano" userId="73106b23-ce21-4623-a757-4fcfeb57a141" providerId="ADAL" clId="{4188578B-42E3-4D2B-A026-117DFA88464C}" dt="2026-03-16T14:52:59.984" v="548" actId="26606"/>
-          <ac:spMkLst>
-            <pc:docMk/>
-            <pc:sldMk cId="3942389268" sldId="260"/>
-            <ac:spMk id="1046" creationId="{C5E6CFF1-2F42-4E10-9A97-F116F46F53FE}"/>
-          </ac:spMkLst>
-        </pc:spChg>
-        <pc:spChg chg="add del">
-          <ac:chgData name="Jean-Christophe Serrano" userId="73106b23-ce21-4623-a757-4fcfeb57a141" providerId="ADAL" clId="{4188578B-42E3-4D2B-A026-117DFA88464C}" dt="2026-03-16T14:41:01.114" v="437" actId="26606"/>
-          <ac:spMkLst>
-            <pc:docMk/>
-            <pc:sldMk cId="3942389268" sldId="260"/>
-            <ac:spMk id="1047" creationId="{C74F2646-08C7-4051-81DA-751C43A03FC1}"/>
-          </ac:spMkLst>
-        </pc:spChg>
-        <pc:spChg chg="add del">
-          <ac:chgData name="Jean-Christophe Serrano" userId="73106b23-ce21-4623-a757-4fcfeb57a141" providerId="ADAL" clId="{4188578B-42E3-4D2B-A026-117DFA88464C}" dt="2026-03-16T14:41:01.114" v="437" actId="26606"/>
-          <ac:spMkLst>
-            <pc:docMk/>
-            <pc:sldMk cId="3942389268" sldId="260"/>
-            <ac:spMk id="1049" creationId="{DCD6552F-C98B-4FBA-842F-3EF2D5ACA1FF}"/>
-          </ac:spMkLst>
-        </pc:spChg>
-        <pc:spChg chg="add">
-          <ac:chgData name="Jean-Christophe Serrano" userId="73106b23-ce21-4623-a757-4fcfeb57a141" providerId="ADAL" clId="{4188578B-42E3-4D2B-A026-117DFA88464C}" dt="2026-03-16T14:52:59.984" v="548" actId="26606"/>
-          <ac:spMkLst>
-            <pc:docMk/>
-            <pc:sldMk cId="3942389268" sldId="260"/>
-            <ac:spMk id="1050" creationId="{7C432AFE-B3D2-4BFF-BF8F-96C27AFF1AC7}"/>
-          </ac:spMkLst>
-        </pc:spChg>
-        <pc:spChg chg="add del">
-          <ac:chgData name="Jean-Christophe Serrano" userId="73106b23-ce21-4623-a757-4fcfeb57a141" providerId="ADAL" clId="{4188578B-42E3-4D2B-A026-117DFA88464C}" dt="2026-03-16T14:41:01.114" v="437" actId="26606"/>
-          <ac:spMkLst>
-            <pc:docMk/>
-            <pc:sldMk cId="3942389268" sldId="260"/>
-            <ac:spMk id="1051" creationId="{F0C518C2-0AA4-470C-87B9-9CBF428FBA25}"/>
-          </ac:spMkLst>
-        </pc:spChg>
-        <pc:spChg chg="add del">
-          <ac:chgData name="Jean-Christophe Serrano" userId="73106b23-ce21-4623-a757-4fcfeb57a141" providerId="ADAL" clId="{4188578B-42E3-4D2B-A026-117DFA88464C}" dt="2026-03-16T14:45:23.628" v="457" actId="26606"/>
-          <ac:spMkLst>
-            <pc:docMk/>
-            <pc:sldMk cId="3942389268" sldId="260"/>
-            <ac:spMk id="1053" creationId="{F13C74B1-5B17-4795-BED0-7140497B445A}"/>
-          </ac:spMkLst>
-        </pc:spChg>
-        <pc:spChg chg="add del">
-          <ac:chgData name="Jean-Christophe Serrano" userId="73106b23-ce21-4623-a757-4fcfeb57a141" providerId="ADAL" clId="{4188578B-42E3-4D2B-A026-117DFA88464C}" dt="2026-03-16T14:45:23.628" v="457" actId="26606"/>
-          <ac:spMkLst>
-            <pc:docMk/>
-            <pc:sldMk cId="3942389268" sldId="260"/>
-            <ac:spMk id="1054" creationId="{D4974D33-8DC5-464E-8C6D-BE58F0669C17}"/>
-          </ac:spMkLst>
-        </pc:spChg>
-        <pc:spChg chg="add">
-          <ac:chgData name="Jean-Christophe Serrano" userId="73106b23-ce21-4623-a757-4fcfeb57a141" providerId="ADAL" clId="{4188578B-42E3-4D2B-A026-117DFA88464C}" dt="2026-03-16T14:52:59.984" v="548" actId="26606"/>
-          <ac:spMkLst>
-            <pc:docMk/>
-            <pc:sldMk cId="3942389268" sldId="260"/>
-            <ac:spMk id="1055" creationId="{AF2F604E-43BE-4DC3-B983-E071523364F8}"/>
-          </ac:spMkLst>
-        </pc:spChg>
-        <pc:spChg chg="add">
-          <ac:chgData name="Jean-Christophe Serrano" userId="73106b23-ce21-4623-a757-4fcfeb57a141" providerId="ADAL" clId="{4188578B-42E3-4D2B-A026-117DFA88464C}" dt="2026-03-16T14:52:59.984" v="548" actId="26606"/>
-          <ac:spMkLst>
-            <pc:docMk/>
-            <pc:sldMk cId="3942389268" sldId="260"/>
-            <ac:spMk id="1057" creationId="{08C9B587-E65E-4B52-B37C-ABEBB6E87928}"/>
-          </ac:spMkLst>
-        </pc:spChg>
-        <pc:picChg chg="add mod ord">
-          <ac:chgData name="Jean-Christophe Serrano" userId="73106b23-ce21-4623-a757-4fcfeb57a141" providerId="ADAL" clId="{4188578B-42E3-4D2B-A026-117DFA88464C}" dt="2026-03-16T14:52:59.984" v="548" actId="26606"/>
-          <ac:picMkLst>
-            <pc:docMk/>
-            <pc:sldMk cId="3942389268" sldId="260"/>
-            <ac:picMk id="1026" creationId="{C2F28E48-DAB2-2512-BFBA-9D69C5633AFE}"/>
-          </ac:picMkLst>
-        </pc:picChg>
-        <pc:picChg chg="del">
-          <ac:chgData name="Jean-Christophe Serrano" userId="73106b23-ce21-4623-a757-4fcfeb57a141" providerId="ADAL" clId="{4188578B-42E3-4D2B-A026-117DFA88464C}" dt="2026-03-16T14:52:39.639" v="547" actId="26606"/>
-          <ac:picMkLst>
-            <pc:docMk/>
-            <pc:sldMk cId="3942389268" sldId="260"/>
-            <ac:picMk id="1044" creationId="{4A599609-F5C2-4A0B-A992-913F814A631A}"/>
-          </ac:picMkLst>
-        </pc:picChg>
-        <pc:cxnChg chg="del">
-          <ac:chgData name="Jean-Christophe Serrano" userId="73106b23-ce21-4623-a757-4fcfeb57a141" providerId="ADAL" clId="{4188578B-42E3-4D2B-A026-117DFA88464C}" dt="2026-03-16T14:52:59.984" v="548" actId="26606"/>
-          <ac:cxnSpMkLst>
-            <pc:docMk/>
-            <pc:sldMk cId="3942389268" sldId="260"/>
-            <ac:cxnSpMk id="1048" creationId="{96A8629B-8289-498B-939B-1CA0C106182C}"/>
-          </ac:cxnSpMkLst>
-        </pc:cxnChg>
-      </pc:sldChg>
-      <pc:sldChg chg="addSp delSp modSp new mod setBg">
-        <pc:chgData name="Jean-Christophe Serrano" userId="73106b23-ce21-4623-a757-4fcfeb57a141" providerId="ADAL" clId="{4188578B-42E3-4D2B-A026-117DFA88464C}" dt="2026-03-16T14:53:52.203" v="557" actId="1076"/>
-        <pc:sldMkLst>
-          <pc:docMk/>
-          <pc:sldMk cId="2333712965" sldId="261"/>
-        </pc:sldMkLst>
-        <pc:spChg chg="mod">
-          <ac:chgData name="Jean-Christophe Serrano" userId="73106b23-ce21-4623-a757-4fcfeb57a141" providerId="ADAL" clId="{4188578B-42E3-4D2B-A026-117DFA88464C}" dt="2026-03-16T14:53:38.385" v="554" actId="26606"/>
-          <ac:spMkLst>
-            <pc:docMk/>
-            <pc:sldMk cId="2333712965" sldId="261"/>
-            <ac:spMk id="2" creationId="{27530EA9-6749-52D1-CC8D-68EDC9690969}"/>
-          </ac:spMkLst>
-        </pc:spChg>
-        <pc:spChg chg="del">
-          <ac:chgData name="Jean-Christophe Serrano" userId="73106b23-ce21-4623-a757-4fcfeb57a141" providerId="ADAL" clId="{4188578B-42E3-4D2B-A026-117DFA88464C}" dt="2026-03-16T08:48:32.704" v="249"/>
-          <ac:spMkLst>
-            <pc:docMk/>
-            <pc:sldMk cId="2333712965" sldId="261"/>
-            <ac:spMk id="3" creationId="{655F47B7-31AE-EF1A-DE19-CF75BFE46C46}"/>
-          </ac:spMkLst>
-        </pc:spChg>
-        <pc:picChg chg="add del mod">
-          <ac:chgData name="Jean-Christophe Serrano" userId="73106b23-ce21-4623-a757-4fcfeb57a141" providerId="ADAL" clId="{4188578B-42E3-4D2B-A026-117DFA88464C}" dt="2026-03-16T08:48:34.202" v="250" actId="478"/>
-          <ac:picMkLst>
-            <pc:docMk/>
-            <pc:sldMk cId="2333712965" sldId="261"/>
-            <ac:picMk id="5" creationId="{D7B3962E-8C55-7013-3653-B2209AEA27FC}"/>
-          </ac:picMkLst>
-        </pc:picChg>
-        <pc:picChg chg="add mod ord">
-          <ac:chgData name="Jean-Christophe Serrano" userId="73106b23-ce21-4623-a757-4fcfeb57a141" providerId="ADAL" clId="{4188578B-42E3-4D2B-A026-117DFA88464C}" dt="2026-03-16T14:53:52.203" v="557" actId="1076"/>
-          <ac:picMkLst>
-            <pc:docMk/>
-            <pc:sldMk cId="2333712965" sldId="261"/>
-            <ac:picMk id="7" creationId="{D6B9E4ED-3A9F-B072-F2D4-936D7D84590D}"/>
-          </ac:picMkLst>
-        </pc:picChg>
-        <pc:cxnChg chg="add">
-          <ac:chgData name="Jean-Christophe Serrano" userId="73106b23-ce21-4623-a757-4fcfeb57a141" providerId="ADAL" clId="{4188578B-42E3-4D2B-A026-117DFA88464C}" dt="2026-03-16T14:53:38.385" v="554" actId="26606"/>
-          <ac:cxnSpMkLst>
-            <pc:docMk/>
-            <pc:sldMk cId="2333712965" sldId="261"/>
-            <ac:cxnSpMk id="12" creationId="{192712F8-36FA-35DF-0CE8-4098D93322A3}"/>
-          </ac:cxnSpMkLst>
-        </pc:cxnChg>
-        <pc:cxnChg chg="add">
-          <ac:chgData name="Jean-Christophe Serrano" userId="73106b23-ce21-4623-a757-4fcfeb57a141" providerId="ADAL" clId="{4188578B-42E3-4D2B-A026-117DFA88464C}" dt="2026-03-16T14:53:38.385" v="554" actId="26606"/>
-          <ac:cxnSpMkLst>
-            <pc:docMk/>
-            <pc:sldMk cId="2333712965" sldId="261"/>
-            <ac:cxnSpMk id="14" creationId="{AF9469B9-6468-5B6A-E832-8D4590388432}"/>
-          </ac:cxnSpMkLst>
-        </pc:cxnChg>
-      </pc:sldChg>
-      <pc:sldChg chg="addSp delSp modSp mod">
-        <pc:chgData name="Jean-Christophe Serrano" userId="73106b23-ce21-4623-a757-4fcfeb57a141" providerId="ADAL" clId="{4188578B-42E3-4D2B-A026-117DFA88464C}" dt="2026-03-16T15:13:39.040" v="593" actId="22"/>
-        <pc:sldMkLst>
-          <pc:docMk/>
-          <pc:sldMk cId="1787426261" sldId="262"/>
-        </pc:sldMkLst>
-        <pc:spChg chg="add del mod">
-          <ac:chgData name="Jean-Christophe Serrano" userId="73106b23-ce21-4623-a757-4fcfeb57a141" providerId="ADAL" clId="{4188578B-42E3-4D2B-A026-117DFA88464C}" dt="2026-03-16T15:13:39.040" v="593" actId="22"/>
-          <ac:spMkLst>
-            <pc:docMk/>
-            <pc:sldMk cId="1787426261" sldId="262"/>
-            <ac:spMk id="5" creationId="{B7DE3FD6-F37A-706B-5C2F-261B25AF951D}"/>
-          </ac:spMkLst>
-        </pc:spChg>
-      </pc:sldChg>
-      <pc:sldChg chg="addSp delSp modSp new mod setBg addAnim delAnim setClrOvrMap">
-        <pc:chgData name="Jean-Christophe Serrano" userId="73106b23-ce21-4623-a757-4fcfeb57a141" providerId="ADAL" clId="{4188578B-42E3-4D2B-A026-117DFA88464C}" dt="2026-03-16T15:33:35.813" v="628" actId="27636"/>
-        <pc:sldMkLst>
-          <pc:docMk/>
-          <pc:sldMk cId="454465971" sldId="266"/>
-        </pc:sldMkLst>
-        <pc:spChg chg="add del mod">
-          <ac:chgData name="Jean-Christophe Serrano" userId="73106b23-ce21-4623-a757-4fcfeb57a141" providerId="ADAL" clId="{4188578B-42E3-4D2B-A026-117DFA88464C}" dt="2026-03-16T14:49:40.399" v="544" actId="26606"/>
-          <ac:spMkLst>
-            <pc:docMk/>
-            <pc:sldMk cId="454465971" sldId="266"/>
-            <ac:spMk id="2" creationId="{C14D521E-D0AF-01F2-23E4-C396C1798FB7}"/>
-          </ac:spMkLst>
-        </pc:spChg>
-        <pc:spChg chg="mod ord">
-          <ac:chgData name="Jean-Christophe Serrano" userId="73106b23-ce21-4623-a757-4fcfeb57a141" providerId="ADAL" clId="{4188578B-42E3-4D2B-A026-117DFA88464C}" dt="2026-03-16T15:33:35.813" v="628" actId="27636"/>
-          <ac:spMkLst>
-            <pc:docMk/>
-            <pc:sldMk cId="454465971" sldId="266"/>
-            <ac:spMk id="3" creationId="{EC8AD011-E0A0-F298-4635-208779C049F3}"/>
-          </ac:spMkLst>
-        </pc:spChg>
-        <pc:spChg chg="add del">
-          <ac:chgData name="Jean-Christophe Serrano" userId="73106b23-ce21-4623-a757-4fcfeb57a141" providerId="ADAL" clId="{4188578B-42E3-4D2B-A026-117DFA88464C}" dt="2026-03-16T14:48:38.301" v="474" actId="26606"/>
-          <ac:spMkLst>
-            <pc:docMk/>
-            <pc:sldMk cId="454465971" sldId="266"/>
-            <ac:spMk id="2055" creationId="{D009D6D5-DAC2-4A8B-A17A-E206B9012D09}"/>
-          </ac:spMkLst>
-        </pc:spChg>
-        <pc:spChg chg="add del">
-          <ac:chgData name="Jean-Christophe Serrano" userId="73106b23-ce21-4623-a757-4fcfeb57a141" providerId="ADAL" clId="{4188578B-42E3-4D2B-A026-117DFA88464C}" dt="2026-03-16T14:49:40.399" v="543" actId="26606"/>
-          <ac:spMkLst>
-            <pc:docMk/>
-            <pc:sldMk cId="454465971" sldId="266"/>
-            <ac:spMk id="2057" creationId="{04812C46-200A-4DEB-A05E-3ED6C68C2387}"/>
-          </ac:spMkLst>
-        </pc:spChg>
-        <pc:spChg chg="add del">
-          <ac:chgData name="Jean-Christophe Serrano" userId="73106b23-ce21-4623-a757-4fcfeb57a141" providerId="ADAL" clId="{4188578B-42E3-4D2B-A026-117DFA88464C}" dt="2026-03-16T14:49:40.399" v="543" actId="26606"/>
-          <ac:spMkLst>
-            <pc:docMk/>
-            <pc:sldMk cId="454465971" sldId="266"/>
-            <ac:spMk id="2059" creationId="{D1EA859B-E555-4109-94F3-6700E046E008}"/>
-          </ac:spMkLst>
-        </pc:spChg>
-        <pc:spChg chg="add del">
-          <ac:chgData name="Jean-Christophe Serrano" userId="73106b23-ce21-4623-a757-4fcfeb57a141" providerId="ADAL" clId="{4188578B-42E3-4D2B-A026-117DFA88464C}" dt="2026-03-16T14:48:38.135" v="473" actId="26606"/>
-          <ac:spMkLst>
-            <pc:docMk/>
-            <pc:sldMk cId="454465971" sldId="266"/>
-            <ac:spMk id="2060" creationId="{04812C46-200A-4DEB-A05E-3ED6C68C2387}"/>
-          </ac:spMkLst>
-        </pc:spChg>
-        <pc:spChg chg="add">
-          <ac:chgData name="Jean-Christophe Serrano" userId="73106b23-ce21-4623-a757-4fcfeb57a141" providerId="ADAL" clId="{4188578B-42E3-4D2B-A026-117DFA88464C}" dt="2026-03-16T14:49:40.399" v="544" actId="26606"/>
-          <ac:spMkLst>
-            <pc:docMk/>
-            <pc:sldMk cId="454465971" sldId="266"/>
-            <ac:spMk id="2061" creationId="{71B2258F-86CA-4D4D-8270-BC05FCDEBFB3}"/>
-          </ac:spMkLst>
-        </pc:spChg>
-        <pc:spChg chg="add del">
-          <ac:chgData name="Jean-Christophe Serrano" userId="73106b23-ce21-4623-a757-4fcfeb57a141" providerId="ADAL" clId="{4188578B-42E3-4D2B-A026-117DFA88464C}" dt="2026-03-16T14:48:38.135" v="473" actId="26606"/>
-          <ac:spMkLst>
-            <pc:docMk/>
-            <pc:sldMk cId="454465971" sldId="266"/>
-            <ac:spMk id="2062" creationId="{D1EA859B-E555-4109-94F3-6700E046E008}"/>
-          </ac:spMkLst>
-        </pc:spChg>
-        <pc:picChg chg="add del mod">
-          <ac:chgData name="Jean-Christophe Serrano" userId="73106b23-ce21-4623-a757-4fcfeb57a141" providerId="ADAL" clId="{4188578B-42E3-4D2B-A026-117DFA88464C}" dt="2026-03-16T14:48:45.016" v="476" actId="478"/>
-          <ac:picMkLst>
-            <pc:docMk/>
-            <pc:sldMk cId="454465971" sldId="266"/>
-            <ac:picMk id="2050" creationId="{646688CA-4F14-A113-58F6-652E3A4E899F}"/>
-          </ac:picMkLst>
-        </pc:picChg>
-        <pc:picChg chg="add mod ord">
-          <ac:chgData name="Jean-Christophe Serrano" userId="73106b23-ce21-4623-a757-4fcfeb57a141" providerId="ADAL" clId="{4188578B-42E3-4D2B-A026-117DFA88464C}" dt="2026-03-16T14:49:40.399" v="544" actId="26606"/>
-          <ac:picMkLst>
-            <pc:docMk/>
-            <pc:sldMk cId="454465971" sldId="266"/>
-            <ac:picMk id="2052" creationId="{595BD9EE-2879-06EC-4027-896DBC18BAD5}"/>
-          </ac:picMkLst>
-        </pc:picChg>
-      </pc:sldChg>
-      <pc:sldChg chg="addSp delSp modSp new mod setBg">
-        <pc:chgData name="Jean-Christophe Serrano" userId="73106b23-ce21-4623-a757-4fcfeb57a141" providerId="ADAL" clId="{4188578B-42E3-4D2B-A026-117DFA88464C}" dt="2026-03-16T15:00:46.113" v="575" actId="255"/>
-        <pc:sldMkLst>
-          <pc:docMk/>
-          <pc:sldMk cId="583398316" sldId="267"/>
-        </pc:sldMkLst>
-        <pc:spChg chg="mod">
-          <ac:chgData name="Jean-Christophe Serrano" userId="73106b23-ce21-4623-a757-4fcfeb57a141" providerId="ADAL" clId="{4188578B-42E3-4D2B-A026-117DFA88464C}" dt="2026-03-16T15:00:39.761" v="574" actId="255"/>
-          <ac:spMkLst>
-            <pc:docMk/>
-            <pc:sldMk cId="583398316" sldId="267"/>
-            <ac:spMk id="2" creationId="{E71F5456-04F7-A51B-EBE9-FF87983F81FE}"/>
-          </ac:spMkLst>
-        </pc:spChg>
-        <pc:spChg chg="mod">
-          <ac:chgData name="Jean-Christophe Serrano" userId="73106b23-ce21-4623-a757-4fcfeb57a141" providerId="ADAL" clId="{4188578B-42E3-4D2B-A026-117DFA88464C}" dt="2026-03-16T15:00:46.113" v="575" actId="255"/>
-          <ac:spMkLst>
-            <pc:docMk/>
-            <pc:sldMk cId="583398316" sldId="267"/>
-            <ac:spMk id="3" creationId="{62D05BA1-EBB2-8356-B4CB-D1D35BE01ED9}"/>
-          </ac:spMkLst>
-        </pc:spChg>
-        <pc:spChg chg="add">
-          <ac:chgData name="Jean-Christophe Serrano" userId="73106b23-ce21-4623-a757-4fcfeb57a141" providerId="ADAL" clId="{4188578B-42E3-4D2B-A026-117DFA88464C}" dt="2026-03-16T14:59:24.279" v="564"/>
-          <ac:spMkLst>
-            <pc:docMk/>
-            <pc:sldMk cId="583398316" sldId="267"/>
-            <ac:spMk id="4" creationId="{56D96F13-AE54-184D-503F-4494C2478964}"/>
-          </ac:spMkLst>
-        </pc:spChg>
-        <pc:spChg chg="add del">
-          <ac:chgData name="Jean-Christophe Serrano" userId="73106b23-ce21-4623-a757-4fcfeb57a141" providerId="ADAL" clId="{4188578B-42E3-4D2B-A026-117DFA88464C}" dt="2026-03-16T14:59:29.310" v="566" actId="478"/>
-          <ac:spMkLst>
-            <pc:docMk/>
-            <pc:sldMk cId="583398316" sldId="267"/>
-            <ac:spMk id="5" creationId="{15D3C568-66C0-AB07-98FA-6AB9DA0676DB}"/>
-          </ac:spMkLst>
-        </pc:spChg>
-        <pc:spChg chg="add del">
-          <ac:chgData name="Jean-Christophe Serrano" userId="73106b23-ce21-4623-a757-4fcfeb57a141" providerId="ADAL" clId="{4188578B-42E3-4D2B-A026-117DFA88464C}" dt="2026-03-16T14:59:37.809" v="568" actId="478"/>
-          <ac:spMkLst>
-            <pc:docMk/>
-            <pc:sldMk cId="583398316" sldId="267"/>
-            <ac:spMk id="6" creationId="{876A3EF7-2DFF-8229-0274-84B26A6BC85B}"/>
-          </ac:spMkLst>
-        </pc:spChg>
-        <pc:spChg chg="add del mod">
-          <ac:chgData name="Jean-Christophe Serrano" userId="73106b23-ce21-4623-a757-4fcfeb57a141" providerId="ADAL" clId="{4188578B-42E3-4D2B-A026-117DFA88464C}" dt="2026-03-16T14:59:53.848" v="571" actId="478"/>
-          <ac:spMkLst>
-            <pc:docMk/>
-            <pc:sldMk cId="583398316" sldId="267"/>
-            <ac:spMk id="7" creationId="{D43A1848-968B-3163-8679-28A004301542}"/>
-          </ac:spMkLst>
-        </pc:spChg>
-        <pc:spChg chg="add">
-          <ac:chgData name="Jean-Christophe Serrano" userId="73106b23-ce21-4623-a757-4fcfeb57a141" providerId="ADAL" clId="{4188578B-42E3-4D2B-A026-117DFA88464C}" dt="2026-03-16T15:00:29.972" v="573" actId="26606"/>
-          <ac:spMkLst>
-            <pc:docMk/>
-            <pc:sldMk cId="583398316" sldId="267"/>
-            <ac:spMk id="14" creationId="{7C432AFE-B3D2-4BFF-BF8F-96C27AFF1AC7}"/>
-          </ac:spMkLst>
-        </pc:spChg>
-        <pc:spChg chg="add">
-          <ac:chgData name="Jean-Christophe Serrano" userId="73106b23-ce21-4623-a757-4fcfeb57a141" providerId="ADAL" clId="{4188578B-42E3-4D2B-A026-117DFA88464C}" dt="2026-03-16T15:00:29.972" v="573" actId="26606"/>
-          <ac:spMkLst>
-            <pc:docMk/>
-            <pc:sldMk cId="583398316" sldId="267"/>
-            <ac:spMk id="16" creationId="{AF2F604E-43BE-4DC3-B983-E071523364F8}"/>
-          </ac:spMkLst>
-        </pc:spChg>
-        <pc:spChg chg="add">
-          <ac:chgData name="Jean-Christophe Serrano" userId="73106b23-ce21-4623-a757-4fcfeb57a141" providerId="ADAL" clId="{4188578B-42E3-4D2B-A026-117DFA88464C}" dt="2026-03-16T15:00:29.972" v="573" actId="26606"/>
-          <ac:spMkLst>
-            <pc:docMk/>
-            <pc:sldMk cId="583398316" sldId="267"/>
-            <ac:spMk id="18" creationId="{08C9B587-E65E-4B52-B37C-ABEBB6E87928}"/>
-          </ac:spMkLst>
-        </pc:spChg>
-        <pc:picChg chg="add mod ord">
-          <ac:chgData name="Jean-Christophe Serrano" userId="73106b23-ce21-4623-a757-4fcfeb57a141" providerId="ADAL" clId="{4188578B-42E3-4D2B-A026-117DFA88464C}" dt="2026-03-16T15:00:29.972" v="573" actId="26606"/>
-          <ac:picMkLst>
-            <pc:docMk/>
-            <pc:sldMk cId="583398316" sldId="267"/>
-            <ac:picMk id="9" creationId="{78261043-6369-4E71-3892-5BC5B66E53E4}"/>
-          </ac:picMkLst>
-        </pc:picChg>
-      </pc:sldChg>
-      <pc:sldChg chg="addSp delSp modSp new mod setBg">
-        <pc:chgData name="Jean-Christophe Serrano" userId="73106b23-ce21-4623-a757-4fcfeb57a141" providerId="ADAL" clId="{4188578B-42E3-4D2B-A026-117DFA88464C}" dt="2026-03-16T15:06:12.893" v="589" actId="255"/>
-        <pc:sldMkLst>
-          <pc:docMk/>
-          <pc:sldMk cId="2851429643" sldId="268"/>
-        </pc:sldMkLst>
-        <pc:spChg chg="mod">
-          <ac:chgData name="Jean-Christophe Serrano" userId="73106b23-ce21-4623-a757-4fcfeb57a141" providerId="ADAL" clId="{4188578B-42E3-4D2B-A026-117DFA88464C}" dt="2026-03-16T15:06:08.342" v="588" actId="255"/>
-          <ac:spMkLst>
-            <pc:docMk/>
-            <pc:sldMk cId="2851429643" sldId="268"/>
-            <ac:spMk id="2" creationId="{631C4BE3-5A67-D135-9AC4-CC44A608D40F}"/>
-          </ac:spMkLst>
-        </pc:spChg>
-        <pc:spChg chg="mod">
-          <ac:chgData name="Jean-Christophe Serrano" userId="73106b23-ce21-4623-a757-4fcfeb57a141" providerId="ADAL" clId="{4188578B-42E3-4D2B-A026-117DFA88464C}" dt="2026-03-16T15:06:12.893" v="589" actId="255"/>
-          <ac:spMkLst>
-            <pc:docMk/>
-            <pc:sldMk cId="2851429643" sldId="268"/>
-            <ac:spMk id="3" creationId="{63D20B42-5F64-B9E1-51FB-CD795EAF44CC}"/>
-          </ac:spMkLst>
-        </pc:spChg>
-        <pc:spChg chg="add">
-          <ac:chgData name="Jean-Christophe Serrano" userId="73106b23-ce21-4623-a757-4fcfeb57a141" providerId="ADAL" clId="{4188578B-42E3-4D2B-A026-117DFA88464C}" dt="2026-03-16T15:04:34.963" v="581"/>
-          <ac:spMkLst>
-            <pc:docMk/>
-            <pc:sldMk cId="2851429643" sldId="268"/>
-            <ac:spMk id="4" creationId="{C37BF84F-6CAC-5728-6DC4-8FC35F78F924}"/>
-          </ac:spMkLst>
-        </pc:spChg>
-        <pc:spChg chg="add del">
-          <ac:chgData name="Jean-Christophe Serrano" userId="73106b23-ce21-4623-a757-4fcfeb57a141" providerId="ADAL" clId="{4188578B-42E3-4D2B-A026-117DFA88464C}" dt="2026-03-16T15:05:11.253" v="584" actId="26606"/>
-          <ac:spMkLst>
-            <pc:docMk/>
-            <pc:sldMk cId="2851429643" sldId="268"/>
-            <ac:spMk id="11" creationId="{7C432AFE-B3D2-4BFF-BF8F-96C27AFF1AC7}"/>
-          </ac:spMkLst>
-        </pc:spChg>
-        <pc:spChg chg="add del">
-          <ac:chgData name="Jean-Christophe Serrano" userId="73106b23-ce21-4623-a757-4fcfeb57a141" providerId="ADAL" clId="{4188578B-42E3-4D2B-A026-117DFA88464C}" dt="2026-03-16T15:05:11.253" v="584" actId="26606"/>
-          <ac:spMkLst>
-            <pc:docMk/>
-            <pc:sldMk cId="2851429643" sldId="268"/>
-            <ac:spMk id="13" creationId="{AF2F604E-43BE-4DC3-B983-E071523364F8}"/>
-          </ac:spMkLst>
-        </pc:spChg>
-        <pc:spChg chg="add del">
-          <ac:chgData name="Jean-Christophe Serrano" userId="73106b23-ce21-4623-a757-4fcfeb57a141" providerId="ADAL" clId="{4188578B-42E3-4D2B-A026-117DFA88464C}" dt="2026-03-16T15:05:11.253" v="584" actId="26606"/>
-          <ac:spMkLst>
-            <pc:docMk/>
-            <pc:sldMk cId="2851429643" sldId="268"/>
-            <ac:spMk id="15" creationId="{08C9B587-E65E-4B52-B37C-ABEBB6E87928}"/>
-          </ac:spMkLst>
-        </pc:spChg>
-        <pc:spChg chg="add">
-          <ac:chgData name="Jean-Christophe Serrano" userId="73106b23-ce21-4623-a757-4fcfeb57a141" providerId="ADAL" clId="{4188578B-42E3-4D2B-A026-117DFA88464C}" dt="2026-03-16T15:05:53.151" v="587" actId="26606"/>
-          <ac:spMkLst>
-            <pc:docMk/>
-            <pc:sldMk cId="2851429643" sldId="268"/>
-            <ac:spMk id="4105" creationId="{7C432AFE-B3D2-4BFF-BF8F-96C27AFF1AC7}"/>
-          </ac:spMkLst>
-        </pc:spChg>
-        <pc:spChg chg="add">
-          <ac:chgData name="Jean-Christophe Serrano" userId="73106b23-ce21-4623-a757-4fcfeb57a141" providerId="ADAL" clId="{4188578B-42E3-4D2B-A026-117DFA88464C}" dt="2026-03-16T15:05:53.151" v="587" actId="26606"/>
-          <ac:spMkLst>
-            <pc:docMk/>
-            <pc:sldMk cId="2851429643" sldId="268"/>
-            <ac:spMk id="4107" creationId="{AF2F604E-43BE-4DC3-B983-E071523364F8}"/>
-          </ac:spMkLst>
-        </pc:spChg>
-        <pc:spChg chg="add">
-          <ac:chgData name="Jean-Christophe Serrano" userId="73106b23-ce21-4623-a757-4fcfeb57a141" providerId="ADAL" clId="{4188578B-42E3-4D2B-A026-117DFA88464C}" dt="2026-03-16T15:05:53.151" v="587" actId="26606"/>
-          <ac:spMkLst>
-            <pc:docMk/>
-            <pc:sldMk cId="2851429643" sldId="268"/>
-            <ac:spMk id="4109" creationId="{08C9B587-E65E-4B52-B37C-ABEBB6E87928}"/>
-          </ac:spMkLst>
-        </pc:spChg>
-        <pc:picChg chg="add del mod ord">
-          <ac:chgData name="Jean-Christophe Serrano" userId="73106b23-ce21-4623-a757-4fcfeb57a141" providerId="ADAL" clId="{4188578B-42E3-4D2B-A026-117DFA88464C}" dt="2026-03-16T15:05:11.482" v="585" actId="931"/>
-          <ac:picMkLst>
-            <pc:docMk/>
-            <pc:sldMk cId="2851429643" sldId="268"/>
-            <ac:picMk id="6" creationId="{14573371-BA79-02D4-A3CC-41785B4747A0}"/>
-          </ac:picMkLst>
-        </pc:picChg>
-        <pc:picChg chg="add mod ord">
-          <ac:chgData name="Jean-Christophe Serrano" userId="73106b23-ce21-4623-a757-4fcfeb57a141" providerId="ADAL" clId="{4188578B-42E3-4D2B-A026-117DFA88464C}" dt="2026-03-16T15:05:53.151" v="587" actId="26606"/>
-          <ac:picMkLst>
-            <pc:docMk/>
-            <pc:sldMk cId="2851429643" sldId="268"/>
-            <ac:picMk id="4100" creationId="{817FD8BC-2BD3-432A-B40C-F692220329AF}"/>
-          </ac:picMkLst>
-        </pc:picChg>
-      </pc:sldChg>
-      <pc:sldChg chg="addSp modSp new mod setBg">
-        <pc:chgData name="Jean-Christophe Serrano" userId="73106b23-ce21-4623-a757-4fcfeb57a141" providerId="ADAL" clId="{4188578B-42E3-4D2B-A026-117DFA88464C}" dt="2026-03-16T15:25:29.220" v="605" actId="255"/>
-        <pc:sldMkLst>
-          <pc:docMk/>
-          <pc:sldMk cId="1401128112" sldId="269"/>
-        </pc:sldMkLst>
-        <pc:spChg chg="mod">
-          <ac:chgData name="Jean-Christophe Serrano" userId="73106b23-ce21-4623-a757-4fcfeb57a141" providerId="ADAL" clId="{4188578B-42E3-4D2B-A026-117DFA88464C}" dt="2026-03-16T15:25:23.920" v="604" actId="255"/>
-          <ac:spMkLst>
-            <pc:docMk/>
-            <pc:sldMk cId="1401128112" sldId="269"/>
-            <ac:spMk id="2" creationId="{814DECF0-73AB-6298-5C23-1B750C189EF1}"/>
-          </ac:spMkLst>
-        </pc:spChg>
-        <pc:spChg chg="mod">
-          <ac:chgData name="Jean-Christophe Serrano" userId="73106b23-ce21-4623-a757-4fcfeb57a141" providerId="ADAL" clId="{4188578B-42E3-4D2B-A026-117DFA88464C}" dt="2026-03-16T15:25:29.220" v="605" actId="255"/>
-          <ac:spMkLst>
-            <pc:docMk/>
-            <pc:sldMk cId="1401128112" sldId="269"/>
-            <ac:spMk id="3" creationId="{5443BAAB-A06E-951F-91F8-B8F9DB8A8D8D}"/>
-          </ac:spMkLst>
-        </pc:spChg>
-        <pc:spChg chg="add">
-          <ac:chgData name="Jean-Christophe Serrano" userId="73106b23-ce21-4623-a757-4fcfeb57a141" providerId="ADAL" clId="{4188578B-42E3-4D2B-A026-117DFA88464C}" dt="2026-03-16T15:23:54.305" v="599"/>
-          <ac:spMkLst>
-            <pc:docMk/>
-            <pc:sldMk cId="1401128112" sldId="269"/>
-            <ac:spMk id="4" creationId="{F331512A-1FBE-1A43-BE39-CC6DB7D1FA6B}"/>
-          </ac:spMkLst>
-        </pc:spChg>
-        <pc:spChg chg="add">
-          <ac:chgData name="Jean-Christophe Serrano" userId="73106b23-ce21-4623-a757-4fcfeb57a141" providerId="ADAL" clId="{4188578B-42E3-4D2B-A026-117DFA88464C}" dt="2026-03-16T15:24:26.051" v="600"/>
-          <ac:spMkLst>
-            <pc:docMk/>
-            <pc:sldMk cId="1401128112" sldId="269"/>
-            <ac:spMk id="5" creationId="{DB3B521B-EE6E-81B4-00BA-4CB0E966D51C}"/>
-          </ac:spMkLst>
-        </pc:spChg>
-        <pc:spChg chg="add">
-          <ac:chgData name="Jean-Christophe Serrano" userId="73106b23-ce21-4623-a757-4fcfeb57a141" providerId="ADAL" clId="{4188578B-42E3-4D2B-A026-117DFA88464C}" dt="2026-03-16T15:24:47.550" v="601"/>
-          <ac:spMkLst>
-            <pc:docMk/>
-            <pc:sldMk cId="1401128112" sldId="269"/>
-            <ac:spMk id="6" creationId="{4344947C-9E54-F251-B191-3CD7C4CB74CA}"/>
-          </ac:spMkLst>
-        </pc:spChg>
-        <pc:spChg chg="add">
-          <ac:chgData name="Jean-Christophe Serrano" userId="73106b23-ce21-4623-a757-4fcfeb57a141" providerId="ADAL" clId="{4188578B-42E3-4D2B-A026-117DFA88464C}" dt="2026-03-16T15:25:10.574" v="603" actId="26606"/>
-          <ac:spMkLst>
-            <pc:docMk/>
-            <pc:sldMk cId="1401128112" sldId="269"/>
-            <ac:spMk id="13" creationId="{7C432AFE-B3D2-4BFF-BF8F-96C27AFF1AC7}"/>
-          </ac:spMkLst>
-        </pc:spChg>
-        <pc:spChg chg="add">
-          <ac:chgData name="Jean-Christophe Serrano" userId="73106b23-ce21-4623-a757-4fcfeb57a141" providerId="ADAL" clId="{4188578B-42E3-4D2B-A026-117DFA88464C}" dt="2026-03-16T15:25:10.574" v="603" actId="26606"/>
-          <ac:spMkLst>
-            <pc:docMk/>
-            <pc:sldMk cId="1401128112" sldId="269"/>
-            <ac:spMk id="15" creationId="{AF2F604E-43BE-4DC3-B983-E071523364F8}"/>
-          </ac:spMkLst>
-        </pc:spChg>
-        <pc:spChg chg="add">
-          <ac:chgData name="Jean-Christophe Serrano" userId="73106b23-ce21-4623-a757-4fcfeb57a141" providerId="ADAL" clId="{4188578B-42E3-4D2B-A026-117DFA88464C}" dt="2026-03-16T15:25:10.574" v="603" actId="26606"/>
-          <ac:spMkLst>
-            <pc:docMk/>
-            <pc:sldMk cId="1401128112" sldId="269"/>
-            <ac:spMk id="17" creationId="{08C9B587-E65E-4B52-B37C-ABEBB6E87928}"/>
-          </ac:spMkLst>
-        </pc:spChg>
-        <pc:picChg chg="add mod ord">
-          <ac:chgData name="Jean-Christophe Serrano" userId="73106b23-ce21-4623-a757-4fcfeb57a141" providerId="ADAL" clId="{4188578B-42E3-4D2B-A026-117DFA88464C}" dt="2026-03-16T15:25:10.574" v="603" actId="26606"/>
-          <ac:picMkLst>
-            <pc:docMk/>
-            <pc:sldMk cId="1401128112" sldId="269"/>
-            <ac:picMk id="8" creationId="{FC5731C2-BF2B-193F-7BAD-BCEE933D2132}"/>
           </ac:picMkLst>
         </pc:picChg>
       </pc:sldChg>
@@ -5114,10 +3460,10 @@
         <a:lstStyle/>
         <a:p>
           <a:r>
-            <a:rPr lang="fr-CH" dirty="0"/>
+            <a:rPr lang="fr-CH"/>
             <a:t>Explication théorique</a:t>
           </a:r>
-          <a:endParaRPr lang="en-US" dirty="0"/>
+          <a:endParaRPr lang="en-US"/>
         </a:p>
       </dgm:t>
     </dgm:pt>
@@ -5151,10 +3497,10 @@
         <a:lstStyle/>
         <a:p>
           <a:r>
-            <a:rPr lang="fr-CH" dirty="0"/>
+            <a:rPr lang="fr-CH"/>
             <a:t>Consigne de l’exercice</a:t>
           </a:r>
-          <a:endParaRPr lang="en-US" dirty="0"/>
+          <a:endParaRPr lang="en-US"/>
         </a:p>
       </dgm:t>
     </dgm:pt>
@@ -5188,10 +3534,10 @@
         <a:lstStyle/>
         <a:p>
           <a:r>
-            <a:rPr lang="fr-CH" dirty="0"/>
+            <a:rPr lang="fr-CH"/>
             <a:t>Réalisation de l’exercice </a:t>
           </a:r>
-          <a:endParaRPr lang="en-US" dirty="0"/>
+          <a:endParaRPr lang="en-US"/>
         </a:p>
       </dgm:t>
     </dgm:pt>
@@ -5299,7 +3645,7 @@
         <a:lstStyle/>
         <a:p>
           <a:r>
-            <a:rPr lang="en-US" dirty="0"/>
+            <a:rPr lang="en-US"/>
             <a:t>Notions PowerShell</a:t>
           </a:r>
         </a:p>
@@ -5327,6 +3673,46 @@
         </a:p>
       </dgm:t>
     </dgm:pt>
+    <dgm:pt modelId="{4F0CD653-4006-4E56-A103-0FC2BE19996E}">
+      <dgm:prSet/>
+      <dgm:spPr/>
+      <dgm:t>
+        <a:bodyPr/>
+        <a:lstStyle/>
+        <a:p>
+          <a:pPr>
+            <a:buNone/>
+          </a:pPr>
+          <a:r>
+            <a:rPr lang="fr-CH"/>
+            <a:t>Solution de l’exercice avec explication de chaque ligne de code.</a:t>
+          </a:r>
+          <a:endParaRPr lang="en-US"/>
+        </a:p>
+      </dgm:t>
+    </dgm:pt>
+    <dgm:pt modelId="{08670AB1-C163-4851-882B-CD76F897F242}" type="parTrans" cxnId="{C8C2C7C4-3FF2-4B2F-B43E-683E27555595}">
+      <dgm:prSet/>
+      <dgm:spPr/>
+      <dgm:t>
+        <a:bodyPr/>
+        <a:lstStyle/>
+        <a:p>
+          <a:endParaRPr lang="de-CH"/>
+        </a:p>
+      </dgm:t>
+    </dgm:pt>
+    <dgm:pt modelId="{7907B9AC-8524-414E-BDDE-8E36A8B17CBA}" type="sibTrans" cxnId="{C8C2C7C4-3FF2-4B2F-B43E-683E27555595}">
+      <dgm:prSet/>
+      <dgm:spPr/>
+      <dgm:t>
+        <a:bodyPr/>
+        <a:lstStyle/>
+        <a:p>
+          <a:endParaRPr lang="de-CH"/>
+        </a:p>
+      </dgm:t>
+    </dgm:pt>
     <dgm:pt modelId="{4155073C-954A-4788-A2FD-2B3D8C791DD7}" type="pres">
       <dgm:prSet presAssocID="{8F679E3D-01DB-4222-A0A7-0883FD7D3BED}" presName="vert0" presStyleCnt="0">
         <dgm:presLayoutVars>
@@ -5338,7 +3724,7 @@
       <dgm:spPr/>
     </dgm:pt>
     <dgm:pt modelId="{D0B6416F-2475-462E-A6C9-4224D54A78F2}" type="pres">
-      <dgm:prSet presAssocID="{0512E4CB-5702-45A6-BF89-2AFF8A166A16}" presName="thickLine" presStyleLbl="alignNode1" presStyleIdx="0" presStyleCnt="8"/>
+      <dgm:prSet presAssocID="{0512E4CB-5702-45A6-BF89-2AFF8A166A16}" presName="thickLine" presStyleLbl="alignNode1" presStyleIdx="0" presStyleCnt="9"/>
       <dgm:spPr/>
     </dgm:pt>
     <dgm:pt modelId="{12B8BA71-F29F-420F-9988-2D4A7B48CA48}" type="pres">
@@ -5346,7 +3732,7 @@
       <dgm:spPr/>
     </dgm:pt>
     <dgm:pt modelId="{5A13487C-0F8F-4304-B179-A295CE47C917}" type="pres">
-      <dgm:prSet presAssocID="{0512E4CB-5702-45A6-BF89-2AFF8A166A16}" presName="tx1" presStyleLbl="revTx" presStyleIdx="0" presStyleCnt="8"/>
+      <dgm:prSet presAssocID="{0512E4CB-5702-45A6-BF89-2AFF8A166A16}" presName="tx1" presStyleLbl="revTx" presStyleIdx="0" presStyleCnt="9"/>
       <dgm:spPr/>
     </dgm:pt>
     <dgm:pt modelId="{4C4AB890-7CAA-4A21-98F8-AFFC51B836B6}" type="pres">
@@ -5354,7 +3740,7 @@
       <dgm:spPr/>
     </dgm:pt>
     <dgm:pt modelId="{7698FCF3-59B2-4A60-84A4-22D1413BBF78}" type="pres">
-      <dgm:prSet presAssocID="{602FDDF3-538D-4D63-9F96-A34665324FC2}" presName="thickLine" presStyleLbl="alignNode1" presStyleIdx="1" presStyleCnt="8"/>
+      <dgm:prSet presAssocID="{602FDDF3-538D-4D63-9F96-A34665324FC2}" presName="thickLine" presStyleLbl="alignNode1" presStyleIdx="1" presStyleCnt="9"/>
       <dgm:spPr/>
     </dgm:pt>
     <dgm:pt modelId="{F02AF80D-6175-4905-A448-4343842BB270}" type="pres">
@@ -5362,7 +3748,7 @@
       <dgm:spPr/>
     </dgm:pt>
     <dgm:pt modelId="{585C9982-6C80-47C5-8CDC-180D3B268130}" type="pres">
-      <dgm:prSet presAssocID="{602FDDF3-538D-4D63-9F96-A34665324FC2}" presName="tx1" presStyleLbl="revTx" presStyleIdx="1" presStyleCnt="8"/>
+      <dgm:prSet presAssocID="{602FDDF3-538D-4D63-9F96-A34665324FC2}" presName="tx1" presStyleLbl="revTx" presStyleIdx="1" presStyleCnt="9"/>
       <dgm:spPr/>
     </dgm:pt>
     <dgm:pt modelId="{39B03C86-8A2C-4BCA-8BC9-A9791ABDDECC}" type="pres">
@@ -5370,7 +3756,7 @@
       <dgm:spPr/>
     </dgm:pt>
     <dgm:pt modelId="{77E5D4CF-53EE-48BD-89FB-8CA63002428A}" type="pres">
-      <dgm:prSet presAssocID="{142B058F-3F14-4064-96C3-05D1279E6021}" presName="thickLine" presStyleLbl="alignNode1" presStyleIdx="2" presStyleCnt="8"/>
+      <dgm:prSet presAssocID="{142B058F-3F14-4064-96C3-05D1279E6021}" presName="thickLine" presStyleLbl="alignNode1" presStyleIdx="2" presStyleCnt="9"/>
       <dgm:spPr/>
     </dgm:pt>
     <dgm:pt modelId="{EDEDAE0C-9614-4589-8FA3-E7FAECDCB9B9}" type="pres">
@@ -5378,7 +3764,7 @@
       <dgm:spPr/>
     </dgm:pt>
     <dgm:pt modelId="{298A789A-01F7-45D6-9BD9-F397EC8BDBB1}" type="pres">
-      <dgm:prSet presAssocID="{142B058F-3F14-4064-96C3-05D1279E6021}" presName="tx1" presStyleLbl="revTx" presStyleIdx="2" presStyleCnt="8"/>
+      <dgm:prSet presAssocID="{142B058F-3F14-4064-96C3-05D1279E6021}" presName="tx1" presStyleLbl="revTx" presStyleIdx="2" presStyleCnt="9"/>
       <dgm:spPr/>
     </dgm:pt>
     <dgm:pt modelId="{118C33E5-C35C-4653-A3EE-288AAD39D135}" type="pres">
@@ -5386,7 +3772,7 @@
       <dgm:spPr/>
     </dgm:pt>
     <dgm:pt modelId="{F4AC3651-7A23-4F75-AE8A-973908D6C9B9}" type="pres">
-      <dgm:prSet presAssocID="{5DD95D95-7C62-4B7B-A32F-6667838C79AC}" presName="thickLine" presStyleLbl="alignNode1" presStyleIdx="3" presStyleCnt="8"/>
+      <dgm:prSet presAssocID="{5DD95D95-7C62-4B7B-A32F-6667838C79AC}" presName="thickLine" presStyleLbl="alignNode1" presStyleIdx="3" presStyleCnt="9"/>
       <dgm:spPr/>
     </dgm:pt>
     <dgm:pt modelId="{CD108915-A037-4C3B-98C7-D0BBC6CF74D9}" type="pres">
@@ -5394,7 +3780,7 @@
       <dgm:spPr/>
     </dgm:pt>
     <dgm:pt modelId="{E34F1876-98DB-490E-9A41-D38EEB73F538}" type="pres">
-      <dgm:prSet presAssocID="{5DD95D95-7C62-4B7B-A32F-6667838C79AC}" presName="tx1" presStyleLbl="revTx" presStyleIdx="3" presStyleCnt="8"/>
+      <dgm:prSet presAssocID="{5DD95D95-7C62-4B7B-A32F-6667838C79AC}" presName="tx1" presStyleLbl="revTx" presStyleIdx="3" presStyleCnt="9"/>
       <dgm:spPr/>
     </dgm:pt>
     <dgm:pt modelId="{5BF061AD-5382-4D0A-98BA-269BDB35193C}" type="pres">
@@ -5402,7 +3788,7 @@
       <dgm:spPr/>
     </dgm:pt>
     <dgm:pt modelId="{B31A0E4B-E7ED-4DF6-B134-383E96176A1D}" type="pres">
-      <dgm:prSet presAssocID="{F7975819-7B5E-41C4-B62B-4C25D4E873CB}" presName="thickLine" presStyleLbl="alignNode1" presStyleIdx="4" presStyleCnt="8"/>
+      <dgm:prSet presAssocID="{F7975819-7B5E-41C4-B62B-4C25D4E873CB}" presName="thickLine" presStyleLbl="alignNode1" presStyleIdx="4" presStyleCnt="9"/>
       <dgm:spPr/>
     </dgm:pt>
     <dgm:pt modelId="{897D6EB5-69C3-4773-AC85-7170A3E4732D}" type="pres">
@@ -5410,7 +3796,7 @@
       <dgm:spPr/>
     </dgm:pt>
     <dgm:pt modelId="{BEDE2231-D2DC-4BBF-9D92-502E9E80B2AA}" type="pres">
-      <dgm:prSet presAssocID="{F7975819-7B5E-41C4-B62B-4C25D4E873CB}" presName="tx1" presStyleLbl="revTx" presStyleIdx="4" presStyleCnt="8"/>
+      <dgm:prSet presAssocID="{F7975819-7B5E-41C4-B62B-4C25D4E873CB}" presName="tx1" presStyleLbl="revTx" presStyleIdx="4" presStyleCnt="9"/>
       <dgm:spPr/>
     </dgm:pt>
     <dgm:pt modelId="{FB627F9F-9504-49A7-AD2E-52EF6F769B36}" type="pres">
@@ -5418,7 +3804,7 @@
       <dgm:spPr/>
     </dgm:pt>
     <dgm:pt modelId="{BFCAF344-8245-421A-B850-71D46989B712}" type="pres">
-      <dgm:prSet presAssocID="{50D49C42-287E-4848-8B29-2C5E9604D157}" presName="thickLine" presStyleLbl="alignNode1" presStyleIdx="5" presStyleCnt="8"/>
+      <dgm:prSet presAssocID="{50D49C42-287E-4848-8B29-2C5E9604D157}" presName="thickLine" presStyleLbl="alignNode1" presStyleIdx="5" presStyleCnt="9"/>
       <dgm:spPr/>
     </dgm:pt>
     <dgm:pt modelId="{636B31FC-7458-449C-9F08-908A50F73956}" type="pres">
@@ -5426,7 +3812,7 @@
       <dgm:spPr/>
     </dgm:pt>
     <dgm:pt modelId="{ED488D50-85F1-468F-BC18-AD710B1DCF89}" type="pres">
-      <dgm:prSet presAssocID="{50D49C42-287E-4848-8B29-2C5E9604D157}" presName="tx1" presStyleLbl="revTx" presStyleIdx="5" presStyleCnt="8"/>
+      <dgm:prSet presAssocID="{50D49C42-287E-4848-8B29-2C5E9604D157}" presName="tx1" presStyleLbl="revTx" presStyleIdx="5" presStyleCnt="9"/>
       <dgm:spPr/>
     </dgm:pt>
     <dgm:pt modelId="{47F80B19-B0C2-4EA4-9658-9E631FA4ED56}" type="pres">
@@ -5434,7 +3820,7 @@
       <dgm:spPr/>
     </dgm:pt>
     <dgm:pt modelId="{5F4E5B64-D840-4E5B-B7DC-18135E777423}" type="pres">
-      <dgm:prSet presAssocID="{2A8B9A24-B29A-4631-B2A4-E0E7F7CE0B7E}" presName="thickLine" presStyleLbl="alignNode1" presStyleIdx="6" presStyleCnt="8"/>
+      <dgm:prSet presAssocID="{2A8B9A24-B29A-4631-B2A4-E0E7F7CE0B7E}" presName="thickLine" presStyleLbl="alignNode1" presStyleIdx="6" presStyleCnt="9"/>
       <dgm:spPr/>
     </dgm:pt>
     <dgm:pt modelId="{EE8D3073-18A4-4F91-86DF-770FA9D97F31}" type="pres">
@@ -5442,15 +3828,31 @@
       <dgm:spPr/>
     </dgm:pt>
     <dgm:pt modelId="{F6519C37-3FD2-4D93-A8A0-62BD5CD16C03}" type="pres">
-      <dgm:prSet presAssocID="{2A8B9A24-B29A-4631-B2A4-E0E7F7CE0B7E}" presName="tx1" presStyleLbl="revTx" presStyleIdx="6" presStyleCnt="8"/>
+      <dgm:prSet presAssocID="{2A8B9A24-B29A-4631-B2A4-E0E7F7CE0B7E}" presName="tx1" presStyleLbl="revTx" presStyleIdx="6" presStyleCnt="9"/>
       <dgm:spPr/>
     </dgm:pt>
     <dgm:pt modelId="{2C0A5BFE-FCA5-48E2-8499-DDB3E0BA96D4}" type="pres">
       <dgm:prSet presAssocID="{2A8B9A24-B29A-4631-B2A4-E0E7F7CE0B7E}" presName="vert1" presStyleCnt="0"/>
       <dgm:spPr/>
     </dgm:pt>
+    <dgm:pt modelId="{DF99174F-4BE1-4955-A418-67D00FF7EC52}" type="pres">
+      <dgm:prSet presAssocID="{4F0CD653-4006-4E56-A103-0FC2BE19996E}" presName="thickLine" presStyleLbl="alignNode1" presStyleIdx="7" presStyleCnt="9"/>
+      <dgm:spPr/>
+    </dgm:pt>
+    <dgm:pt modelId="{4FAF1EC5-A417-424F-9EE8-531F04FC79D4}" type="pres">
+      <dgm:prSet presAssocID="{4F0CD653-4006-4E56-A103-0FC2BE19996E}" presName="horz1" presStyleCnt="0"/>
+      <dgm:spPr/>
+    </dgm:pt>
+    <dgm:pt modelId="{8A202550-0E9D-4F0A-97CA-DD7E112055D9}" type="pres">
+      <dgm:prSet presAssocID="{4F0CD653-4006-4E56-A103-0FC2BE19996E}" presName="tx1" presStyleLbl="revTx" presStyleIdx="7" presStyleCnt="9"/>
+      <dgm:spPr/>
+    </dgm:pt>
+    <dgm:pt modelId="{19026F43-76DE-400C-80A0-DD06B6921005}" type="pres">
+      <dgm:prSet presAssocID="{4F0CD653-4006-4E56-A103-0FC2BE19996E}" presName="vert1" presStyleCnt="0"/>
+      <dgm:spPr/>
+    </dgm:pt>
     <dgm:pt modelId="{F0BD20C5-66FA-481E-958F-29CD7591B9CB}" type="pres">
-      <dgm:prSet presAssocID="{E792F388-BCA2-4088-AFC3-CC436FE4DA0D}" presName="thickLine" presStyleLbl="alignNode1" presStyleIdx="7" presStyleCnt="8"/>
+      <dgm:prSet presAssocID="{E792F388-BCA2-4088-AFC3-CC436FE4DA0D}" presName="thickLine" presStyleLbl="alignNode1" presStyleIdx="8" presStyleCnt="9"/>
       <dgm:spPr/>
     </dgm:pt>
     <dgm:pt modelId="{BAEE4240-21D3-49DF-B0EC-82AFF849DFAB}" type="pres">
@@ -5458,7 +3860,7 @@
       <dgm:spPr/>
     </dgm:pt>
     <dgm:pt modelId="{890E6926-DA16-45FD-8337-B29345396FAA}" type="pres">
-      <dgm:prSet presAssocID="{E792F388-BCA2-4088-AFC3-CC436FE4DA0D}" presName="tx1" presStyleLbl="revTx" presStyleIdx="7" presStyleCnt="8"/>
+      <dgm:prSet presAssocID="{E792F388-BCA2-4088-AFC3-CC436FE4DA0D}" presName="tx1" presStyleLbl="revTx" presStyleIdx="8" presStyleCnt="9"/>
       <dgm:spPr/>
     </dgm:pt>
     <dgm:pt modelId="{D48CDC09-ACFA-46C7-853A-80B56DBFA2B2}" type="pres">
@@ -5468,7 +3870,7 @@
   </dgm:ptLst>
   <dgm:cxnLst>
     <dgm:cxn modelId="{F1E8D102-A783-42A8-AA34-A5FFA96F4426}" srcId="{8F679E3D-01DB-4222-A0A7-0883FD7D3BED}" destId="{142B058F-3F14-4064-96C3-05D1279E6021}" srcOrd="2" destOrd="0" parTransId="{EC99E207-2280-4860-870D-39C31C81754F}" sibTransId="{E7FC995B-9DF9-4662-AFE8-A1C6919E1A99}"/>
-    <dgm:cxn modelId="{4FB1771E-09E7-47B3-AD4A-75BCF5C9EF82}" srcId="{8F679E3D-01DB-4222-A0A7-0883FD7D3BED}" destId="{E792F388-BCA2-4088-AFC3-CC436FE4DA0D}" srcOrd="7" destOrd="0" parTransId="{77761900-EEBB-4F0C-8A87-B1DDC2804B3E}" sibTransId="{83B53330-9208-43D8-878D-7A07A081C399}"/>
+    <dgm:cxn modelId="{4FB1771E-09E7-47B3-AD4A-75BCF5C9EF82}" srcId="{8F679E3D-01DB-4222-A0A7-0883FD7D3BED}" destId="{E792F388-BCA2-4088-AFC3-CC436FE4DA0D}" srcOrd="8" destOrd="0" parTransId="{77761900-EEBB-4F0C-8A87-B1DDC2804B3E}" sibTransId="{83B53330-9208-43D8-878D-7A07A081C399}"/>
     <dgm:cxn modelId="{1A10CB1E-42E5-47DF-8AD1-79C78FD6DDEC}" type="presOf" srcId="{F7975819-7B5E-41C4-B62B-4C25D4E873CB}" destId="{BEDE2231-D2DC-4BBF-9D92-502E9E80B2AA}" srcOrd="0" destOrd="0" presId="urn:microsoft.com/office/officeart/2008/layout/LinedList"/>
     <dgm:cxn modelId="{F11A1744-90D8-4E8E-8CA0-4DC1B503C272}" type="presOf" srcId="{50D49C42-287E-4848-8B29-2C5E9604D157}" destId="{ED488D50-85F1-468F-BC18-AD710B1DCF89}" srcOrd="0" destOrd="0" presId="urn:microsoft.com/office/officeart/2008/layout/LinedList"/>
     <dgm:cxn modelId="{CC18346B-26A3-4719-BBC5-2B1C839E9E1D}" srcId="{8F679E3D-01DB-4222-A0A7-0883FD7D3BED}" destId="{5DD95D95-7C62-4B7B-A32F-6667838C79AC}" srcOrd="3" destOrd="0" parTransId="{3FFEBACA-0B59-44E6-B3C3-0B32D46504F6}" sibTransId="{09B80375-EAFC-43EB-B785-7563E8EE1381}"/>
@@ -5479,9 +3881,11 @@
     <dgm:cxn modelId="{E679B186-C1C9-4853-BC80-55E18CB3A846}" type="presOf" srcId="{142B058F-3F14-4064-96C3-05D1279E6021}" destId="{298A789A-01F7-45D6-9BD9-F397EC8BDBB1}" srcOrd="0" destOrd="0" presId="urn:microsoft.com/office/officeart/2008/layout/LinedList"/>
     <dgm:cxn modelId="{E5B53EAB-0C34-4CF7-8CBF-5447219C2849}" srcId="{8F679E3D-01DB-4222-A0A7-0883FD7D3BED}" destId="{F7975819-7B5E-41C4-B62B-4C25D4E873CB}" srcOrd="4" destOrd="0" parTransId="{F9C2466C-66FD-41E9-A219-4B63BF917A6A}" sibTransId="{ACB8649B-B0B6-47BA-9E85-C79E1E8A8A1E}"/>
     <dgm:cxn modelId="{6F74AEBD-EF94-476B-B5BF-63590F2CC17F}" type="presOf" srcId="{602FDDF3-538D-4D63-9F96-A34665324FC2}" destId="{585C9982-6C80-47C5-8CDC-180D3B268130}" srcOrd="0" destOrd="0" presId="urn:microsoft.com/office/officeart/2008/layout/LinedList"/>
+    <dgm:cxn modelId="{C8C2C7C4-3FF2-4B2F-B43E-683E27555595}" srcId="{8F679E3D-01DB-4222-A0A7-0883FD7D3BED}" destId="{4F0CD653-4006-4E56-A103-0FC2BE19996E}" srcOrd="7" destOrd="0" parTransId="{08670AB1-C163-4851-882B-CD76F897F242}" sibTransId="{7907B9AC-8524-414E-BDDE-8E36A8B17CBA}"/>
     <dgm:cxn modelId="{A7ED64C9-ECB7-4148-81FF-2A930BE2B66E}" type="presOf" srcId="{5DD95D95-7C62-4B7B-A32F-6667838C79AC}" destId="{E34F1876-98DB-490E-9A41-D38EEB73F538}" srcOrd="0" destOrd="0" presId="urn:microsoft.com/office/officeart/2008/layout/LinedList"/>
     <dgm:cxn modelId="{5DD645C9-5202-415B-B3A9-5A5F5597CFD1}" type="presOf" srcId="{2A8B9A24-B29A-4631-B2A4-E0E7F7CE0B7E}" destId="{F6519C37-3FD2-4D93-A8A0-62BD5CD16C03}" srcOrd="0" destOrd="0" presId="urn:microsoft.com/office/officeart/2008/layout/LinedList"/>
     <dgm:cxn modelId="{7ADF3DDB-AEC1-4640-B0D3-0872BCF232BC}" srcId="{8F679E3D-01DB-4222-A0A7-0883FD7D3BED}" destId="{0512E4CB-5702-45A6-BF89-2AFF8A166A16}" srcOrd="0" destOrd="0" parTransId="{042E163F-E6CD-44F8-BE04-B23AC3C4ECF4}" sibTransId="{4238A303-3155-4689-8864-02257AFF90CF}"/>
+    <dgm:cxn modelId="{485C59E4-151A-4E4C-AE6A-F2605B9BDAF1}" type="presOf" srcId="{4F0CD653-4006-4E56-A103-0FC2BE19996E}" destId="{8A202550-0E9D-4F0A-97CA-DD7E112055D9}" srcOrd="0" destOrd="0" presId="urn:microsoft.com/office/officeart/2008/layout/LinedList"/>
     <dgm:cxn modelId="{42BA5BEC-81AB-4617-93D4-810FE7031051}" type="presOf" srcId="{8F679E3D-01DB-4222-A0A7-0883FD7D3BED}" destId="{4155073C-954A-4788-A2FD-2B3D8C791DD7}" srcOrd="0" destOrd="0" presId="urn:microsoft.com/office/officeart/2008/layout/LinedList"/>
     <dgm:cxn modelId="{7E7050FE-0B48-4426-8B6D-726E730508ED}" srcId="{8F679E3D-01DB-4222-A0A7-0883FD7D3BED}" destId="{602FDDF3-538D-4D63-9F96-A34665324FC2}" srcOrd="1" destOrd="0" parTransId="{8963E3E2-08F3-429D-A1F9-974968356848}" sibTransId="{302A985D-FB70-4D3D-A365-7A7A555BD70E}"/>
     <dgm:cxn modelId="{3072C37D-3EB0-4389-819F-35FDBB9E5C85}" type="presParOf" srcId="{4155073C-954A-4788-A2FD-2B3D8C791DD7}" destId="{D0B6416F-2475-462E-A6C9-4224D54A78F2}" srcOrd="0" destOrd="0" presId="urn:microsoft.com/office/officeart/2008/layout/LinedList"/>
@@ -5512,8 +3916,12 @@
     <dgm:cxn modelId="{EC311535-B6D3-400C-BC1F-C2D14FB1BB67}" type="presParOf" srcId="{4155073C-954A-4788-A2FD-2B3D8C791DD7}" destId="{EE8D3073-18A4-4F91-86DF-770FA9D97F31}" srcOrd="13" destOrd="0" presId="urn:microsoft.com/office/officeart/2008/layout/LinedList"/>
     <dgm:cxn modelId="{58001BC5-0C1E-4C76-AAE0-77C516EFA055}" type="presParOf" srcId="{EE8D3073-18A4-4F91-86DF-770FA9D97F31}" destId="{F6519C37-3FD2-4D93-A8A0-62BD5CD16C03}" srcOrd="0" destOrd="0" presId="urn:microsoft.com/office/officeart/2008/layout/LinedList"/>
     <dgm:cxn modelId="{0D22A1E3-51AE-4360-8F18-4AA5F5C5CF13}" type="presParOf" srcId="{EE8D3073-18A4-4F91-86DF-770FA9D97F31}" destId="{2C0A5BFE-FCA5-48E2-8499-DDB3E0BA96D4}" srcOrd="1" destOrd="0" presId="urn:microsoft.com/office/officeart/2008/layout/LinedList"/>
-    <dgm:cxn modelId="{1349FCE3-3F4A-4F77-AB72-B26B640ABF61}" type="presParOf" srcId="{4155073C-954A-4788-A2FD-2B3D8C791DD7}" destId="{F0BD20C5-66FA-481E-958F-29CD7591B9CB}" srcOrd="14" destOrd="0" presId="urn:microsoft.com/office/officeart/2008/layout/LinedList"/>
-    <dgm:cxn modelId="{255A4B60-C1E7-424A-97B4-7844AE23AB12}" type="presParOf" srcId="{4155073C-954A-4788-A2FD-2B3D8C791DD7}" destId="{BAEE4240-21D3-49DF-B0EC-82AFF849DFAB}" srcOrd="15" destOrd="0" presId="urn:microsoft.com/office/officeart/2008/layout/LinedList"/>
+    <dgm:cxn modelId="{6C7C0F77-4745-45B6-92C3-E2F3EE40C33A}" type="presParOf" srcId="{4155073C-954A-4788-A2FD-2B3D8C791DD7}" destId="{DF99174F-4BE1-4955-A418-67D00FF7EC52}" srcOrd="14" destOrd="0" presId="urn:microsoft.com/office/officeart/2008/layout/LinedList"/>
+    <dgm:cxn modelId="{F72EFB5D-F6AD-4281-AE2E-8EAC42B55FB9}" type="presParOf" srcId="{4155073C-954A-4788-A2FD-2B3D8C791DD7}" destId="{4FAF1EC5-A417-424F-9EE8-531F04FC79D4}" srcOrd="15" destOrd="0" presId="urn:microsoft.com/office/officeart/2008/layout/LinedList"/>
+    <dgm:cxn modelId="{D0F96489-D39A-490B-958F-0D956A84FEB2}" type="presParOf" srcId="{4FAF1EC5-A417-424F-9EE8-531F04FC79D4}" destId="{8A202550-0E9D-4F0A-97CA-DD7E112055D9}" srcOrd="0" destOrd="0" presId="urn:microsoft.com/office/officeart/2008/layout/LinedList"/>
+    <dgm:cxn modelId="{22CEB080-768E-499D-9CEF-D09EA1F4182D}" type="presParOf" srcId="{4FAF1EC5-A417-424F-9EE8-531F04FC79D4}" destId="{19026F43-76DE-400C-80A0-DD06B6921005}" srcOrd="1" destOrd="0" presId="urn:microsoft.com/office/officeart/2008/layout/LinedList"/>
+    <dgm:cxn modelId="{1349FCE3-3F4A-4F77-AB72-B26B640ABF61}" type="presParOf" srcId="{4155073C-954A-4788-A2FD-2B3D8C791DD7}" destId="{F0BD20C5-66FA-481E-958F-29CD7591B9CB}" srcOrd="16" destOrd="0" presId="urn:microsoft.com/office/officeart/2008/layout/LinedList"/>
+    <dgm:cxn modelId="{255A4B60-C1E7-424A-97B4-7844AE23AB12}" type="presParOf" srcId="{4155073C-954A-4788-A2FD-2B3D8C791DD7}" destId="{BAEE4240-21D3-49DF-B0EC-82AFF849DFAB}" srcOrd="17" destOrd="0" presId="urn:microsoft.com/office/officeart/2008/layout/LinedList"/>
     <dgm:cxn modelId="{99475CA0-A28F-4FE0-9D81-F816654E0B3B}" type="presParOf" srcId="{BAEE4240-21D3-49DF-B0EC-82AFF849DFAB}" destId="{890E6926-DA16-45FD-8337-B29345396FAA}" srcOrd="0" destOrd="0" presId="urn:microsoft.com/office/officeart/2008/layout/LinedList"/>
     <dgm:cxn modelId="{8177CE71-FE67-4FF6-9F86-232074C8ED4E}" type="presParOf" srcId="{BAEE4240-21D3-49DF-B0EC-82AFF849DFAB}" destId="{D48CDC09-ACFA-46C7-853A-80B56DBFA2B2}" srcOrd="1" destOrd="0" presId="urn:microsoft.com/office/officeart/2008/layout/LinedList"/>
   </dgm:cxnLst>
@@ -6276,7 +4684,7 @@
   <dgm:whole/>
   <dgm:extLst>
     <a:ext uri="http://schemas.microsoft.com/office/drawing/2008/diagram">
-      <dsp:dataModelExt xmlns:dsp="http://schemas.microsoft.com/office/drawing/2008/diagram" relId="rId6" minVer="http://schemas.openxmlformats.org/drawingml/2006/diagram"/>
+      <dsp:dataModelExt xmlns:dsp="http://schemas.microsoft.com/office/drawing/2008/diagram" relId="rId7" minVer="http://schemas.openxmlformats.org/drawingml/2006/diagram"/>
     </a:ext>
   </dgm:extLst>
 </dgm:dataModel>
@@ -6297,7 +4705,7 @@
       </dsp:nvSpPr>
       <dsp:spPr>
         <a:xfrm>
-          <a:off x="0" y="0"/>
+          <a:off x="0" y="421"/>
           <a:ext cx="9688296" cy="0"/>
         </a:xfrm>
         <a:prstGeom prst="line">
@@ -6347,8 +4755,8 @@
       </dsp:nvSpPr>
       <dsp:spPr>
         <a:xfrm>
-          <a:off x="0" y="0"/>
-          <a:ext cx="9688296" cy="431794"/>
+          <a:off x="0" y="421"/>
+          <a:ext cx="9688296" cy="383723"/>
         </a:xfrm>
         <a:prstGeom prst="rect">
           <a:avLst/>
@@ -6372,12 +4780,12 @@
         <a:fontRef idx="minor"/>
       </dsp:style>
       <dsp:txBody>
-        <a:bodyPr spcFirstLastPara="0" vert="horz" wrap="square" lIns="72390" tIns="72390" rIns="72390" bIns="72390" numCol="1" spcCol="1270" anchor="t" anchorCtr="0">
+        <a:bodyPr spcFirstLastPara="0" vert="horz" wrap="square" lIns="64770" tIns="64770" rIns="64770" bIns="64770" numCol="1" spcCol="1270" anchor="t" anchorCtr="0">
           <a:noAutofit/>
         </a:bodyPr>
         <a:lstStyle/>
         <a:p>
-          <a:pPr marL="0" lvl="0" indent="0" algn="l" defTabSz="844550">
+          <a:pPr marL="0" lvl="0" indent="0" algn="l" defTabSz="755650">
             <a:lnSpc>
               <a:spcPct val="90000"/>
             </a:lnSpc>
@@ -6390,15 +4798,15 @@
             <a:buNone/>
           </a:pPr>
           <a:r>
-            <a:rPr lang="fr-CH" sz="1900" kern="1200"/>
+            <a:rPr lang="fr-CH" sz="1700" kern="1200"/>
             <a:t>Plan séquentielle</a:t>
           </a:r>
-          <a:endParaRPr lang="en-US" sz="1900" kern="1200"/>
+          <a:endParaRPr lang="en-US" sz="1700" kern="1200"/>
         </a:p>
       </dsp:txBody>
       <dsp:txXfrm>
-        <a:off x="0" y="0"/>
-        <a:ext cx="9688296" cy="431794"/>
+        <a:off x="0" y="421"/>
+        <a:ext cx="9688296" cy="383723"/>
       </dsp:txXfrm>
     </dsp:sp>
     <dsp:sp modelId="{7698FCF3-59B2-4A60-84A4-22D1413BBF78}">
@@ -6408,7 +4816,7 @@
       </dsp:nvSpPr>
       <dsp:spPr>
         <a:xfrm>
-          <a:off x="0" y="431794"/>
+          <a:off x="0" y="384145"/>
           <a:ext cx="9688296" cy="0"/>
         </a:xfrm>
         <a:prstGeom prst="line">
@@ -6458,8 +4866,8 @@
       </dsp:nvSpPr>
       <dsp:spPr>
         <a:xfrm>
-          <a:off x="0" y="431794"/>
-          <a:ext cx="9688296" cy="431794"/>
+          <a:off x="0" y="384145"/>
+          <a:ext cx="9688296" cy="383723"/>
         </a:xfrm>
         <a:prstGeom prst="rect">
           <a:avLst/>
@@ -6483,12 +4891,12 @@
         <a:fontRef idx="minor"/>
       </dsp:style>
       <dsp:txBody>
-        <a:bodyPr spcFirstLastPara="0" vert="horz" wrap="square" lIns="72390" tIns="72390" rIns="72390" bIns="72390" numCol="1" spcCol="1270" anchor="t" anchorCtr="0">
+        <a:bodyPr spcFirstLastPara="0" vert="horz" wrap="square" lIns="64770" tIns="64770" rIns="64770" bIns="64770" numCol="1" spcCol="1270" anchor="t" anchorCtr="0">
           <a:noAutofit/>
         </a:bodyPr>
         <a:lstStyle/>
         <a:p>
-          <a:pPr marL="0" lvl="0" indent="0" algn="l" defTabSz="844550">
+          <a:pPr marL="0" lvl="0" indent="0" algn="l" defTabSz="755650">
             <a:lnSpc>
               <a:spcPct val="90000"/>
             </a:lnSpc>
@@ -6501,15 +4909,15 @@
             <a:buNone/>
           </a:pPr>
           <a:r>
-            <a:rPr lang="fr-CH" sz="1900" kern="1200"/>
+            <a:rPr lang="fr-CH" sz="1700" kern="1200"/>
             <a:t>Introduction</a:t>
           </a:r>
-          <a:endParaRPr lang="en-US" sz="1900" kern="1200"/>
+          <a:endParaRPr lang="en-US" sz="1700" kern="1200"/>
         </a:p>
       </dsp:txBody>
       <dsp:txXfrm>
-        <a:off x="0" y="431794"/>
-        <a:ext cx="9688296" cy="431794"/>
+        <a:off x="0" y="384145"/>
+        <a:ext cx="9688296" cy="383723"/>
       </dsp:txXfrm>
     </dsp:sp>
     <dsp:sp modelId="{77E5D4CF-53EE-48BD-89FB-8CA63002428A}">
@@ -6519,7 +4927,7 @@
       </dsp:nvSpPr>
       <dsp:spPr>
         <a:xfrm>
-          <a:off x="0" y="863589"/>
+          <a:off x="0" y="767869"/>
           <a:ext cx="9688296" cy="0"/>
         </a:xfrm>
         <a:prstGeom prst="line">
@@ -6569,8 +4977,8 @@
       </dsp:nvSpPr>
       <dsp:spPr>
         <a:xfrm>
-          <a:off x="0" y="863589"/>
-          <a:ext cx="9688296" cy="431794"/>
+          <a:off x="0" y="767869"/>
+          <a:ext cx="9688296" cy="383723"/>
         </a:xfrm>
         <a:prstGeom prst="rect">
           <a:avLst/>
@@ -6594,12 +5002,12 @@
         <a:fontRef idx="minor"/>
       </dsp:style>
       <dsp:txBody>
-        <a:bodyPr spcFirstLastPara="0" vert="horz" wrap="square" lIns="72390" tIns="72390" rIns="72390" bIns="72390" numCol="1" spcCol="1270" anchor="t" anchorCtr="0">
+        <a:bodyPr spcFirstLastPara="0" vert="horz" wrap="square" lIns="64770" tIns="64770" rIns="64770" bIns="64770" numCol="1" spcCol="1270" anchor="t" anchorCtr="0">
           <a:noAutofit/>
         </a:bodyPr>
         <a:lstStyle/>
         <a:p>
-          <a:pPr marL="0" lvl="0" indent="0" algn="l" defTabSz="844550">
+          <a:pPr marL="0" lvl="0" indent="0" algn="l" defTabSz="755650">
             <a:lnSpc>
               <a:spcPct val="90000"/>
             </a:lnSpc>
@@ -6612,15 +5020,15 @@
             <a:buNone/>
           </a:pPr>
           <a:r>
-            <a:rPr lang="fr-CH" sz="1900" kern="1200" dirty="0"/>
+            <a:rPr lang="fr-CH" sz="1700" kern="1200"/>
             <a:t>Explication théorique</a:t>
           </a:r>
-          <a:endParaRPr lang="en-US" sz="1900" kern="1200" dirty="0"/>
+          <a:endParaRPr lang="en-US" sz="1700" kern="1200"/>
         </a:p>
       </dsp:txBody>
       <dsp:txXfrm>
-        <a:off x="0" y="863589"/>
-        <a:ext cx="9688296" cy="431794"/>
+        <a:off x="0" y="767869"/>
+        <a:ext cx="9688296" cy="383723"/>
       </dsp:txXfrm>
     </dsp:sp>
     <dsp:sp modelId="{F4AC3651-7A23-4F75-AE8A-973908D6C9B9}">
@@ -6630,7 +5038,7 @@
       </dsp:nvSpPr>
       <dsp:spPr>
         <a:xfrm>
-          <a:off x="0" y="1295384"/>
+          <a:off x="0" y="1151593"/>
           <a:ext cx="9688296" cy="0"/>
         </a:xfrm>
         <a:prstGeom prst="line">
@@ -6680,8 +5088,8 @@
       </dsp:nvSpPr>
       <dsp:spPr>
         <a:xfrm>
-          <a:off x="0" y="1295384"/>
-          <a:ext cx="9688296" cy="431794"/>
+          <a:off x="0" y="1151593"/>
+          <a:ext cx="9688296" cy="383723"/>
         </a:xfrm>
         <a:prstGeom prst="rect">
           <a:avLst/>
@@ -6705,12 +5113,12 @@
         <a:fontRef idx="minor"/>
       </dsp:style>
       <dsp:txBody>
-        <a:bodyPr spcFirstLastPara="0" vert="horz" wrap="square" lIns="72390" tIns="72390" rIns="72390" bIns="72390" numCol="1" spcCol="1270" anchor="t" anchorCtr="0">
+        <a:bodyPr spcFirstLastPara="0" vert="horz" wrap="square" lIns="64770" tIns="64770" rIns="64770" bIns="64770" numCol="1" spcCol="1270" anchor="t" anchorCtr="0">
           <a:noAutofit/>
         </a:bodyPr>
         <a:lstStyle/>
         <a:p>
-          <a:pPr marL="0" lvl="0" indent="0" algn="l" defTabSz="844550">
+          <a:pPr marL="0" lvl="0" indent="0" algn="l" defTabSz="755650">
             <a:lnSpc>
               <a:spcPct val="90000"/>
             </a:lnSpc>
@@ -6723,14 +5131,14 @@
             <a:buNone/>
           </a:pPr>
           <a:r>
-            <a:rPr lang="en-US" sz="1900" kern="1200" dirty="0"/>
+            <a:rPr lang="en-US" sz="1700" kern="1200"/>
             <a:t>Notions PowerShell</a:t>
           </a:r>
         </a:p>
       </dsp:txBody>
       <dsp:txXfrm>
-        <a:off x="0" y="1295384"/>
-        <a:ext cx="9688296" cy="431794"/>
+        <a:off x="0" y="1151593"/>
+        <a:ext cx="9688296" cy="383723"/>
       </dsp:txXfrm>
     </dsp:sp>
     <dsp:sp modelId="{B31A0E4B-E7ED-4DF6-B134-383E96176A1D}">
@@ -6740,7 +5148,7 @@
       </dsp:nvSpPr>
       <dsp:spPr>
         <a:xfrm>
-          <a:off x="0" y="1727178"/>
+          <a:off x="0" y="1535317"/>
           <a:ext cx="9688296" cy="0"/>
         </a:xfrm>
         <a:prstGeom prst="line">
@@ -6790,8 +5198,8 @@
       </dsp:nvSpPr>
       <dsp:spPr>
         <a:xfrm>
-          <a:off x="0" y="1727178"/>
-          <a:ext cx="9688296" cy="431794"/>
+          <a:off x="0" y="1535317"/>
+          <a:ext cx="9688296" cy="383723"/>
         </a:xfrm>
         <a:prstGeom prst="rect">
           <a:avLst/>
@@ -6815,12 +5223,12 @@
         <a:fontRef idx="minor"/>
       </dsp:style>
       <dsp:txBody>
-        <a:bodyPr spcFirstLastPara="0" vert="horz" wrap="square" lIns="72390" tIns="72390" rIns="72390" bIns="72390" numCol="1" spcCol="1270" anchor="t" anchorCtr="0">
+        <a:bodyPr spcFirstLastPara="0" vert="horz" wrap="square" lIns="64770" tIns="64770" rIns="64770" bIns="64770" numCol="1" spcCol="1270" anchor="t" anchorCtr="0">
           <a:noAutofit/>
         </a:bodyPr>
         <a:lstStyle/>
         <a:p>
-          <a:pPr marL="0" lvl="0" indent="0" algn="l" defTabSz="844550">
+          <a:pPr marL="0" lvl="0" indent="0" algn="l" defTabSz="755650">
             <a:lnSpc>
               <a:spcPct val="90000"/>
             </a:lnSpc>
@@ -6833,15 +5241,15 @@
             <a:buNone/>
           </a:pPr>
           <a:r>
-            <a:rPr lang="fr-CH" sz="1900" kern="1200" dirty="0"/>
+            <a:rPr lang="fr-CH" sz="1700" kern="1200"/>
             <a:t>Consigne de l’exercice</a:t>
           </a:r>
-          <a:endParaRPr lang="en-US" sz="1900" kern="1200" dirty="0"/>
+          <a:endParaRPr lang="en-US" sz="1700" kern="1200"/>
         </a:p>
       </dsp:txBody>
       <dsp:txXfrm>
-        <a:off x="0" y="1727178"/>
-        <a:ext cx="9688296" cy="431794"/>
+        <a:off x="0" y="1535317"/>
+        <a:ext cx="9688296" cy="383723"/>
       </dsp:txXfrm>
     </dsp:sp>
     <dsp:sp modelId="{BFCAF344-8245-421A-B850-71D46989B712}">
@@ -6851,7 +5259,7 @@
       </dsp:nvSpPr>
       <dsp:spPr>
         <a:xfrm>
-          <a:off x="0" y="2158973"/>
+          <a:off x="0" y="1919040"/>
           <a:ext cx="9688296" cy="0"/>
         </a:xfrm>
         <a:prstGeom prst="line">
@@ -6901,8 +5309,8 @@
       </dsp:nvSpPr>
       <dsp:spPr>
         <a:xfrm>
-          <a:off x="0" y="2158973"/>
-          <a:ext cx="9688296" cy="431794"/>
+          <a:off x="0" y="1919040"/>
+          <a:ext cx="9688296" cy="383723"/>
         </a:xfrm>
         <a:prstGeom prst="rect">
           <a:avLst/>
@@ -6926,12 +5334,12 @@
         <a:fontRef idx="minor"/>
       </dsp:style>
       <dsp:txBody>
-        <a:bodyPr spcFirstLastPara="0" vert="horz" wrap="square" lIns="72390" tIns="72390" rIns="72390" bIns="72390" numCol="1" spcCol="1270" anchor="t" anchorCtr="0">
+        <a:bodyPr spcFirstLastPara="0" vert="horz" wrap="square" lIns="64770" tIns="64770" rIns="64770" bIns="64770" numCol="1" spcCol="1270" anchor="t" anchorCtr="0">
           <a:noAutofit/>
         </a:bodyPr>
         <a:lstStyle/>
         <a:p>
-          <a:pPr marL="0" lvl="0" indent="0" algn="l" defTabSz="844550">
+          <a:pPr marL="0" lvl="0" indent="0" algn="l" defTabSz="755650">
             <a:lnSpc>
               <a:spcPct val="90000"/>
             </a:lnSpc>
@@ -6944,15 +5352,15 @@
             <a:buNone/>
           </a:pPr>
           <a:r>
-            <a:rPr lang="fr-CH" sz="1900" kern="1200" dirty="0"/>
+            <a:rPr lang="fr-CH" sz="1700" kern="1200"/>
             <a:t>Réalisation de l’exercice </a:t>
           </a:r>
-          <a:endParaRPr lang="en-US" sz="1900" kern="1200" dirty="0"/>
+          <a:endParaRPr lang="en-US" sz="1700" kern="1200"/>
         </a:p>
       </dsp:txBody>
       <dsp:txXfrm>
-        <a:off x="0" y="2158973"/>
-        <a:ext cx="9688296" cy="431794"/>
+        <a:off x="0" y="1919040"/>
+        <a:ext cx="9688296" cy="383723"/>
       </dsp:txXfrm>
     </dsp:sp>
     <dsp:sp modelId="{5F4E5B64-D840-4E5B-B7DC-18135E777423}">
@@ -6962,7 +5370,7 @@
       </dsp:nvSpPr>
       <dsp:spPr>
         <a:xfrm>
-          <a:off x="0" y="2590768"/>
+          <a:off x="0" y="2302764"/>
           <a:ext cx="9688296" cy="0"/>
         </a:xfrm>
         <a:prstGeom prst="line">
@@ -7012,8 +5420,8 @@
       </dsp:nvSpPr>
       <dsp:spPr>
         <a:xfrm>
-          <a:off x="0" y="2590768"/>
-          <a:ext cx="9688296" cy="431794"/>
+          <a:off x="0" y="2302764"/>
+          <a:ext cx="9688296" cy="383723"/>
         </a:xfrm>
         <a:prstGeom prst="rect">
           <a:avLst/>
@@ -7037,12 +5445,12 @@
         <a:fontRef idx="minor"/>
       </dsp:style>
       <dsp:txBody>
-        <a:bodyPr spcFirstLastPara="0" vert="horz" wrap="square" lIns="72390" tIns="72390" rIns="72390" bIns="72390" numCol="1" spcCol="1270" anchor="t" anchorCtr="0">
+        <a:bodyPr spcFirstLastPara="0" vert="horz" wrap="square" lIns="64770" tIns="64770" rIns="64770" bIns="64770" numCol="1" spcCol="1270" anchor="t" anchorCtr="0">
           <a:noAutofit/>
         </a:bodyPr>
         <a:lstStyle/>
         <a:p>
-          <a:pPr marL="0" lvl="0" indent="0" algn="l" defTabSz="844550">
+          <a:pPr marL="0" lvl="0" indent="0" algn="l" defTabSz="755650">
             <a:lnSpc>
               <a:spcPct val="90000"/>
             </a:lnSpc>
@@ -7055,15 +5463,126 @@
             <a:buNone/>
           </a:pPr>
           <a:r>
-            <a:rPr lang="fr-CH" sz="1900" kern="1200"/>
+            <a:rPr lang="fr-CH" sz="1700" kern="1200"/>
             <a:t>Corrigé</a:t>
           </a:r>
-          <a:endParaRPr lang="en-US" sz="1900" kern="1200"/>
+          <a:endParaRPr lang="en-US" sz="1700" kern="1200"/>
         </a:p>
       </dsp:txBody>
       <dsp:txXfrm>
-        <a:off x="0" y="2590768"/>
-        <a:ext cx="9688296" cy="431794"/>
+        <a:off x="0" y="2302764"/>
+        <a:ext cx="9688296" cy="383723"/>
+      </dsp:txXfrm>
+    </dsp:sp>
+    <dsp:sp modelId="{DF99174F-4BE1-4955-A418-67D00FF7EC52}">
+      <dsp:nvSpPr>
+        <dsp:cNvPr id="0" name=""/>
+        <dsp:cNvSpPr/>
+      </dsp:nvSpPr>
+      <dsp:spPr>
+        <a:xfrm>
+          <a:off x="0" y="2686488"/>
+          <a:ext cx="9688296" cy="0"/>
+        </a:xfrm>
+        <a:prstGeom prst="line">
+          <a:avLst/>
+        </a:prstGeom>
+        <a:solidFill>
+          <a:schemeClr val="accent1">
+            <a:hueOff val="0"/>
+            <a:satOff val="0"/>
+            <a:lumOff val="0"/>
+            <a:alphaOff val="0"/>
+          </a:schemeClr>
+        </a:solidFill>
+        <a:ln w="19050" cap="flat" cmpd="sng" algn="ctr">
+          <a:solidFill>
+            <a:schemeClr val="accent1">
+              <a:hueOff val="0"/>
+              <a:satOff val="0"/>
+              <a:lumOff val="0"/>
+              <a:alphaOff val="0"/>
+            </a:schemeClr>
+          </a:solidFill>
+          <a:prstDash val="solid"/>
+          <a:miter lim="800000"/>
+        </a:ln>
+        <a:effectLst/>
+      </dsp:spPr>
+      <dsp:style>
+        <a:lnRef idx="2">
+          <a:scrgbClr r="0" g="0" b="0"/>
+        </a:lnRef>
+        <a:fillRef idx="1">
+          <a:scrgbClr r="0" g="0" b="0"/>
+        </a:fillRef>
+        <a:effectRef idx="0">
+          <a:scrgbClr r="0" g="0" b="0"/>
+        </a:effectRef>
+        <a:fontRef idx="minor">
+          <a:schemeClr val="lt1"/>
+        </a:fontRef>
+      </dsp:style>
+    </dsp:sp>
+    <dsp:sp modelId="{8A202550-0E9D-4F0A-97CA-DD7E112055D9}">
+      <dsp:nvSpPr>
+        <dsp:cNvPr id="0" name=""/>
+        <dsp:cNvSpPr/>
+      </dsp:nvSpPr>
+      <dsp:spPr>
+        <a:xfrm>
+          <a:off x="0" y="2686488"/>
+          <a:ext cx="9688296" cy="383723"/>
+        </a:xfrm>
+        <a:prstGeom prst="rect">
+          <a:avLst/>
+        </a:prstGeom>
+        <a:noFill/>
+        <a:ln>
+          <a:noFill/>
+        </a:ln>
+        <a:effectLst/>
+      </dsp:spPr>
+      <dsp:style>
+        <a:lnRef idx="0">
+          <a:scrgbClr r="0" g="0" b="0"/>
+        </a:lnRef>
+        <a:fillRef idx="0">
+          <a:scrgbClr r="0" g="0" b="0"/>
+        </a:fillRef>
+        <a:effectRef idx="0">
+          <a:scrgbClr r="0" g="0" b="0"/>
+        </a:effectRef>
+        <a:fontRef idx="minor"/>
+      </dsp:style>
+      <dsp:txBody>
+        <a:bodyPr spcFirstLastPara="0" vert="horz" wrap="square" lIns="64770" tIns="64770" rIns="64770" bIns="64770" numCol="1" spcCol="1270" anchor="t" anchorCtr="0">
+          <a:noAutofit/>
+        </a:bodyPr>
+        <a:lstStyle/>
+        <a:p>
+          <a:pPr marL="0" lvl="0" indent="0" algn="l" defTabSz="755650">
+            <a:lnSpc>
+              <a:spcPct val="90000"/>
+            </a:lnSpc>
+            <a:spcBef>
+              <a:spcPct val="0"/>
+            </a:spcBef>
+            <a:spcAft>
+              <a:spcPct val="35000"/>
+            </a:spcAft>
+            <a:buNone/>
+          </a:pPr>
+          <a:r>
+            <a:rPr lang="fr-CH" sz="1700" kern="1200"/>
+            <a:t>Solution de l’exercice avec explication de chaque ligne de code.</a:t>
+          </a:r>
+          <a:endParaRPr lang="en-US" sz="1700" kern="1200"/>
+        </a:p>
+      </dsp:txBody>
+      <dsp:txXfrm>
+        <a:off x="0" y="2686488"/>
+        <a:ext cx="9688296" cy="383723"/>
       </dsp:txXfrm>
     </dsp:sp>
     <dsp:sp modelId="{F0BD20C5-66FA-481E-958F-29CD7591B9CB}">
@@ -7073,7 +5592,7 @@
       </dsp:nvSpPr>
       <dsp:spPr>
         <a:xfrm>
-          <a:off x="0" y="3022563"/>
+          <a:off x="0" y="3070212"/>
           <a:ext cx="9688296" cy="0"/>
         </a:xfrm>
         <a:prstGeom prst="line">
@@ -7123,8 +5642,8 @@
       </dsp:nvSpPr>
       <dsp:spPr>
         <a:xfrm>
-          <a:off x="0" y="3022563"/>
-          <a:ext cx="9688296" cy="431794"/>
+          <a:off x="0" y="3070212"/>
+          <a:ext cx="9688296" cy="383723"/>
         </a:xfrm>
         <a:prstGeom prst="rect">
           <a:avLst/>
@@ -7148,12 +5667,12 @@
         <a:fontRef idx="minor"/>
       </dsp:style>
       <dsp:txBody>
-        <a:bodyPr spcFirstLastPara="0" vert="horz" wrap="square" lIns="72390" tIns="72390" rIns="72390" bIns="72390" numCol="1" spcCol="1270" anchor="t" anchorCtr="0">
+        <a:bodyPr spcFirstLastPara="0" vert="horz" wrap="square" lIns="64770" tIns="64770" rIns="64770" bIns="64770" numCol="1" spcCol="1270" anchor="t" anchorCtr="0">
           <a:noAutofit/>
         </a:bodyPr>
         <a:lstStyle/>
         <a:p>
-          <a:pPr marL="0" lvl="0" indent="0" algn="l" defTabSz="844550">
+          <a:pPr marL="0" lvl="0" indent="0" algn="l" defTabSz="755650">
             <a:lnSpc>
               <a:spcPct val="90000"/>
             </a:lnSpc>
@@ -7166,15 +5685,15 @@
             <a:buNone/>
           </a:pPr>
           <a:r>
-            <a:rPr lang="fr-CH" sz="1900" kern="1200"/>
+            <a:rPr lang="fr-CH" sz="1700" kern="1200"/>
             <a:t>Conclusion </a:t>
           </a:r>
-          <a:endParaRPr lang="en-US" sz="1900" kern="1200"/>
+          <a:endParaRPr lang="en-US" sz="1700" kern="1200"/>
         </a:p>
       </dsp:txBody>
       <dsp:txXfrm>
-        <a:off x="0" y="3022563"/>
-        <a:ext cx="9688296" cy="431794"/>
+        <a:off x="0" y="3070212"/>
+        <a:ext cx="9688296" cy="383723"/>
       </dsp:txXfrm>
     </dsp:sp>
   </dsp:spTree>
@@ -11903,7 +10422,7 @@
           <a:p>
             <a:fld id="{1CB66588-8860-4587-AE3E-53E8E49AC9C2}" type="datetimeFigureOut">
               <a:rPr lang="fr-CH" smtClean="0"/>
-              <a:t>16.03.2026</a:t>
+              <a:t>23.03.2026</a:t>
             </a:fld>
             <a:endParaRPr lang="fr-CH"/>
           </a:p>
@@ -12062,7 +10581,7 @@
           <a:p>
             <a:fld id="{445C0A52-322D-4C49-93AD-280C238CD9CE}" type="slidenum">
               <a:rPr lang="fr-CH" smtClean="0"/>
-              <a:t>‹N°›</a:t>
+              <a:t>‹#›</a:t>
             </a:fld>
             <a:endParaRPr lang="fr-CH"/>
           </a:p>
@@ -12255,6 +10774,90 @@
 </p:notes>
 </file>
 
+<file path=ppt/notesSlides/notesSlide10.xml><?xml version="1.0" encoding="utf-8"?>
+<p:notes xmlns:a="http://schemas.openxmlformats.org/drawingml/2006/main" xmlns:r="http://schemas.openxmlformats.org/officeDocument/2006/relationships" xmlns:p="http://schemas.openxmlformats.org/presentationml/2006/main">
+  <p:cSld>
+    <p:spTree>
+      <p:nvGrpSpPr>
+        <p:cNvPr id="1" name=""/>
+        <p:cNvGrpSpPr/>
+        <p:nvPr/>
+      </p:nvGrpSpPr>
+      <p:grpSpPr>
+        <a:xfrm>
+          <a:off x="0" y="0"/>
+          <a:ext cx="0" cy="0"/>
+          <a:chOff x="0" y="0"/>
+          <a:chExt cx="0" cy="0"/>
+        </a:xfrm>
+      </p:grpSpPr>
+      <p:sp>
+        <p:nvSpPr>
+          <p:cNvPr id="2" name="Espace réservé de l'image des diapositives 1"/>
+          <p:cNvSpPr>
+            <a:spLocks noGrp="1" noRot="1" noChangeAspect="1"/>
+          </p:cNvSpPr>
+          <p:nvPr>
+            <p:ph type="sldImg"/>
+          </p:nvPr>
+        </p:nvSpPr>
+        <p:spPr/>
+      </p:sp>
+      <p:sp>
+        <p:nvSpPr>
+          <p:cNvPr id="3" name="Espace réservé des notes 2"/>
+          <p:cNvSpPr>
+            <a:spLocks noGrp="1"/>
+          </p:cNvSpPr>
+          <p:nvPr>
+            <p:ph type="body" idx="1"/>
+          </p:nvPr>
+        </p:nvSpPr>
+        <p:spPr/>
+        <p:txBody>
+          <a:bodyPr/>
+          <a:lstStyle/>
+          <a:p>
+            <a:endParaRPr lang="fr-CH"/>
+          </a:p>
+        </p:txBody>
+      </p:sp>
+      <p:sp>
+        <p:nvSpPr>
+          <p:cNvPr id="4" name="Espace réservé du numéro de diapositive 3"/>
+          <p:cNvSpPr>
+            <a:spLocks noGrp="1"/>
+          </p:cNvSpPr>
+          <p:nvPr>
+            <p:ph type="sldNum" sz="quarter" idx="5"/>
+          </p:nvPr>
+        </p:nvSpPr>
+        <p:spPr/>
+        <p:txBody>
+          <a:bodyPr/>
+          <a:lstStyle/>
+          <a:p>
+            <a:fld id="{445C0A52-322D-4C49-93AD-280C238CD9CE}" type="slidenum">
+              <a:rPr lang="fr-CH" smtClean="0"/>
+              <a:t>18</a:t>
+            </a:fld>
+            <a:endParaRPr lang="fr-CH"/>
+          </a:p>
+        </p:txBody>
+      </p:sp>
+    </p:spTree>
+    <p:extLst>
+      <p:ext uri="{BB962C8B-B14F-4D97-AF65-F5344CB8AC3E}">
+        <p14:creationId xmlns:p14="http://schemas.microsoft.com/office/powerpoint/2010/main" val="4073487926"/>
+      </p:ext>
+    </p:extLst>
+  </p:cSld>
+  <p:clrMapOvr>
+    <a:masterClrMapping/>
+  </p:clrMapOvr>
+</p:notes>
+</file>
+
 <file path=ppt/notesSlides/notesSlide2.xml><?xml version="1.0" encoding="utf-8"?>
 <p:notes xmlns:a="http://schemas.openxmlformats.org/drawingml/2006/main" xmlns:r="http://schemas.openxmlformats.org/officeDocument/2006/relationships" xmlns:p="http://schemas.openxmlformats.org/presentationml/2006/main">
   <p:cSld>
@@ -12635,6 +11238,104 @@
           <a:bodyPr/>
           <a:lstStyle/>
           <a:p>
+            <a:r>
+              <a:rPr lang="fr-CH" sz="1200" kern="1200">
+                <a:solidFill>
+                  <a:schemeClr val="tx1"/>
+                </a:solidFill>
+                <a:effectLst/>
+                <a:latin typeface="+mn-lt"/>
+                <a:ea typeface="+mn-ea"/>
+                <a:cs typeface="+mn-cs"/>
+              </a:rPr>
+              <a:t>Le script automatise la création d’un dossier utilisateur en plusieurs étapes : cela permet d’exécuter la tâche plus vite et de façon organisée.</a:t>
+            </a:r>
+          </a:p>
+          <a:p>
+            <a:r>
+              <a:rPr lang="fr-CH" sz="1200" kern="1200">
+                <a:solidFill>
+                  <a:schemeClr val="tx1"/>
+                </a:solidFill>
+                <a:effectLst/>
+                <a:latin typeface="+mn-lt"/>
+                <a:ea typeface="+mn-ea"/>
+                <a:cs typeface="+mn-cs"/>
+              </a:rPr>
+              <a:t>Le script récupère le nom de l’utilisateur,, pour personnaliser automatiquement le dossier créé.</a:t>
+            </a:r>
+          </a:p>
+          <a:p>
+            <a:r>
+              <a:rPr lang="fr-CH" sz="1200" kern="1200">
+                <a:solidFill>
+                  <a:schemeClr val="tx1"/>
+                </a:solidFill>
+                <a:effectLst/>
+                <a:latin typeface="+mn-lt"/>
+                <a:ea typeface="+mn-ea"/>
+                <a:cs typeface="+mn-cs"/>
+              </a:rPr>
+              <a:t>Il génère la date automatiquement .</a:t>
+            </a:r>
+          </a:p>
+          <a:p>
+            <a:r>
+              <a:rPr lang="fr-CH" sz="1200" kern="1200">
+                <a:solidFill>
+                  <a:schemeClr val="tx1"/>
+                </a:solidFill>
+                <a:effectLst/>
+                <a:latin typeface="+mn-lt"/>
+                <a:ea typeface="+mn-ea"/>
+                <a:cs typeface="+mn-cs"/>
+              </a:rPr>
+              <a:t>Il crée le dossier utilisateur avec la date,, pour obtenir un nom de dossier unique et facile à reconnaître.</a:t>
+            </a:r>
+          </a:p>
+          <a:p>
+            <a:r>
+              <a:rPr lang="fr-CH" sz="1200" kern="1200">
+                <a:solidFill>
+                  <a:schemeClr val="tx1"/>
+                </a:solidFill>
+                <a:effectLst/>
+                <a:latin typeface="+mn-lt"/>
+                <a:ea typeface="+mn-ea"/>
+                <a:cs typeface="+mn-cs"/>
+              </a:rPr>
+              <a:t>Il crée un fichier confirmation.txt dans le dossier,, afin de conserver un message de validation.</a:t>
+            </a:r>
+          </a:p>
+          <a:p>
+            <a:r>
+              <a:rPr lang="fr-CH" sz="1200" kern="1200">
+                <a:solidFill>
+                  <a:schemeClr val="tx1"/>
+                </a:solidFill>
+                <a:effectLst/>
+                <a:latin typeface="+mn-lt"/>
+                <a:ea typeface="+mn-ea"/>
+                <a:cs typeface="+mn-cs"/>
+              </a:rPr>
+              <a:t>Il enregistre l’opération dans un fichier log.txt,, pour garder un historique des actions effectuées.</a:t>
+            </a:r>
+          </a:p>
+          <a:p>
+            <a:r>
+              <a:rPr lang="fr-CH" sz="1200" kern="1200">
+                <a:solidFill>
+                  <a:schemeClr val="tx1"/>
+                </a:solidFill>
+                <a:effectLst/>
+                <a:latin typeface="+mn-lt"/>
+                <a:ea typeface="+mn-ea"/>
+                <a:cs typeface="+mn-cs"/>
+              </a:rPr>
+              <a:t> </a:t>
+            </a:r>
+          </a:p>
+          <a:p>
             <a:endParaRPr lang="fr-CH"/>
           </a:p>
         </p:txBody>
@@ -12656,7 +11357,7 @@
           <a:p>
             <a:fld id="{445C0A52-322D-4C49-93AD-280C238CD9CE}" type="slidenum">
               <a:rPr lang="fr-CH" smtClean="0"/>
-              <a:t>14</a:t>
+              <a:t>13</a:t>
             </a:fld>
             <a:endParaRPr lang="fr-CH"/>
           </a:p>
@@ -12665,7 +11366,349 @@
     </p:spTree>
     <p:extLst>
       <p:ext uri="{BB962C8B-B14F-4D97-AF65-F5344CB8AC3E}">
-        <p14:creationId xmlns:p14="http://schemas.microsoft.com/office/powerpoint/2010/main" val="4073487926"/>
+        <p14:creationId xmlns:p14="http://schemas.microsoft.com/office/powerpoint/2010/main" val="3361192280"/>
+      </p:ext>
+    </p:extLst>
+  </p:cSld>
+  <p:clrMapOvr>
+    <a:masterClrMapping/>
+  </p:clrMapOvr>
+</p:notes>
+</file>
+
+<file path=ppt/notesSlides/notesSlide7.xml><?xml version="1.0" encoding="utf-8"?>
+<p:notes xmlns:a="http://schemas.openxmlformats.org/drawingml/2006/main" xmlns:r="http://schemas.openxmlformats.org/officeDocument/2006/relationships" xmlns:p="http://schemas.openxmlformats.org/presentationml/2006/main">
+  <p:cSld>
+    <p:spTree>
+      <p:nvGrpSpPr>
+        <p:cNvPr id="1" name=""/>
+        <p:cNvGrpSpPr/>
+        <p:nvPr/>
+      </p:nvGrpSpPr>
+      <p:grpSpPr>
+        <a:xfrm>
+          <a:off x="0" y="0"/>
+          <a:ext cx="0" cy="0"/>
+          <a:chOff x="0" y="0"/>
+          <a:chExt cx="0" cy="0"/>
+        </a:xfrm>
+      </p:grpSpPr>
+      <p:sp>
+        <p:nvSpPr>
+          <p:cNvPr id="2" name="Folienbildplatzhalter 1"/>
+          <p:cNvSpPr>
+            <a:spLocks noGrp="1" noRot="1" noChangeAspect="1"/>
+          </p:cNvSpPr>
+          <p:nvPr>
+            <p:ph type="sldImg"/>
+          </p:nvPr>
+        </p:nvSpPr>
+        <p:spPr/>
+      </p:sp>
+      <p:sp>
+        <p:nvSpPr>
+          <p:cNvPr id="3" name="Notizenplatzhalter 2"/>
+          <p:cNvSpPr>
+            <a:spLocks noGrp="1"/>
+          </p:cNvSpPr>
+          <p:nvPr>
+            <p:ph type="body" idx="1"/>
+          </p:nvPr>
+        </p:nvSpPr>
+        <p:spPr/>
+        <p:txBody>
+          <a:bodyPr/>
+          <a:lstStyle/>
+          <a:p>
+            <a:r>
+              <a:rPr lang="fr-FR"/>
+              <a:t>Rouge</a:t>
+            </a:r>
+          </a:p>
+          <a:p>
+            <a:r>
+              <a:rPr lang="fr-FR"/>
+              <a:t>Définit une variable contenant le nom de l’utilisateur. Cette valeur sera réutilisée dans le script pour personnaliser les messages et les fichiers. Cela rend le script plus clair et plus pratique à modifier.</a:t>
+            </a:r>
+          </a:p>
+          <a:p>
+            <a:r>
+              <a:rPr lang="fr-FR"/>
+              <a:t>Orange</a:t>
+            </a:r>
+          </a:p>
+          <a:p>
+            <a:r>
+              <a:rPr lang="fr-FR"/>
+              <a:t>Récupère la date actuelle du système dans un format précis. Cette date permet d’identifier facilement le moment où le script est exécuté. Elle est aussi utile pour organiser les dossiers de manière chronologique.</a:t>
+            </a:r>
+          </a:p>
+          <a:p>
+            <a:r>
+              <a:rPr lang="fr-FR"/>
+              <a:t>Vert</a:t>
+            </a:r>
+          </a:p>
+          <a:p>
+            <a:r>
+              <a:rPr lang="fr-FR"/>
+              <a:t>Construit le chemin complet du dossier à partir de l’emplacement, du nom de l’utilisateur et de la date. Cela permet de créer un dossier unique et facile à reconnaître. Le classement des données devient ainsi plus automatique et plus propre.</a:t>
+            </a:r>
+            <a:endParaRPr lang="de-CH"/>
+          </a:p>
+        </p:txBody>
+      </p:sp>
+      <p:sp>
+        <p:nvSpPr>
+          <p:cNvPr id="4" name="Foliennummernplatzhalter 3"/>
+          <p:cNvSpPr>
+            <a:spLocks noGrp="1"/>
+          </p:cNvSpPr>
+          <p:nvPr>
+            <p:ph type="sldNum" sz="quarter" idx="5"/>
+          </p:nvPr>
+        </p:nvSpPr>
+        <p:spPr/>
+        <p:txBody>
+          <a:bodyPr/>
+          <a:lstStyle/>
+          <a:p>
+            <a:fld id="{445C0A52-322D-4C49-93AD-280C238CD9CE}" type="slidenum">
+              <a:rPr lang="fr-CH" smtClean="0"/>
+              <a:t>15</a:t>
+            </a:fld>
+            <a:endParaRPr lang="fr-CH"/>
+          </a:p>
+        </p:txBody>
+      </p:sp>
+    </p:spTree>
+    <p:extLst>
+      <p:ext uri="{BB962C8B-B14F-4D97-AF65-F5344CB8AC3E}">
+        <p14:creationId xmlns:p14="http://schemas.microsoft.com/office/powerpoint/2010/main" val="1390191712"/>
+      </p:ext>
+    </p:extLst>
+  </p:cSld>
+  <p:clrMapOvr>
+    <a:masterClrMapping/>
+  </p:clrMapOvr>
+</p:notes>
+</file>
+
+<file path=ppt/notesSlides/notesSlide8.xml><?xml version="1.0" encoding="utf-8"?>
+<p:notes xmlns:a="http://schemas.openxmlformats.org/drawingml/2006/main" xmlns:r="http://schemas.openxmlformats.org/officeDocument/2006/relationships" xmlns:p="http://schemas.openxmlformats.org/presentationml/2006/main">
+  <p:cSld>
+    <p:spTree>
+      <p:nvGrpSpPr>
+        <p:cNvPr id="1" name=""/>
+        <p:cNvGrpSpPr/>
+        <p:nvPr/>
+      </p:nvGrpSpPr>
+      <p:grpSpPr>
+        <a:xfrm>
+          <a:off x="0" y="0"/>
+          <a:ext cx="0" cy="0"/>
+          <a:chOff x="0" y="0"/>
+          <a:chExt cx="0" cy="0"/>
+        </a:xfrm>
+      </p:grpSpPr>
+      <p:sp>
+        <p:nvSpPr>
+          <p:cNvPr id="2" name="Folienbildplatzhalter 1"/>
+          <p:cNvSpPr>
+            <a:spLocks noGrp="1" noRot="1" noChangeAspect="1"/>
+          </p:cNvSpPr>
+          <p:nvPr>
+            <p:ph type="sldImg"/>
+          </p:nvPr>
+        </p:nvSpPr>
+        <p:spPr/>
+      </p:sp>
+      <p:sp>
+        <p:nvSpPr>
+          <p:cNvPr id="3" name="Notizenplatzhalter 2"/>
+          <p:cNvSpPr>
+            <a:spLocks noGrp="1"/>
+          </p:cNvSpPr>
+          <p:nvPr>
+            <p:ph type="body" idx="1"/>
+          </p:nvPr>
+        </p:nvSpPr>
+        <p:spPr/>
+        <p:txBody>
+          <a:bodyPr/>
+          <a:lstStyle/>
+          <a:p>
+            <a:r>
+              <a:rPr lang="fr-FR"/>
+              <a:t>Jaune</a:t>
+            </a:r>
+          </a:p>
+          <a:p>
+            <a:r>
+              <a:rPr lang="fr-FR"/>
+              <a:t>Crée le dossier à l’emplacement indiqué par la variable de chemin. L’option utilisée permet d’éviter certains problèmes si le dossier existe déjà. Cette étape prépare l’espace nécessaire pour enregistrer les fichiers.</a:t>
+            </a:r>
+          </a:p>
+          <a:p>
+            <a:r>
+              <a:rPr lang="fr-FR"/>
+              <a:t>Violet</a:t>
+            </a:r>
+          </a:p>
+          <a:p>
+            <a:r>
+              <a:rPr lang="fr-FR"/>
+              <a:t>Enregistre un message de confirmation dans une variable texte. Ce message contient aussi la date actuelle, ce qui permet de savoir exactement quand l’action a été réalisée. Il servira ensuite pour créer un fichier de confirmation.</a:t>
+            </a:r>
+            <a:endParaRPr lang="de-CH"/>
+          </a:p>
+        </p:txBody>
+      </p:sp>
+      <p:sp>
+        <p:nvSpPr>
+          <p:cNvPr id="4" name="Foliennummernplatzhalter 3"/>
+          <p:cNvSpPr>
+            <a:spLocks noGrp="1"/>
+          </p:cNvSpPr>
+          <p:nvPr>
+            <p:ph type="sldNum" sz="quarter" idx="5"/>
+          </p:nvPr>
+        </p:nvSpPr>
+        <p:spPr/>
+        <p:txBody>
+          <a:bodyPr/>
+          <a:lstStyle/>
+          <a:p>
+            <a:fld id="{445C0A52-322D-4C49-93AD-280C238CD9CE}" type="slidenum">
+              <a:rPr lang="fr-CH" smtClean="0"/>
+              <a:t>16</a:t>
+            </a:fld>
+            <a:endParaRPr lang="fr-CH"/>
+          </a:p>
+        </p:txBody>
+      </p:sp>
+    </p:spTree>
+    <p:extLst>
+      <p:ext uri="{BB962C8B-B14F-4D97-AF65-F5344CB8AC3E}">
+        <p14:creationId xmlns:p14="http://schemas.microsoft.com/office/powerpoint/2010/main" val="926841459"/>
+      </p:ext>
+    </p:extLst>
+  </p:cSld>
+  <p:clrMapOvr>
+    <a:masterClrMapping/>
+  </p:clrMapOvr>
+</p:notes>
+</file>
+
+<file path=ppt/notesSlides/notesSlide9.xml><?xml version="1.0" encoding="utf-8"?>
+<p:notes xmlns:a="http://schemas.openxmlformats.org/drawingml/2006/main" xmlns:r="http://schemas.openxmlformats.org/officeDocument/2006/relationships" xmlns:p="http://schemas.openxmlformats.org/presentationml/2006/main">
+  <p:cSld>
+    <p:spTree>
+      <p:nvGrpSpPr>
+        <p:cNvPr id="1" name=""/>
+        <p:cNvGrpSpPr/>
+        <p:nvPr/>
+      </p:nvGrpSpPr>
+      <p:grpSpPr>
+        <a:xfrm>
+          <a:off x="0" y="0"/>
+          <a:ext cx="0" cy="0"/>
+          <a:chOff x="0" y="0"/>
+          <a:chExt cx="0" cy="0"/>
+        </a:xfrm>
+      </p:grpSpPr>
+      <p:sp>
+        <p:nvSpPr>
+          <p:cNvPr id="2" name="Folienbildplatzhalter 1"/>
+          <p:cNvSpPr>
+            <a:spLocks noGrp="1" noRot="1" noChangeAspect="1"/>
+          </p:cNvSpPr>
+          <p:nvPr>
+            <p:ph type="sldImg"/>
+          </p:nvPr>
+        </p:nvSpPr>
+        <p:spPr/>
+      </p:sp>
+      <p:sp>
+        <p:nvSpPr>
+          <p:cNvPr id="3" name="Notizenplatzhalter 2"/>
+          <p:cNvSpPr>
+            <a:spLocks noGrp="1"/>
+          </p:cNvSpPr>
+          <p:nvPr>
+            <p:ph type="body" idx="1"/>
+          </p:nvPr>
+        </p:nvSpPr>
+        <p:spPr/>
+        <p:txBody>
+          <a:bodyPr/>
+          <a:lstStyle/>
+          <a:p>
+            <a:r>
+              <a:rPr lang="fr-FR"/>
+              <a:t>Bleu clair</a:t>
+            </a:r>
+          </a:p>
+          <a:p>
+            <a:r>
+              <a:rPr lang="fr-FR"/>
+              <a:t>Écrit le message de confirmation dans un fichier texte. Le fichier est enregistré dans le dossier créé précédemment. Cela permet de garder une trace écrite de l’exécution du script.</a:t>
+            </a:r>
+          </a:p>
+          <a:p>
+            <a:r>
+              <a:rPr lang="fr-FR"/>
+              <a:t>Rouge foncé</a:t>
+            </a:r>
+          </a:p>
+          <a:p>
+            <a:r>
+              <a:rPr lang="fr-FR"/>
+              <a:t>Ajoute une nouvelle ligne dans le fichier log avec le nom de l’utilisateur et la date. Les anciennes lignes sont conservées, ce qui permet de créer un historique des exécutions. C’est utile pour suivre les actions réalisées au fil du temps.</a:t>
+            </a:r>
+          </a:p>
+          <a:p>
+            <a:r>
+              <a:rPr lang="fr-FR"/>
+              <a:t>Blanc</a:t>
+            </a:r>
+          </a:p>
+          <a:p>
+            <a:r>
+              <a:rPr lang="fr-FR"/>
+              <a:t>Affiche un message final dans la console pour indiquer que le script est terminé. L’utilisateur voit immédiatement que tout s’est bien exécuté. Cela donne une confirmation directe à l’écran.</a:t>
+            </a:r>
+            <a:endParaRPr lang="de-CH"/>
+          </a:p>
+        </p:txBody>
+      </p:sp>
+      <p:sp>
+        <p:nvSpPr>
+          <p:cNvPr id="4" name="Foliennummernplatzhalter 3"/>
+          <p:cNvSpPr>
+            <a:spLocks noGrp="1"/>
+          </p:cNvSpPr>
+          <p:nvPr>
+            <p:ph type="sldNum" sz="quarter" idx="5"/>
+          </p:nvPr>
+        </p:nvSpPr>
+        <p:spPr/>
+        <p:txBody>
+          <a:bodyPr/>
+          <a:lstStyle/>
+          <a:p>
+            <a:fld id="{445C0A52-322D-4C49-93AD-280C238CD9CE}" type="slidenum">
+              <a:rPr lang="fr-CH" smtClean="0"/>
+              <a:t>17</a:t>
+            </a:fld>
+            <a:endParaRPr lang="fr-CH"/>
+          </a:p>
+        </p:txBody>
+      </p:sp>
+    </p:spTree>
+    <p:extLst>
+      <p:ext uri="{BB962C8B-B14F-4D97-AF65-F5344CB8AC3E}">
+        <p14:creationId xmlns:p14="http://schemas.microsoft.com/office/powerpoint/2010/main" val="493303876"/>
       </p:ext>
     </p:extLst>
   </p:cSld>
@@ -12824,7 +11867,7 @@
           <a:p>
             <a:fld id="{FAF4216F-0771-4A29-B24A-0D048FFACE56}" type="datetimeFigureOut">
               <a:rPr lang="fr-CH" smtClean="0"/>
-              <a:t>16.03.2026</a:t>
+              <a:t>23.03.2026</a:t>
             </a:fld>
             <a:endParaRPr lang="fr-CH"/>
           </a:p>
@@ -12878,7 +11921,7 @@
           <a:p>
             <a:fld id="{940B1682-32DC-4456-8393-381D97CBD7D4}" type="slidenum">
               <a:rPr lang="fr-CH" smtClean="0"/>
-              <a:t>‹N°›</a:t>
+              <a:t>‹#›</a:t>
             </a:fld>
             <a:endParaRPr lang="fr-CH"/>
           </a:p>
@@ -13024,7 +12067,7 @@
           <a:p>
             <a:fld id="{FAF4216F-0771-4A29-B24A-0D048FFACE56}" type="datetimeFigureOut">
               <a:rPr lang="fr-CH" smtClean="0"/>
-              <a:t>16.03.2026</a:t>
+              <a:t>23.03.2026</a:t>
             </a:fld>
             <a:endParaRPr lang="fr-CH"/>
           </a:p>
@@ -13078,7 +12121,7 @@
           <a:p>
             <a:fld id="{940B1682-32DC-4456-8393-381D97CBD7D4}" type="slidenum">
               <a:rPr lang="fr-CH" smtClean="0"/>
-              <a:t>‹N°›</a:t>
+              <a:t>‹#›</a:t>
             </a:fld>
             <a:endParaRPr lang="fr-CH"/>
           </a:p>
@@ -13234,7 +12277,7 @@
           <a:p>
             <a:fld id="{FAF4216F-0771-4A29-B24A-0D048FFACE56}" type="datetimeFigureOut">
               <a:rPr lang="fr-CH" smtClean="0"/>
-              <a:t>16.03.2026</a:t>
+              <a:t>23.03.2026</a:t>
             </a:fld>
             <a:endParaRPr lang="fr-CH"/>
           </a:p>
@@ -13288,7 +12331,7 @@
           <a:p>
             <a:fld id="{940B1682-32DC-4456-8393-381D97CBD7D4}" type="slidenum">
               <a:rPr lang="fr-CH" smtClean="0"/>
-              <a:t>‹N°›</a:t>
+              <a:t>‹#›</a:t>
             </a:fld>
             <a:endParaRPr lang="fr-CH"/>
           </a:p>
@@ -13434,7 +12477,7 @@
           <a:p>
             <a:fld id="{FAF4216F-0771-4A29-B24A-0D048FFACE56}" type="datetimeFigureOut">
               <a:rPr lang="fr-CH" smtClean="0"/>
-              <a:t>16.03.2026</a:t>
+              <a:t>23.03.2026</a:t>
             </a:fld>
             <a:endParaRPr lang="fr-CH"/>
           </a:p>
@@ -13488,7 +12531,7 @@
           <a:p>
             <a:fld id="{940B1682-32DC-4456-8393-381D97CBD7D4}" type="slidenum">
               <a:rPr lang="fr-CH" smtClean="0"/>
-              <a:t>‹N°›</a:t>
+              <a:t>‹#›</a:t>
             </a:fld>
             <a:endParaRPr lang="fr-CH"/>
           </a:p>
@@ -13710,7 +12753,7 @@
           <a:p>
             <a:fld id="{FAF4216F-0771-4A29-B24A-0D048FFACE56}" type="datetimeFigureOut">
               <a:rPr lang="fr-CH" smtClean="0"/>
-              <a:t>16.03.2026</a:t>
+              <a:t>23.03.2026</a:t>
             </a:fld>
             <a:endParaRPr lang="fr-CH"/>
           </a:p>
@@ -13764,7 +12807,7 @@
           <a:p>
             <a:fld id="{940B1682-32DC-4456-8393-381D97CBD7D4}" type="slidenum">
               <a:rPr lang="fr-CH" smtClean="0"/>
-              <a:t>‹N°›</a:t>
+              <a:t>‹#›</a:t>
             </a:fld>
             <a:endParaRPr lang="fr-CH"/>
           </a:p>
@@ -13978,7 +13021,7 @@
           <a:p>
             <a:fld id="{FAF4216F-0771-4A29-B24A-0D048FFACE56}" type="datetimeFigureOut">
               <a:rPr lang="fr-CH" smtClean="0"/>
-              <a:t>16.03.2026</a:t>
+              <a:t>23.03.2026</a:t>
             </a:fld>
             <a:endParaRPr lang="fr-CH"/>
           </a:p>
@@ -14032,7 +13075,7 @@
           <a:p>
             <a:fld id="{940B1682-32DC-4456-8393-381D97CBD7D4}" type="slidenum">
               <a:rPr lang="fr-CH" smtClean="0"/>
-              <a:t>‹N°›</a:t>
+              <a:t>‹#›</a:t>
             </a:fld>
             <a:endParaRPr lang="fr-CH"/>
           </a:p>
@@ -14393,7 +13436,7 @@
           <a:p>
             <a:fld id="{FAF4216F-0771-4A29-B24A-0D048FFACE56}" type="datetimeFigureOut">
               <a:rPr lang="fr-CH" smtClean="0"/>
-              <a:t>16.03.2026</a:t>
+              <a:t>23.03.2026</a:t>
             </a:fld>
             <a:endParaRPr lang="fr-CH"/>
           </a:p>
@@ -14447,7 +13490,7 @@
           <a:p>
             <a:fld id="{940B1682-32DC-4456-8393-381D97CBD7D4}" type="slidenum">
               <a:rPr lang="fr-CH" smtClean="0"/>
-              <a:t>‹N°›</a:t>
+              <a:t>‹#›</a:t>
             </a:fld>
             <a:endParaRPr lang="fr-CH"/>
           </a:p>
@@ -14535,7 +13578,7 @@
           <a:p>
             <a:fld id="{FAF4216F-0771-4A29-B24A-0D048FFACE56}" type="datetimeFigureOut">
               <a:rPr lang="fr-CH" smtClean="0"/>
-              <a:t>16.03.2026</a:t>
+              <a:t>23.03.2026</a:t>
             </a:fld>
             <a:endParaRPr lang="fr-CH"/>
           </a:p>
@@ -14589,7 +13632,7 @@
           <a:p>
             <a:fld id="{940B1682-32DC-4456-8393-381D97CBD7D4}" type="slidenum">
               <a:rPr lang="fr-CH" smtClean="0"/>
-              <a:t>‹N°›</a:t>
+              <a:t>‹#›</a:t>
             </a:fld>
             <a:endParaRPr lang="fr-CH"/>
           </a:p>
@@ -14648,7 +13691,7 @@
           <a:p>
             <a:fld id="{FAF4216F-0771-4A29-B24A-0D048FFACE56}" type="datetimeFigureOut">
               <a:rPr lang="fr-CH" smtClean="0"/>
-              <a:t>16.03.2026</a:t>
+              <a:t>23.03.2026</a:t>
             </a:fld>
             <a:endParaRPr lang="fr-CH"/>
           </a:p>
@@ -14702,7 +13745,7 @@
           <a:p>
             <a:fld id="{940B1682-32DC-4456-8393-381D97CBD7D4}" type="slidenum">
               <a:rPr lang="fr-CH" smtClean="0"/>
-              <a:t>‹N°›</a:t>
+              <a:t>‹#›</a:t>
             </a:fld>
             <a:endParaRPr lang="fr-CH"/>
           </a:p>
@@ -14961,7 +14004,7 @@
           <a:p>
             <a:fld id="{FAF4216F-0771-4A29-B24A-0D048FFACE56}" type="datetimeFigureOut">
               <a:rPr lang="fr-CH" smtClean="0"/>
-              <a:t>16.03.2026</a:t>
+              <a:t>23.03.2026</a:t>
             </a:fld>
             <a:endParaRPr lang="fr-CH"/>
           </a:p>
@@ -15015,7 +14058,7 @@
           <a:p>
             <a:fld id="{940B1682-32DC-4456-8393-381D97CBD7D4}" type="slidenum">
               <a:rPr lang="fr-CH" smtClean="0"/>
-              <a:t>‹N°›</a:t>
+              <a:t>‹#›</a:t>
             </a:fld>
             <a:endParaRPr lang="fr-CH"/>
           </a:p>
@@ -15250,7 +14293,7 @@
           <a:p>
             <a:fld id="{FAF4216F-0771-4A29-B24A-0D048FFACE56}" type="datetimeFigureOut">
               <a:rPr lang="fr-CH" smtClean="0"/>
-              <a:t>16.03.2026</a:t>
+              <a:t>23.03.2026</a:t>
             </a:fld>
             <a:endParaRPr lang="fr-CH"/>
           </a:p>
@@ -15304,7 +14347,7 @@
           <a:p>
             <a:fld id="{940B1682-32DC-4456-8393-381D97CBD7D4}" type="slidenum">
               <a:rPr lang="fr-CH" smtClean="0"/>
-              <a:t>‹N°›</a:t>
+              <a:t>‹#›</a:t>
             </a:fld>
             <a:endParaRPr lang="fr-CH"/>
           </a:p>
@@ -15493,7 +14536,7 @@
           <a:p>
             <a:fld id="{FAF4216F-0771-4A29-B24A-0D048FFACE56}" type="datetimeFigureOut">
               <a:rPr lang="fr-CH" smtClean="0"/>
-              <a:t>16.03.2026</a:t>
+              <a:t>23.03.2026</a:t>
             </a:fld>
             <a:endParaRPr lang="fr-CH"/>
           </a:p>
@@ -15583,7 +14626,7 @@
           <a:p>
             <a:fld id="{940B1682-32DC-4456-8393-381D97CBD7D4}" type="slidenum">
               <a:rPr lang="fr-CH" smtClean="0"/>
-              <a:t>‹N°›</a:t>
+              <a:t>‹#›</a:t>
             </a:fld>
             <a:endParaRPr lang="fr-CH"/>
           </a:p>
@@ -16452,7 +15495,7 @@
           <a:lstStyle/>
           <a:p>
             <a:pPr algn="ctr"/>
-            <a:endParaRPr lang="en-US" dirty="0"/>
+            <a:endParaRPr lang="en-US"/>
           </a:p>
         </p:txBody>
       </p:sp>
@@ -16485,14 +15528,14 @@
           <a:lstStyle/>
           <a:p>
             <a:r>
-              <a:rPr lang="fr-CH" sz="6000" b="1" dirty="0"/>
+              <a:rPr lang="fr-CH" sz="6000" b="1"/>
               <a:t>Notions </a:t>
             </a:r>
             <a:r>
-              <a:rPr lang="fr-CH" sz="6000" b="1" dirty="0" err="1"/>
+              <a:rPr lang="fr-CH" sz="6000" b="1" err="1"/>
               <a:t>Powershell</a:t>
             </a:r>
-            <a:endParaRPr lang="fr-CH" sz="6000" b="1" dirty="0"/>
+            <a:endParaRPr lang="fr-CH" sz="6000" b="1"/>
           </a:p>
         </p:txBody>
       </p:sp>
@@ -16525,57 +15568,57 @@
           <a:lstStyle/>
           <a:p>
             <a:r>
-              <a:rPr lang="fr-FR" sz="2400" dirty="0"/>
+              <a:rPr lang="fr-FR" sz="2400"/>
               <a:t>Les variables pour stocker des informations:</a:t>
             </a:r>
           </a:p>
           <a:p>
             <a:pPr lvl="1"/>
             <a:r>
-              <a:rPr lang="fr-FR" dirty="0"/>
+              <a:rPr lang="fr-FR"/>
               <a:t>$</a:t>
             </a:r>
             <a:r>
-              <a:rPr lang="fr-FR" dirty="0" err="1"/>
+              <a:rPr lang="fr-FR" err="1"/>
               <a:t>NomUtilisateur</a:t>
             </a:r>
-            <a:endParaRPr lang="fr-FR" dirty="0"/>
+            <a:endParaRPr lang="fr-FR"/>
           </a:p>
           <a:p>
             <a:pPr lvl="1"/>
             <a:r>
-              <a:rPr lang="fr-FR" dirty="0"/>
+              <a:rPr lang="fr-FR"/>
               <a:t>$Chemin</a:t>
             </a:r>
           </a:p>
           <a:p>
             <a:pPr lvl="1"/>
-            <a:endParaRPr lang="fr-FR" dirty="0"/>
+            <a:endParaRPr lang="fr-FR"/>
           </a:p>
           <a:p>
             <a:r>
-              <a:rPr lang="fr-FR" sz="2400" dirty="0"/>
+              <a:rPr lang="fr-FR" sz="2400"/>
               <a:t>Création d’un dossier :</a:t>
             </a:r>
           </a:p>
           <a:p>
             <a:pPr lvl="1"/>
             <a:r>
-              <a:rPr lang="fr-FR" dirty="0"/>
+              <a:rPr lang="fr-FR"/>
               <a:t>New-Item -</a:t>
             </a:r>
             <a:r>
-              <a:rPr lang="fr-FR" dirty="0" err="1"/>
+              <a:rPr lang="fr-FR" err="1"/>
               <a:t>ItemType</a:t>
             </a:r>
             <a:r>
-              <a:rPr lang="fr-FR" dirty="0"/>
+              <a:rPr lang="fr-FR"/>
               <a:t> Directory</a:t>
             </a:r>
           </a:p>
           <a:p>
             <a:pPr lvl="1"/>
-            <a:endParaRPr lang="fr-FR" sz="2000" dirty="0"/>
+            <a:endParaRPr lang="fr-FR" sz="2000"/>
           </a:p>
         </p:txBody>
       </p:sp>
@@ -16806,7 +15849,7 @@
           <a:lstStyle/>
           <a:p>
             <a:pPr algn="ctr"/>
-            <a:endParaRPr lang="en-US" dirty="0"/>
+            <a:endParaRPr lang="en-US"/>
           </a:p>
         </p:txBody>
       </p:sp>
@@ -16839,57 +15882,57 @@
           <a:lstStyle/>
           <a:p>
             <a:r>
-              <a:rPr lang="fr-FR" sz="2400" dirty="0"/>
+              <a:rPr lang="fr-FR" sz="2400"/>
               <a:t>Écriture dans un fichier:</a:t>
             </a:r>
           </a:p>
           <a:p>
             <a:pPr lvl="1"/>
             <a:r>
-              <a:rPr lang="fr-FR" dirty="0"/>
+              <a:rPr lang="fr-FR"/>
               <a:t>Out-File</a:t>
             </a:r>
           </a:p>
           <a:p>
             <a:pPr lvl="1"/>
-            <a:endParaRPr lang="fr-FR" dirty="0"/>
+            <a:endParaRPr lang="fr-FR"/>
           </a:p>
           <a:p>
             <a:r>
-              <a:rPr lang="fr-CH" sz="2400" dirty="0"/>
+              <a:rPr lang="fr-CH" sz="2400"/>
               <a:t>Dates automatiques:</a:t>
             </a:r>
           </a:p>
           <a:p>
             <a:pPr lvl="1"/>
             <a:r>
-              <a:rPr lang="fr-CH" dirty="0" err="1"/>
+              <a:rPr lang="fr-CH" err="1"/>
               <a:t>Get</a:t>
             </a:r>
             <a:r>
-              <a:rPr lang="fr-CH" dirty="0"/>
+              <a:rPr lang="fr-CH"/>
               <a:t>-Date</a:t>
             </a:r>
           </a:p>
           <a:p>
             <a:pPr lvl="1"/>
-            <a:endParaRPr lang="fr-CH" dirty="0"/>
+            <a:endParaRPr lang="fr-CH"/>
           </a:p>
           <a:p>
             <a:r>
-              <a:rPr lang="fr-FR" sz="2400" dirty="0"/>
+              <a:rPr lang="fr-FR" sz="2400"/>
               <a:t>Message affiché en fin de service:</a:t>
             </a:r>
           </a:p>
           <a:p>
             <a:pPr lvl="1"/>
             <a:r>
-              <a:rPr lang="fr-FR" dirty="0"/>
+              <a:rPr lang="fr-FR"/>
               <a:t>Write-Host</a:t>
             </a:r>
           </a:p>
           <a:p>
-            <a:endParaRPr lang="fr-CH" sz="2000" dirty="0"/>
+            <a:endParaRPr lang="fr-CH" sz="2000"/>
           </a:p>
         </p:txBody>
       </p:sp>
@@ -17134,7 +16177,7 @@
         </p:xfrm>
         <a:graphic>
           <a:graphicData uri="http://schemas.openxmlformats.org/drawingml/2006/diagram">
-            <dgm:relIds xmlns:dgm="http://schemas.openxmlformats.org/drawingml/2006/diagram" xmlns:r="http://schemas.openxmlformats.org/officeDocument/2006/relationships" r:dm="rId2" r:lo="rId3" r:qs="rId4" r:cs="rId5"/>
+            <dgm:relIds xmlns:dgm="http://schemas.openxmlformats.org/drawingml/2006/diagram" xmlns:r="http://schemas.openxmlformats.org/officeDocument/2006/relationships" r:dm="rId3" r:lo="rId4" r:qs="rId5" r:cs="rId6"/>
           </a:graphicData>
         </a:graphic>
       </p:graphicFrame>
@@ -17271,7 +16314,11 @@
               </a:pPr>
               <a:r>
                 <a:rPr lang="fr-CH" sz="2000"/>
-                <a:t>Exemple du processus avec un schèma</a:t>
+                <a:t>Exemple du processus avec un </a:t>
+              </a:r>
+              <a:r>
+                <a:rPr lang="fr-CH" sz="2000" err="1"/>
+                <a:t>schèma</a:t>
               </a:r>
               <a:endParaRPr lang="en-US" sz="2000" kern="1200"/>
             </a:p>
@@ -17292,6 +16339,640 @@
 </file>
 
 <file path=ppt/slides/slide14.xml><?xml version="1.0" encoding="utf-8"?>
+<p:sld xmlns:a="http://schemas.openxmlformats.org/drawingml/2006/main" xmlns:r="http://schemas.openxmlformats.org/officeDocument/2006/relationships" xmlns:p="http://schemas.openxmlformats.org/presentationml/2006/main">
+  <p:cSld>
+    <p:spTree>
+      <p:nvGrpSpPr>
+        <p:cNvPr id="1" name=""/>
+        <p:cNvGrpSpPr/>
+        <p:nvPr/>
+      </p:nvGrpSpPr>
+      <p:grpSpPr>
+        <a:xfrm>
+          <a:off x="0" y="0"/>
+          <a:ext cx="0" cy="0"/>
+          <a:chOff x="0" y="0"/>
+          <a:chExt cx="0" cy="0"/>
+        </a:xfrm>
+      </p:grpSpPr>
+      <p:pic>
+        <p:nvPicPr>
+          <p:cNvPr id="2" name="Grafik 4">
+            <a:extLst>
+              <a:ext uri="{FF2B5EF4-FFF2-40B4-BE49-F238E27FC236}">
+                <a16:creationId xmlns:a16="http://schemas.microsoft.com/office/drawing/2014/main" id="{8585501C-FEAE-8207-51F0-55EE1B429236}"/>
+              </a:ext>
+            </a:extLst>
+          </p:cNvPr>
+          <p:cNvPicPr>
+            <a:picLocks noChangeAspect="1"/>
+          </p:cNvPicPr>
+          <p:nvPr/>
+        </p:nvPicPr>
+        <p:blipFill>
+          <a:blip r:embed="rId2"/>
+          <a:stretch>
+            <a:fillRect/>
+          </a:stretch>
+        </p:blipFill>
+        <p:spPr>
+          <a:xfrm>
+            <a:off x="0" y="0"/>
+            <a:ext cx="12191996" cy="4924455"/>
+          </a:xfrm>
+          <a:prstGeom prst="rect">
+            <a:avLst/>
+          </a:prstGeom>
+          <a:noFill/>
+          <a:ln cap="flat">
+            <a:noFill/>
+          </a:ln>
+        </p:spPr>
+      </p:pic>
+      <p:sp>
+        <p:nvSpPr>
+          <p:cNvPr id="3" name="Inhaltsplatzhalter 2">
+            <a:extLst>
+              <a:ext uri="{FF2B5EF4-FFF2-40B4-BE49-F238E27FC236}">
+                <a16:creationId xmlns:a16="http://schemas.microsoft.com/office/drawing/2014/main" id="{5BA430ED-044B-3E3E-0D00-16A16228C17B}"/>
+              </a:ext>
+            </a:extLst>
+          </p:cNvPr>
+          <p:cNvSpPr txBox="1">
+            <a:spLocks noGrp="1"/>
+          </p:cNvSpPr>
+          <p:nvPr>
+            <p:ph idx="1"/>
+          </p:nvPr>
+        </p:nvSpPr>
+        <p:spPr>
+          <a:xfrm>
+            <a:off x="838203" y="5018309"/>
+            <a:ext cx="10515600" cy="1158645"/>
+          </a:xfrm>
+        </p:spPr>
+        <p:txBody>
+          <a:bodyPr/>
+          <a:lstStyle/>
+          <a:p>
+            <a:pPr marL="0" lvl="0" indent="0">
+              <a:buNone/>
+            </a:pPr>
+            <a:r>
+              <a:rPr lang="fr-CH"/>
+              <a:t>Solution de l’exercice avec explication de chaque ligne de code.</a:t>
+            </a:r>
+            <a:endParaRPr lang="de-CH"/>
+          </a:p>
+        </p:txBody>
+      </p:sp>
+    </p:spTree>
+  </p:cSld>
+  <p:clrMapOvr>
+    <a:masterClrMapping/>
+  </p:clrMapOvr>
+</p:sld>
+</file>
+
+<file path=ppt/slides/slide15.xml><?xml version="1.0" encoding="utf-8"?>
+<p:sld xmlns:a="http://schemas.openxmlformats.org/drawingml/2006/main" xmlns:r="http://schemas.openxmlformats.org/officeDocument/2006/relationships" xmlns:p="http://schemas.openxmlformats.org/presentationml/2006/main">
+  <p:cSld>
+    <p:spTree>
+      <p:nvGrpSpPr>
+        <p:cNvPr id="1" name=""/>
+        <p:cNvGrpSpPr/>
+        <p:nvPr/>
+      </p:nvGrpSpPr>
+      <p:grpSpPr>
+        <a:xfrm>
+          <a:off x="0" y="0"/>
+          <a:ext cx="0" cy="0"/>
+          <a:chOff x="0" y="0"/>
+          <a:chExt cx="0" cy="0"/>
+        </a:xfrm>
+      </p:grpSpPr>
+      <p:pic>
+        <p:nvPicPr>
+          <p:cNvPr id="2" name="Inhaltsplatzhalter 4">
+            <a:extLst>
+              <a:ext uri="{FF2B5EF4-FFF2-40B4-BE49-F238E27FC236}">
+                <a16:creationId xmlns:a16="http://schemas.microsoft.com/office/drawing/2014/main" id="{B30D0891-8E55-BFE8-4643-B80BA7A14A63}"/>
+              </a:ext>
+            </a:extLst>
+          </p:cNvPr>
+          <p:cNvPicPr>
+            <a:picLocks noGrp="1" noChangeAspect="1"/>
+          </p:cNvPicPr>
+          <p:nvPr>
+            <p:ph idx="1"/>
+          </p:nvPr>
+        </p:nvPicPr>
+        <p:blipFill>
+          <a:blip r:embed="rId3"/>
+          <a:stretch>
+            <a:fillRect/>
+          </a:stretch>
+        </p:blipFill>
+        <p:spPr>
+          <a:xfrm>
+            <a:off x="0" y="-97968"/>
+            <a:ext cx="12191996" cy="4937760"/>
+          </a:xfrm>
+        </p:spPr>
+      </p:pic>
+      <p:sp>
+        <p:nvSpPr>
+          <p:cNvPr id="3" name="Inhaltsplatzhalter 2">
+            <a:extLst>
+              <a:ext uri="{FF2B5EF4-FFF2-40B4-BE49-F238E27FC236}">
+                <a16:creationId xmlns:a16="http://schemas.microsoft.com/office/drawing/2014/main" id="{C5D5FB87-1FAE-E42D-94EA-F6D295074703}"/>
+              </a:ext>
+            </a:extLst>
+          </p:cNvPr>
+          <p:cNvSpPr txBox="1"/>
+          <p:nvPr/>
+        </p:nvSpPr>
+        <p:spPr>
+          <a:xfrm>
+            <a:off x="838203" y="5018309"/>
+            <a:ext cx="10515600" cy="1545774"/>
+          </a:xfrm>
+          <a:prstGeom prst="rect">
+            <a:avLst/>
+          </a:prstGeom>
+          <a:noFill/>
+          <a:ln cap="flat">
+            <a:noFill/>
+          </a:ln>
+        </p:spPr>
+        <p:txBody>
+          <a:bodyPr vert="horz" wrap="square" lIns="91440" tIns="45720" rIns="91440" bIns="45720" anchor="t" anchorCtr="0" compatLnSpc="1">
+            <a:normAutofit/>
+          </a:bodyPr>
+          <a:lstStyle/>
+          <a:p>
+            <a:pPr marL="457200" marR="0" lvl="0" indent="-457200" algn="l" defTabSz="914400" rtl="0" fontAlgn="auto" hangingPunct="1">
+              <a:lnSpc>
+                <a:spcPct val="90000"/>
+              </a:lnSpc>
+              <a:spcBef>
+                <a:spcPts val="1000"/>
+              </a:spcBef>
+              <a:spcAft>
+                <a:spcPts val="0"/>
+              </a:spcAft>
+              <a:buFont typeface="Arial" panose="020B0604020202020204" pitchFamily="34" charset="0"/>
+              <a:buChar char="•"/>
+              <a:tabLst/>
+              <a:defRPr sz="1800" b="0" i="0" u="none" strike="noStrike" kern="0" cap="none" spc="0" baseline="0">
+                <a:solidFill>
+                  <a:srgbClr val="000000"/>
+                </a:solidFill>
+                <a:uFillTx/>
+              </a:defRPr>
+            </a:pPr>
+            <a:r>
+              <a:rPr lang="fr-CH" sz="2800" b="0" i="0" u="none" strike="noStrike" kern="1200" cap="none" spc="0" baseline="0">
+                <a:solidFill>
+                  <a:srgbClr val="FF0000"/>
+                </a:solidFill>
+                <a:uFillTx/>
+                <a:latin typeface="Aptos"/>
+              </a:rPr>
+              <a:t>Définit une variable avec le nom de l’utilisateur.</a:t>
+            </a:r>
+          </a:p>
+          <a:p>
+            <a:pPr marL="457200" marR="0" lvl="0" indent="-457200" algn="l" defTabSz="914400" rtl="0" fontAlgn="auto" hangingPunct="1">
+              <a:lnSpc>
+                <a:spcPct val="90000"/>
+              </a:lnSpc>
+              <a:spcBef>
+                <a:spcPts val="1000"/>
+              </a:spcBef>
+              <a:spcAft>
+                <a:spcPts val="0"/>
+              </a:spcAft>
+              <a:buFont typeface="Arial" panose="020B0604020202020204" pitchFamily="34" charset="0"/>
+              <a:buChar char="•"/>
+              <a:tabLst/>
+              <a:defRPr sz="1800" b="0" i="0" u="none" strike="noStrike" kern="0" cap="none" spc="0" baseline="0">
+                <a:solidFill>
+                  <a:srgbClr val="000000"/>
+                </a:solidFill>
+                <a:uFillTx/>
+              </a:defRPr>
+            </a:pPr>
+            <a:r>
+              <a:rPr lang="fr-CH" sz="2800" b="0" i="0" u="none" strike="noStrike" kern="1200" cap="none" spc="0" baseline="0">
+                <a:solidFill>
+                  <a:srgbClr val="E97132"/>
+                </a:solidFill>
+                <a:uFillTx/>
+                <a:latin typeface="Aptos"/>
+              </a:rPr>
+              <a:t>Récupère la date actuelle du système.</a:t>
+            </a:r>
+          </a:p>
+          <a:p>
+            <a:pPr marL="457200" marR="0" lvl="0" indent="-457200" algn="l" defTabSz="914400" rtl="0" fontAlgn="auto" hangingPunct="1">
+              <a:lnSpc>
+                <a:spcPct val="90000"/>
+              </a:lnSpc>
+              <a:spcBef>
+                <a:spcPts val="1000"/>
+              </a:spcBef>
+              <a:spcAft>
+                <a:spcPts val="0"/>
+              </a:spcAft>
+              <a:buFont typeface="Arial" panose="020B0604020202020204" pitchFamily="34" charset="0"/>
+              <a:buChar char="•"/>
+              <a:tabLst/>
+              <a:defRPr sz="1800" b="0" i="0" u="none" strike="noStrike" kern="0" cap="none" spc="0" baseline="0">
+                <a:solidFill>
+                  <a:srgbClr val="000000"/>
+                </a:solidFill>
+                <a:uFillTx/>
+              </a:defRPr>
+            </a:pPr>
+            <a:r>
+              <a:rPr lang="fr-CH" sz="2800" b="0" i="0" u="none" strike="noStrike" kern="1200" cap="none" spc="0" baseline="0">
+                <a:solidFill>
+                  <a:srgbClr val="00B050"/>
+                </a:solidFill>
+                <a:uFillTx/>
+                <a:latin typeface="Aptos"/>
+              </a:rPr>
+              <a:t>Construit le chemin du dossier avec le nom et la date.</a:t>
+            </a:r>
+            <a:endParaRPr lang="de-CH" sz="2800" b="0" i="0" u="none" strike="noStrike" kern="1200" cap="none" spc="0" baseline="0">
+              <a:solidFill>
+                <a:srgbClr val="00B050"/>
+              </a:solidFill>
+              <a:uFillTx/>
+              <a:latin typeface="Aptos"/>
+            </a:endParaRPr>
+          </a:p>
+        </p:txBody>
+      </p:sp>
+    </p:spTree>
+  </p:cSld>
+  <p:clrMapOvr>
+    <a:masterClrMapping/>
+  </p:clrMapOvr>
+</p:sld>
+</file>
+
+<file path=ppt/slides/slide16.xml><?xml version="1.0" encoding="utf-8"?>
+<p:sld xmlns:a="http://schemas.openxmlformats.org/drawingml/2006/main" xmlns:r="http://schemas.openxmlformats.org/officeDocument/2006/relationships" xmlns:p="http://schemas.openxmlformats.org/presentationml/2006/main">
+  <p:cSld>
+    <p:spTree>
+      <p:nvGrpSpPr>
+        <p:cNvPr id="1" name=""/>
+        <p:cNvGrpSpPr/>
+        <p:nvPr/>
+      </p:nvGrpSpPr>
+      <p:grpSpPr>
+        <a:xfrm>
+          <a:off x="0" y="0"/>
+          <a:ext cx="0" cy="0"/>
+          <a:chOff x="0" y="0"/>
+          <a:chExt cx="0" cy="0"/>
+        </a:xfrm>
+      </p:grpSpPr>
+      <p:pic>
+        <p:nvPicPr>
+          <p:cNvPr id="2" name="Grafik 4">
+            <a:extLst>
+              <a:ext uri="{FF2B5EF4-FFF2-40B4-BE49-F238E27FC236}">
+                <a16:creationId xmlns:a16="http://schemas.microsoft.com/office/drawing/2014/main" id="{B6F5C83E-F376-7171-019E-F2A58F5614CB}"/>
+              </a:ext>
+            </a:extLst>
+          </p:cNvPr>
+          <p:cNvPicPr>
+            <a:picLocks noChangeAspect="1"/>
+          </p:cNvPicPr>
+          <p:nvPr/>
+        </p:nvPicPr>
+        <p:blipFill>
+          <a:blip r:embed="rId3"/>
+          <a:stretch>
+            <a:fillRect/>
+          </a:stretch>
+        </p:blipFill>
+        <p:spPr>
+          <a:xfrm>
+            <a:off x="0" y="0"/>
+            <a:ext cx="12191996" cy="4924455"/>
+          </a:xfrm>
+          <a:prstGeom prst="rect">
+            <a:avLst/>
+          </a:prstGeom>
+          <a:noFill/>
+          <a:ln cap="flat">
+            <a:noFill/>
+          </a:ln>
+        </p:spPr>
+      </p:pic>
+      <p:sp>
+        <p:nvSpPr>
+          <p:cNvPr id="3" name="Inhaltsplatzhalter 2">
+            <a:extLst>
+              <a:ext uri="{FF2B5EF4-FFF2-40B4-BE49-F238E27FC236}">
+                <a16:creationId xmlns:a16="http://schemas.microsoft.com/office/drawing/2014/main" id="{D0D21DDF-944D-B1EA-3D8A-8480D6BD6819}"/>
+              </a:ext>
+            </a:extLst>
+          </p:cNvPr>
+          <p:cNvSpPr txBox="1"/>
+          <p:nvPr/>
+        </p:nvSpPr>
+        <p:spPr>
+          <a:xfrm>
+            <a:off x="838198" y="5018309"/>
+            <a:ext cx="10515600" cy="1730834"/>
+          </a:xfrm>
+          <a:prstGeom prst="rect">
+            <a:avLst/>
+          </a:prstGeom>
+          <a:noFill/>
+          <a:ln cap="flat">
+            <a:noFill/>
+          </a:ln>
+        </p:spPr>
+        <p:txBody>
+          <a:bodyPr vert="horz" wrap="square" lIns="91440" tIns="45720" rIns="91440" bIns="45720" anchor="t" anchorCtr="0" compatLnSpc="1">
+            <a:noAutofit/>
+          </a:bodyPr>
+          <a:lstStyle/>
+          <a:p>
+            <a:pPr marL="228600" lvl="0" indent="-228600">
+              <a:lnSpc>
+                <a:spcPct val="90000"/>
+              </a:lnSpc>
+              <a:spcBef>
+                <a:spcPts val="1000"/>
+              </a:spcBef>
+              <a:buSzPct val="100000"/>
+              <a:buFont typeface="Arial" pitchFamily="34"/>
+              <a:buChar char="•"/>
+              <a:defRPr sz="1800" b="0" i="0" u="none" strike="noStrike" kern="0" cap="none" spc="0" baseline="0">
+                <a:solidFill>
+                  <a:srgbClr val="000000"/>
+                </a:solidFill>
+                <a:uFillTx/>
+              </a:defRPr>
+            </a:pPr>
+            <a:r>
+              <a:rPr lang="fr-CH" sz="2800">
+                <a:solidFill>
+                  <a:srgbClr val="FFC000"/>
+                </a:solidFill>
+              </a:rPr>
+              <a:t>Utilise la variable $Chemin pour définir l’emplacement exact du dossier à créer.</a:t>
+            </a:r>
+          </a:p>
+          <a:p>
+            <a:pPr marL="228600" lvl="0" indent="-228600">
+              <a:lnSpc>
+                <a:spcPct val="90000"/>
+              </a:lnSpc>
+              <a:spcBef>
+                <a:spcPts val="1000"/>
+              </a:spcBef>
+              <a:buSzPct val="100000"/>
+              <a:buFont typeface="Arial" pitchFamily="34"/>
+              <a:buChar char="•"/>
+              <a:defRPr sz="1800" b="0" i="0" u="none" strike="noStrike" kern="0" cap="none" spc="0" baseline="0">
+                <a:solidFill>
+                  <a:srgbClr val="000000"/>
+                </a:solidFill>
+                <a:uFillTx/>
+              </a:defRPr>
+            </a:pPr>
+            <a:r>
+              <a:rPr lang="fr-CH" sz="2800">
+                <a:solidFill>
+                  <a:srgbClr val="7030A0"/>
+                </a:solidFill>
+              </a:rPr>
+              <a:t>Enregistre dans $Message un texte de confirmation avec la date actuelle</a:t>
+            </a:r>
+            <a:endParaRPr lang="de-CH" sz="2800">
+              <a:solidFill>
+                <a:srgbClr val="7030A0"/>
+              </a:solidFill>
+            </a:endParaRPr>
+          </a:p>
+        </p:txBody>
+      </p:sp>
+    </p:spTree>
+  </p:cSld>
+  <p:clrMapOvr>
+    <a:masterClrMapping/>
+  </p:clrMapOvr>
+</p:sld>
+</file>
+
+<file path=ppt/slides/slide17.xml><?xml version="1.0" encoding="utf-8"?>
+<p:sld xmlns:a="http://schemas.openxmlformats.org/drawingml/2006/main" xmlns:r="http://schemas.openxmlformats.org/officeDocument/2006/relationships" xmlns:p="http://schemas.openxmlformats.org/presentationml/2006/main">
+  <p:cSld>
+    <p:spTree>
+      <p:nvGrpSpPr>
+        <p:cNvPr id="1" name=""/>
+        <p:cNvGrpSpPr/>
+        <p:nvPr/>
+      </p:nvGrpSpPr>
+      <p:grpSpPr>
+        <a:xfrm>
+          <a:off x="0" y="0"/>
+          <a:ext cx="0" cy="0"/>
+          <a:chOff x="0" y="0"/>
+          <a:chExt cx="0" cy="0"/>
+        </a:xfrm>
+      </p:grpSpPr>
+      <p:pic>
+        <p:nvPicPr>
+          <p:cNvPr id="2" name="Grafik 4">
+            <a:extLst>
+              <a:ext uri="{FF2B5EF4-FFF2-40B4-BE49-F238E27FC236}">
+                <a16:creationId xmlns:a16="http://schemas.microsoft.com/office/drawing/2014/main" id="{9B52802C-6967-BF9E-9CA2-84C5E4B8126E}"/>
+              </a:ext>
+            </a:extLst>
+          </p:cNvPr>
+          <p:cNvPicPr>
+            <a:picLocks noChangeAspect="1"/>
+          </p:cNvPicPr>
+          <p:nvPr/>
+        </p:nvPicPr>
+        <p:blipFill>
+          <a:blip r:embed="rId3"/>
+          <a:stretch>
+            <a:fillRect/>
+          </a:stretch>
+        </p:blipFill>
+        <p:spPr>
+          <a:xfrm>
+            <a:off x="0" y="0"/>
+            <a:ext cx="12191996" cy="4924455"/>
+          </a:xfrm>
+          <a:prstGeom prst="rect">
+            <a:avLst/>
+          </a:prstGeom>
+          <a:noFill/>
+          <a:ln cap="flat">
+            <a:noFill/>
+          </a:ln>
+        </p:spPr>
+      </p:pic>
+      <p:sp>
+        <p:nvSpPr>
+          <p:cNvPr id="3" name="Inhaltsplatzhalter 2">
+            <a:extLst>
+              <a:ext uri="{FF2B5EF4-FFF2-40B4-BE49-F238E27FC236}">
+                <a16:creationId xmlns:a16="http://schemas.microsoft.com/office/drawing/2014/main" id="{1B688925-D083-21DA-6739-478DFB60F370}"/>
+              </a:ext>
+            </a:extLst>
+          </p:cNvPr>
+          <p:cNvSpPr txBox="1"/>
+          <p:nvPr/>
+        </p:nvSpPr>
+        <p:spPr>
+          <a:xfrm>
+            <a:off x="838203" y="5018309"/>
+            <a:ext cx="10515600" cy="1665520"/>
+          </a:xfrm>
+          <a:prstGeom prst="rect">
+            <a:avLst/>
+          </a:prstGeom>
+          <a:noFill/>
+          <a:ln cap="flat">
+            <a:noFill/>
+          </a:ln>
+        </p:spPr>
+        <p:txBody>
+          <a:bodyPr vert="horz" wrap="square" lIns="91440" tIns="45720" rIns="91440" bIns="45720" anchor="t" anchorCtr="0" compatLnSpc="1">
+            <a:normAutofit/>
+          </a:bodyPr>
+          <a:lstStyle/>
+          <a:p>
+            <a:pPr marL="228600" marR="0" lvl="0" indent="-228600" algn="l" defTabSz="914400" rtl="0" fontAlgn="auto" hangingPunct="1">
+              <a:lnSpc>
+                <a:spcPct val="90000"/>
+              </a:lnSpc>
+              <a:spcBef>
+                <a:spcPts val="1000"/>
+              </a:spcBef>
+              <a:spcAft>
+                <a:spcPts val="0"/>
+              </a:spcAft>
+              <a:buSzPct val="100000"/>
+              <a:buFont typeface="Arial" pitchFamily="34"/>
+              <a:buChar char="•"/>
+              <a:tabLst/>
+              <a:defRPr sz="1800" b="0" i="0" u="none" strike="noStrike" kern="0" cap="none" spc="0" baseline="0">
+                <a:solidFill>
+                  <a:srgbClr val="000000"/>
+                </a:solidFill>
+                <a:uFillTx/>
+              </a:defRPr>
+            </a:pPr>
+            <a:r>
+              <a:rPr lang="fr-CH" sz="2800" b="0" i="0" u="none" strike="noStrike" kern="1200" cap="none" spc="0" baseline="0">
+                <a:solidFill>
+                  <a:schemeClr val="accent4">
+                    <a:lumMod val="60000"/>
+                    <a:lumOff val="40000"/>
+                  </a:schemeClr>
+                </a:solidFill>
+                <a:uFillTx/>
+                <a:latin typeface="Aptos"/>
+              </a:rPr>
+              <a:t>Écrit le message de confirmation dans un fichier texte.</a:t>
+            </a:r>
+          </a:p>
+          <a:p>
+            <a:pPr marL="228600" marR="0" lvl="0" indent="-228600" algn="l" defTabSz="914400" rtl="0" fontAlgn="auto" hangingPunct="1">
+              <a:lnSpc>
+                <a:spcPct val="90000"/>
+              </a:lnSpc>
+              <a:spcBef>
+                <a:spcPts val="1000"/>
+              </a:spcBef>
+              <a:spcAft>
+                <a:spcPts val="0"/>
+              </a:spcAft>
+              <a:buSzPct val="100000"/>
+              <a:buFont typeface="Arial" pitchFamily="34"/>
+              <a:buChar char="•"/>
+              <a:tabLst/>
+              <a:defRPr sz="1800" b="0" i="0" u="none" strike="noStrike" kern="0" cap="none" spc="0" baseline="0">
+                <a:solidFill>
+                  <a:srgbClr val="000000"/>
+                </a:solidFill>
+                <a:uFillTx/>
+              </a:defRPr>
+            </a:pPr>
+            <a:r>
+              <a:rPr lang="fr-CH" sz="2800">
+                <a:solidFill>
+                  <a:srgbClr val="FF0000"/>
+                </a:solidFill>
+                <a:latin typeface="Aptos"/>
+              </a:rPr>
+              <a:t>Ajoute une ligne avec le nom et la date dans le fichier log.</a:t>
+            </a:r>
+          </a:p>
+          <a:p>
+            <a:pPr marL="228600" marR="0" lvl="0" indent="-228600" algn="l" defTabSz="914400" rtl="0" fontAlgn="auto" hangingPunct="1">
+              <a:lnSpc>
+                <a:spcPct val="90000"/>
+              </a:lnSpc>
+              <a:spcBef>
+                <a:spcPts val="1000"/>
+              </a:spcBef>
+              <a:spcAft>
+                <a:spcPts val="0"/>
+              </a:spcAft>
+              <a:buSzPct val="100000"/>
+              <a:buFont typeface="Arial" pitchFamily="34"/>
+              <a:buChar char="•"/>
+              <a:tabLst/>
+              <a:defRPr sz="1800" b="0" i="0" u="none" strike="noStrike" kern="0" cap="none" spc="0" baseline="0">
+                <a:solidFill>
+                  <a:srgbClr val="000000"/>
+                </a:solidFill>
+                <a:uFillTx/>
+              </a:defRPr>
+            </a:pPr>
+            <a:r>
+              <a:rPr lang="fr-CH" sz="2800" b="0" i="0" u="none" strike="noStrike" kern="1200" cap="none" spc="0" baseline="0">
+                <a:solidFill>
+                  <a:srgbClr val="7030A0"/>
+                </a:solidFill>
+                <a:uFillTx/>
+                <a:latin typeface="Aptos"/>
+              </a:rPr>
+              <a:t>Affiche un message final dans la console.</a:t>
+            </a:r>
+            <a:endParaRPr lang="de-CH" sz="2800" b="0" i="0" u="none" strike="noStrike" kern="1200" cap="none" spc="0" baseline="0">
+              <a:solidFill>
+                <a:srgbClr val="7030A0"/>
+              </a:solidFill>
+              <a:uFillTx/>
+              <a:latin typeface="Aptos"/>
+            </a:endParaRPr>
+          </a:p>
+        </p:txBody>
+      </p:sp>
+    </p:spTree>
+  </p:cSld>
+  <p:clrMapOvr>
+    <a:masterClrMapping/>
+  </p:clrMapOvr>
+</p:sld>
+</file>
+
+<file path=ppt/slides/slide18.xml><?xml version="1.0" encoding="utf-8"?>
 <p:sld xmlns:a="http://schemas.openxmlformats.org/drawingml/2006/main" xmlns:r="http://schemas.openxmlformats.org/officeDocument/2006/relationships" xmlns:p="http://schemas.openxmlformats.org/presentationml/2006/main">
   <p:cSld>
     <p:bg>
@@ -18105,7 +17786,7 @@
             <p:ph idx="1"/>
             <p:extLst>
               <p:ext uri="{D42A27DB-BD31-4B8C-83A1-F6EECF244321}">
-                <p14:modId xmlns:p14="http://schemas.microsoft.com/office/powerpoint/2010/main" val="3271334079"/>
+                <p14:modId xmlns:p14="http://schemas.microsoft.com/office/powerpoint/2010/main" val="702758129"/>
               </p:ext>
             </p:extLst>
           </p:nvPr>
@@ -18333,7 +18014,7 @@
           <a:lstStyle/>
           <a:p>
             <a:r>
-              <a:rPr lang="en-US" sz="6000" kern="1200" dirty="0">
+              <a:rPr lang="en-US" sz="6000" kern="1200">
                 <a:solidFill>
                   <a:schemeClr val="tx1"/>
                 </a:solidFill>
@@ -18344,7 +18025,7 @@
               <a:t>Plan de </a:t>
             </a:r>
             <a:r>
-              <a:rPr lang="en-US" sz="6000" kern="1200" dirty="0" err="1">
+              <a:rPr lang="en-US" sz="6000" kern="1200" err="1">
                 <a:solidFill>
                   <a:schemeClr val="tx1"/>
                 </a:solidFill>
@@ -18354,7 +18035,7 @@
               </a:rPr>
               <a:t>séquence</a:t>
             </a:r>
-            <a:endParaRPr lang="en-US" sz="6000" kern="1200" dirty="0">
+            <a:endParaRPr lang="en-US" sz="6000" kern="1200">
               <a:solidFill>
                 <a:schemeClr val="tx1"/>
               </a:solidFill>
@@ -19470,7 +19151,7 @@
               <a:buNone/>
             </a:pPr>
             <a:r>
-              <a:rPr lang="en-US" sz="3200" dirty="0">
+              <a:rPr lang="en-US" sz="3200">
                 <a:solidFill>
                   <a:srgbClr val="FFFFFF"/>
                 </a:solidFill>
@@ -19478,7 +19159,7 @@
               <a:t>PowerShell </a:t>
             </a:r>
             <a:r>
-              <a:rPr lang="en-US" sz="3200" dirty="0" err="1">
+              <a:rPr lang="en-US" sz="3200" err="1">
                 <a:solidFill>
                   <a:srgbClr val="FFFFFF"/>
                 </a:solidFill>
@@ -19486,7 +19167,7 @@
               <a:t>permet</a:t>
             </a:r>
             <a:r>
-              <a:rPr lang="en-US" sz="3200" dirty="0">
+              <a:rPr lang="en-US" sz="3200">
                 <a:solidFill>
                   <a:srgbClr val="FFFFFF"/>
                 </a:solidFill>
@@ -19494,7 +19175,7 @@
               <a:t> de </a:t>
             </a:r>
             <a:r>
-              <a:rPr lang="en-US" sz="3200" dirty="0" err="1">
+              <a:rPr lang="en-US" sz="3200" err="1">
                 <a:solidFill>
                   <a:srgbClr val="FFFFFF"/>
                 </a:solidFill>
@@ -19502,7 +19183,7 @@
               <a:t>créer</a:t>
             </a:r>
             <a:r>
-              <a:rPr lang="en-US" sz="3200" dirty="0">
+              <a:rPr lang="en-US" sz="3200">
                 <a:solidFill>
                   <a:srgbClr val="FFFFFF"/>
                 </a:solidFill>
@@ -19510,7 +19191,7 @@
               <a:t> et </a:t>
             </a:r>
             <a:r>
-              <a:rPr lang="en-US" sz="3200" dirty="0" err="1">
+              <a:rPr lang="en-US" sz="3200" err="1">
                 <a:solidFill>
                   <a:srgbClr val="FFFFFF"/>
                 </a:solidFill>
@@ -19518,7 +19199,7 @@
               <a:t>organiser</a:t>
             </a:r>
             <a:r>
-              <a:rPr lang="en-US" sz="3200" dirty="0">
+              <a:rPr lang="en-US" sz="3200">
                 <a:solidFill>
                   <a:srgbClr val="FFFFFF"/>
                 </a:solidFill>
@@ -19526,7 +19207,7 @@
               <a:t> </a:t>
             </a:r>
             <a:r>
-              <a:rPr lang="en-US" sz="3200" dirty="0" err="1">
+              <a:rPr lang="en-US" sz="3200" err="1">
                 <a:solidFill>
                   <a:srgbClr val="FFFFFF"/>
                 </a:solidFill>
@@ -19534,7 +19215,7 @@
               <a:t>automatiquement</a:t>
             </a:r>
             <a:r>
-              <a:rPr lang="en-US" sz="3200" dirty="0">
+              <a:rPr lang="en-US" sz="3200">
                 <a:solidFill>
                   <a:srgbClr val="FFFFFF"/>
                 </a:solidFill>
@@ -19542,7 +19223,7 @@
               <a:t> des dossiers et </a:t>
             </a:r>
             <a:r>
-              <a:rPr lang="en-US" sz="3200" dirty="0" err="1">
+              <a:rPr lang="en-US" sz="3200" err="1">
                 <a:solidFill>
                   <a:srgbClr val="FFFFFF"/>
                 </a:solidFill>
@@ -19550,7 +19231,7 @@
               <a:t>fichiers</a:t>
             </a:r>
             <a:r>
-              <a:rPr lang="en-US" sz="3200" dirty="0">
+              <a:rPr lang="en-US" sz="3200">
                 <a:solidFill>
                   <a:srgbClr val="FFFFFF"/>
                 </a:solidFill>
@@ -19565,7 +19246,7 @@
               </a:spcBef>
               <a:buNone/>
             </a:pPr>
-            <a:endParaRPr lang="en-US" sz="3200" dirty="0">
+            <a:endParaRPr lang="en-US" sz="3200">
               <a:solidFill>
                 <a:srgbClr val="FFFFFF"/>
               </a:solidFill>
@@ -19579,7 +19260,7 @@
               <a:buNone/>
             </a:pPr>
             <a:r>
-              <a:rPr lang="fr-CH" sz="2000" dirty="0">
+              <a:rPr lang="fr-CH" sz="2000">
                 <a:solidFill>
                   <a:srgbClr val="96607D"/>
                 </a:solidFill>
@@ -19594,7 +19275,7 @@
               <a:t>Créer renommer supprimer un fichier avec </a:t>
             </a:r>
             <a:r>
-              <a:rPr lang="fr-CH" sz="2000" dirty="0" err="1">
+              <a:rPr lang="fr-CH" sz="2000" err="1">
                 <a:solidFill>
                   <a:srgbClr val="96607D"/>
                 </a:solidFill>
@@ -19609,7 +19290,7 @@
               <a:t>Powershell</a:t>
             </a:r>
             <a:r>
-              <a:rPr lang="fr-CH" sz="2000" dirty="0">
+              <a:rPr lang="fr-CH" sz="2000">
                 <a:solidFill>
                   <a:srgbClr val="96607D"/>
                 </a:solidFill>
@@ -19623,7 +19304,7 @@
               </a:rPr>
               <a:t> ( débutant )</a:t>
             </a:r>
-            <a:endParaRPr lang="en-US" sz="2000" dirty="0">
+            <a:endParaRPr lang="en-US" sz="2000">
               <a:solidFill>
                 <a:srgbClr val="FFFFFF"/>
               </a:solidFill>
@@ -19636,7 +19317,7 @@
               </a:spcBef>
               <a:buNone/>
             </a:pPr>
-            <a:endParaRPr lang="en-US" sz="3200" dirty="0">
+            <a:endParaRPr lang="en-US" sz="3200">
               <a:solidFill>
                 <a:srgbClr val="FFFFFF"/>
               </a:solidFill>
@@ -19649,7 +19330,7 @@
               </a:spcBef>
               <a:buNone/>
             </a:pPr>
-            <a:endParaRPr lang="en-US" sz="3200" dirty="0">
+            <a:endParaRPr lang="en-US" sz="3200">
               <a:solidFill>
                 <a:srgbClr val="FFFFFF"/>
               </a:solidFill>
